--- a/submission/stage1/ELEC5620_Stage1_Slides.pptx
+++ b/submission/stage1/ELEC5620_Stage1_Slides.pptx
@@ -4,33 +4,36 @@
   <p:sldMasterIdLst>
     <p:sldMasterId id="2147483648" r:id="rId1"/>
   </p:sldMasterIdLst>
+  <p:notesMasterIdLst>
+    <p:notesMasterId r:id="rId26"/>
+  </p:notesMasterIdLst>
   <p:sldIdLst>
-    <p:sldId id="256" r:id="rId7"/>
-    <p:sldId id="257" r:id="rId9"/>
-    <p:sldId id="258" r:id="rId10"/>
-    <p:sldId id="259" r:id="rId11"/>
-    <p:sldId id="260" r:id="rId12"/>
-    <p:sldId id="261" r:id="rId13"/>
-    <p:sldId id="262" r:id="rId14"/>
-    <p:sldId id="263" r:id="rId15"/>
-    <p:sldId id="264" r:id="rId16"/>
-    <p:sldId id="265" r:id="rId17"/>
-    <p:sldId id="266" r:id="rId18"/>
-    <p:sldId id="267" r:id="rId19"/>
-    <p:sldId id="268" r:id="rId20"/>
-    <p:sldId id="269" r:id="rId21"/>
-    <p:sldId id="270" r:id="rId22"/>
-    <p:sldId id="271" r:id="rId23"/>
-    <p:sldId id="272" r:id="rId24"/>
-    <p:sldId id="273" r:id="rId25"/>
-    <p:sldId id="274" r:id="rId26"/>
-    <p:sldId id="275" r:id="rId27"/>
-    <p:sldId id="276" r:id="rId28"/>
-    <p:sldId id="277" r:id="rId29"/>
-    <p:sldId id="278" r:id="rId30"/>
-    <p:sldId id="279" r:id="rId31"/>
+    <p:sldId id="256" r:id="rId2"/>
+    <p:sldId id="257" r:id="rId3"/>
+    <p:sldId id="258" r:id="rId4"/>
+    <p:sldId id="259" r:id="rId5"/>
+    <p:sldId id="260" r:id="rId6"/>
+    <p:sldId id="261" r:id="rId7"/>
+    <p:sldId id="262" r:id="rId8"/>
+    <p:sldId id="263" r:id="rId9"/>
+    <p:sldId id="264" r:id="rId10"/>
+    <p:sldId id="265" r:id="rId11"/>
+    <p:sldId id="266" r:id="rId12"/>
+    <p:sldId id="267" r:id="rId13"/>
+    <p:sldId id="268" r:id="rId14"/>
+    <p:sldId id="269" r:id="rId15"/>
+    <p:sldId id="270" r:id="rId16"/>
+    <p:sldId id="271" r:id="rId17"/>
+    <p:sldId id="272" r:id="rId18"/>
+    <p:sldId id="273" r:id="rId19"/>
+    <p:sldId id="274" r:id="rId20"/>
+    <p:sldId id="275" r:id="rId21"/>
+    <p:sldId id="276" r:id="rId22"/>
+    <p:sldId id="277" r:id="rId23"/>
+    <p:sldId id="278" r:id="rId24"/>
+    <p:sldId id="279" r:id="rId25"/>
   </p:sldIdLst>
-  <p:sldSz cx="12192000" cy="6858000" type="screen4x3"/>
+  <p:sldSz cx="12192000" cy="6858000"/>
   <p:notesSz cx="6858000" cy="9144000"/>
   <p:defaultTextStyle>
     <a:defPPr>
@@ -127,11 +130,27 @@
       </a:defRPr>
     </a:lvl9pPr>
   </p:defaultTextStyle>
+  <p:extLst>
+    <p:ext uri="{EFAFB233-063F-42B5-8137-9DF3F51BA10A}">
+      <p15:sldGuideLst xmlns:p15="http://schemas.microsoft.com/office/powerpoint/2012/main">
+        <p15:guide id="1" orient="horz" pos="2160">
+          <p15:clr>
+            <a:srgbClr val="A4A3A4"/>
+          </p15:clr>
+        </p15:guide>
+        <p15:guide id="2" pos="2880">
+          <p15:clr>
+            <a:srgbClr val="A4A3A4"/>
+          </p15:clr>
+        </p15:guide>
+      </p15:sldGuideLst>
+    </p:ext>
+  </p:extLst>
 </p:presentation>
 </file>
 
 <file path=ppt/notesMasters/notesMaster1.xml><?xml version="1.0" encoding="utf-8"?>
-<p:notesMaster xmlns:a="http://schemas.openxmlformats.org/drawingml/2006/main" xmlns:p="http://schemas.openxmlformats.org/presentationml/2006/main" xmlns:r="http://schemas.openxmlformats.org/officeDocument/2006/relationships">
+<p:notesMaster xmlns:a="http://schemas.openxmlformats.org/drawingml/2006/main" xmlns:r="http://schemas.openxmlformats.org/officeDocument/2006/relationships" xmlns:p="http://schemas.openxmlformats.org/presentationml/2006/main">
   <p:cSld>
     <p:bg>
       <p:bgRef idx="1001">
@@ -152,241 +171,16 @@
           <a:chExt cx="0" cy="0"/>
         </a:xfrm>
       </p:grpSpPr>
-      <p:sp>
-        <p:nvSpPr>
-          <p:cNvPr id="2" name="Header Placeholder 1"/>
-          <p:cNvSpPr>
-            <a:spLocks noGrp="1"/>
-          </p:cNvSpPr>
-          <p:nvPr>
-            <p:ph type="hdr" sz="quarter"/>
-          </p:nvPr>
-        </p:nvSpPr>
-        <p:spPr>
-          <a:xfrm>
-            <a:off x="0" y="0"/>
-            <a:ext cx="2971800" cy="457200"/>
-          </a:xfrm>
-          <a:prstGeom prst="rect">
-            <a:avLst/>
-          </a:prstGeom>
-        </p:spPr>
-        <p:txBody>
-          <a:bodyPr vert="horz" lIns="91440" tIns="45720" rIns="91440" bIns="45720" rtlCol="0"/>
-          <a:lstStyle>
-            <a:lvl1pPr algn="l">
-              <a:defRPr sz="1200"/>
-            </a:lvl1pPr>
-          </a:lstStyle>
-          <a:p>
-            <a:endParaRPr lang="en-US"/>
-          </a:p>
-        </p:txBody>
-      </p:sp>
-      <p:sp>
-        <p:nvSpPr>
-          <p:cNvPr id="3" name="Date Placeholder 2"/>
-          <p:cNvSpPr>
-            <a:spLocks noGrp="1"/>
-          </p:cNvSpPr>
-          <p:nvPr>
-            <p:ph type="dt" idx="1"/>
-          </p:nvPr>
-        </p:nvSpPr>
-        <p:spPr>
-          <a:xfrm>
-            <a:off x="3884613" y="0"/>
-            <a:ext cx="2971800" cy="457200"/>
-          </a:xfrm>
-          <a:prstGeom prst="rect">
-            <a:avLst/>
-          </a:prstGeom>
-        </p:spPr>
-        <p:txBody>
-          <a:bodyPr vert="horz" lIns="91440" tIns="45720" rIns="91440" bIns="45720" rtlCol="0"/>
-          <a:lstStyle>
-            <a:lvl1pPr algn="r">
-              <a:defRPr sz="1200"/>
-            </a:lvl1pPr>
-          </a:lstStyle>
-          <a:p>
-            <a:fld id="{0F89C1C7-3DCD-1040-A9CF-14679D8B5DDD}" type="datetimeFigureOut">
-              <a:rPr lang="en-US" smtClean="0"/>
-              <a:t>10/17/16</a:t>
-            </a:fld>
-            <a:endParaRPr lang="en-US"/>
-          </a:p>
-        </p:txBody>
-      </p:sp>
-      <p:sp>
-        <p:nvSpPr>
-          <p:cNvPr id="4" name="Slide Image Placeholder 3"/>
-          <p:cNvSpPr>
-            <a:spLocks noGrp="1" noRot="1" noChangeAspect="1"/>
-          </p:cNvSpPr>
-          <p:nvPr>
-            <p:ph type="sldImg" idx="2"/>
-          </p:nvPr>
-        </p:nvSpPr>
-        <p:spPr>
-          <a:xfrm>
-            <a:off x="1143000" y="685800"/>
-            <a:ext cx="4572000" cy="3429000"/>
-          </a:xfrm>
-          <a:prstGeom prst="rect">
-            <a:avLst/>
-          </a:prstGeom>
-          <a:noFill/>
-          <a:ln w="12700">
-            <a:solidFill>
-              <a:prstClr val="black"/>
-            </a:solidFill>
-          </a:ln>
-        </p:spPr>
-        <p:txBody>
-          <a:bodyPr vert="horz" lIns="91440" tIns="45720" rIns="91440" bIns="45720" rtlCol="0" anchor="ctr"/>
-          <a:lstStyle/>
-          <a:p>
-            <a:endParaRPr lang="en-US"/>
-          </a:p>
-        </p:txBody>
-      </p:sp>
-      <p:sp>
-        <p:nvSpPr>
-          <p:cNvPr id="5" name="Notes Placeholder 4"/>
-          <p:cNvSpPr>
-            <a:spLocks noGrp="1"/>
-          </p:cNvSpPr>
-          <p:nvPr>
-            <p:ph type="body" sz="quarter" idx="3"/>
-          </p:nvPr>
-        </p:nvSpPr>
-        <p:spPr>
-          <a:xfrm>
-            <a:off x="685800" y="4343400"/>
-            <a:ext cx="5486400" cy="4114800"/>
-          </a:xfrm>
-          <a:prstGeom prst="rect">
-            <a:avLst/>
-          </a:prstGeom>
-        </p:spPr>
-        <p:txBody>
-          <a:bodyPr vert="horz" lIns="91440" tIns="45720" rIns="91440" bIns="45720" rtlCol="0"/>
-          <a:lstStyle/>
-          <a:p>
-            <a:pPr lvl="0"/>
-            <a:r>
-              <a:rPr lang="en-US" smtClean="0"/>
-              <a:t>Click to edit Master text styles</a:t>
-            </a:r>
-          </a:p>
-          <a:p>
-            <a:pPr lvl="1"/>
-            <a:r>
-              <a:rPr lang="en-US" smtClean="0"/>
-              <a:t>Second level</a:t>
-            </a:r>
-          </a:p>
-          <a:p>
-            <a:pPr lvl="2"/>
-            <a:r>
-              <a:rPr lang="en-US" smtClean="0"/>
-              <a:t>Third level</a:t>
-            </a:r>
-          </a:p>
-          <a:p>
-            <a:pPr lvl="3"/>
-            <a:r>
-              <a:rPr lang="en-US" smtClean="0"/>
-              <a:t>Fourth level</a:t>
-            </a:r>
-          </a:p>
-          <a:p>
-            <a:pPr lvl="4"/>
-            <a:r>
-              <a:rPr lang="en-US" smtClean="0"/>
-              <a:t>Fifth level</a:t>
-            </a:r>
-            <a:endParaRPr lang="en-US"/>
-          </a:p>
-        </p:txBody>
-      </p:sp>
-      <p:sp>
-        <p:nvSpPr>
-          <p:cNvPr id="6" name="Footer Placeholder 5"/>
-          <p:cNvSpPr>
-            <a:spLocks noGrp="1"/>
-          </p:cNvSpPr>
-          <p:nvPr>
-            <p:ph type="ftr" sz="quarter" idx="4"/>
-          </p:nvPr>
-        </p:nvSpPr>
-        <p:spPr>
-          <a:xfrm>
-            <a:off x="0" y="8685213"/>
-            <a:ext cx="2971800" cy="457200"/>
-          </a:xfrm>
-          <a:prstGeom prst="rect">
-            <a:avLst/>
-          </a:prstGeom>
-        </p:spPr>
-        <p:txBody>
-          <a:bodyPr vert="horz" lIns="91440" tIns="45720" rIns="91440" bIns="45720" rtlCol="0" anchor="b"/>
-          <a:lstStyle>
-            <a:lvl1pPr algn="l">
-              <a:defRPr sz="1200"/>
-            </a:lvl1pPr>
-          </a:lstStyle>
-          <a:p>
-            <a:endParaRPr lang="en-US"/>
-          </a:p>
-        </p:txBody>
-      </p:sp>
-      <p:sp>
-        <p:nvSpPr>
-          <p:cNvPr id="7" name="Slide Number Placeholder 6"/>
-          <p:cNvSpPr>
-            <a:spLocks noGrp="1"/>
-          </p:cNvSpPr>
-          <p:nvPr>
-            <p:ph type="sldNum" sz="quarter" idx="5"/>
-          </p:nvPr>
-        </p:nvSpPr>
-        <p:spPr>
-          <a:xfrm>
-            <a:off x="3884613" y="8685213"/>
-            <a:ext cx="2971800" cy="457200"/>
-          </a:xfrm>
-          <a:prstGeom prst="rect">
-            <a:avLst/>
-          </a:prstGeom>
-        </p:spPr>
-        <p:txBody>
-          <a:bodyPr vert="horz" lIns="91440" tIns="45720" rIns="91440" bIns="45720" rtlCol="0" anchor="b"/>
-          <a:lstStyle>
-            <a:lvl1pPr algn="r">
-              <a:defRPr sz="1200"/>
-            </a:lvl1pPr>
-          </a:lstStyle>
-          <a:p>
-            <a:fld id="{BB5E49A5-4136-284D-997B-48E1D791AD67}" type="slidenum">
-              <a:rPr lang="en-US" smtClean="0"/>
-              <a:t>‹#›</a:t>
-            </a:fld>
-            <a:endParaRPr lang="en-US"/>
-          </a:p>
-        </p:txBody>
-      </p:sp>
     </p:spTree>
     <p:extLst>
       <p:ext uri="{BB962C8B-B14F-4D97-AF65-F5344CB8AC3E}">
-        <p14:creationId xmlns:p14="http://schemas.microsoft.com/office/powerpoint/2010/main" val="2623252185"/>
+        <p14:creationId xmlns:p14="http://schemas.microsoft.com/office/powerpoint/2010/main" val="3376550369"/>
       </p:ext>
     </p:extLst>
   </p:cSld>
   <p:clrMap bg1="lt1" tx1="dk1" bg2="lt2" tx2="dk2" accent1="accent1" accent2="accent2" accent3="accent3" accent4="accent4" accent5="accent5" accent6="accent6" hlink="hlink" folHlink="folHlink"/>
   <p:notesStyle>
-    <a:lvl1pPr marL="0" algn="l" defTabSz="457200" rtl="0" eaLnBrk="1" latinLnBrk="0" hangingPunct="1">
+    <a:lvl1pPr marL="0" algn="l" defTabSz="914400" rtl="0" eaLnBrk="1" latinLnBrk="0" hangingPunct="1">
       <a:defRPr sz="1200" kern="1200">
         <a:solidFill>
           <a:schemeClr val="tx1"/>
@@ -396,7 +190,7 @@
         <a:cs typeface="+mn-cs"/>
       </a:defRPr>
     </a:lvl1pPr>
-    <a:lvl2pPr marL="457200" algn="l" defTabSz="457200" rtl="0" eaLnBrk="1" latinLnBrk="0" hangingPunct="1">
+    <a:lvl2pPr marL="457200" algn="l" defTabSz="914400" rtl="0" eaLnBrk="1" latinLnBrk="0" hangingPunct="1">
       <a:defRPr sz="1200" kern="1200">
         <a:solidFill>
           <a:schemeClr val="tx1"/>
@@ -406,7 +200,7 @@
         <a:cs typeface="+mn-cs"/>
       </a:defRPr>
     </a:lvl2pPr>
-    <a:lvl3pPr marL="914400" algn="l" defTabSz="457200" rtl="0" eaLnBrk="1" latinLnBrk="0" hangingPunct="1">
+    <a:lvl3pPr marL="914400" algn="l" defTabSz="914400" rtl="0" eaLnBrk="1" latinLnBrk="0" hangingPunct="1">
       <a:defRPr sz="1200" kern="1200">
         <a:solidFill>
           <a:schemeClr val="tx1"/>
@@ -416,7 +210,7 @@
         <a:cs typeface="+mn-cs"/>
       </a:defRPr>
     </a:lvl3pPr>
-    <a:lvl4pPr marL="1371600" algn="l" defTabSz="457200" rtl="0" eaLnBrk="1" latinLnBrk="0" hangingPunct="1">
+    <a:lvl4pPr marL="1371600" algn="l" defTabSz="914400" rtl="0" eaLnBrk="1" latinLnBrk="0" hangingPunct="1">
       <a:defRPr sz="1200" kern="1200">
         <a:solidFill>
           <a:schemeClr val="tx1"/>
@@ -426,7 +220,7 @@
         <a:cs typeface="+mn-cs"/>
       </a:defRPr>
     </a:lvl4pPr>
-    <a:lvl5pPr marL="1828800" algn="l" defTabSz="457200" rtl="0" eaLnBrk="1" latinLnBrk="0" hangingPunct="1">
+    <a:lvl5pPr marL="1828800" algn="l" defTabSz="914400" rtl="0" eaLnBrk="1" latinLnBrk="0" hangingPunct="1">
       <a:defRPr sz="1200" kern="1200">
         <a:solidFill>
           <a:schemeClr val="tx1"/>
@@ -436,7 +230,7 @@
         <a:cs typeface="+mn-cs"/>
       </a:defRPr>
     </a:lvl5pPr>
-    <a:lvl6pPr marL="2286000" algn="l" defTabSz="457200" rtl="0" eaLnBrk="1" latinLnBrk="0" hangingPunct="1">
+    <a:lvl6pPr marL="2286000" algn="l" defTabSz="914400" rtl="0" eaLnBrk="1" latinLnBrk="0" hangingPunct="1">
       <a:defRPr sz="1200" kern="1200">
         <a:solidFill>
           <a:schemeClr val="tx1"/>
@@ -446,7 +240,7 @@
         <a:cs typeface="+mn-cs"/>
       </a:defRPr>
     </a:lvl6pPr>
-    <a:lvl7pPr marL="2743200" algn="l" defTabSz="457200" rtl="0" eaLnBrk="1" latinLnBrk="0" hangingPunct="1">
+    <a:lvl7pPr marL="2743200" algn="l" defTabSz="914400" rtl="0" eaLnBrk="1" latinLnBrk="0" hangingPunct="1">
       <a:defRPr sz="1200" kern="1200">
         <a:solidFill>
           <a:schemeClr val="tx1"/>
@@ -456,7 +250,7 @@
         <a:cs typeface="+mn-cs"/>
       </a:defRPr>
     </a:lvl7pPr>
-    <a:lvl8pPr marL="3200400" algn="l" defTabSz="457200" rtl="0" eaLnBrk="1" latinLnBrk="0" hangingPunct="1">
+    <a:lvl8pPr marL="3200400" algn="l" defTabSz="914400" rtl="0" eaLnBrk="1" latinLnBrk="0" hangingPunct="1">
       <a:defRPr sz="1200" kern="1200">
         <a:solidFill>
           <a:schemeClr val="tx1"/>
@@ -466,7 +260,7 @@
         <a:cs typeface="+mn-cs"/>
       </a:defRPr>
     </a:lvl8pPr>
-    <a:lvl9pPr marL="3657600" algn="l" defTabSz="457200" rtl="0" eaLnBrk="1" latinLnBrk="0" hangingPunct="1">
+    <a:lvl9pPr marL="3657600" algn="l" defTabSz="914400" rtl="0" eaLnBrk="1" latinLnBrk="0" hangingPunct="1">
       <a:defRPr sz="1200" kern="1200">
         <a:solidFill>
           <a:schemeClr val="tx1"/>
@@ -481,7 +275,7 @@
 </file>
 
 <file path=ppt/notesSlides/notesSlide1.xml><?xml version="1.0" encoding="utf-8"?>
-<p:notes xmlns:a="http://schemas.openxmlformats.org/drawingml/2006/main" xmlns:p="http://schemas.openxmlformats.org/presentationml/2006/main" xmlns:r="http://schemas.openxmlformats.org/officeDocument/2006/relationships">
+<p:notes xmlns:a="http://schemas.openxmlformats.org/drawingml/2006/main" xmlns:r="http://schemas.openxmlformats.org/officeDocument/2006/relationships" xmlns:p="http://schemas.openxmlformats.org/presentationml/2006/main">
   <p:cSld>
     <p:spTree>
       <p:nvGrpSpPr>
@@ -501,7 +295,7 @@
         <p:nvSpPr>
           <p:cNvPr id="2" name="Slide Image Placeholder 1"/>
           <p:cNvSpPr>
-            <a:spLocks noGrp="1"/>
+            <a:spLocks noGrp="1" noRot="1" noChangeAspect="1"/>
           </p:cNvSpPr>
           <p:nvPr>
             <p:ph type="sldImg" idx="2"/>
@@ -516,7 +310,7 @@
             <a:spLocks noGrp="1"/>
           </p:cNvSpPr>
           <p:nvPr>
-            <p:ph type="body" idx="3" sz="quarter"/>
+            <p:ph type="body" sz="quarter" idx="3"/>
           </p:nvPr>
         </p:nvSpPr>
         <p:spPr/>
@@ -537,7 +331,7 @@
             <a:spLocks noGrp="1"/>
           </p:cNvSpPr>
           <p:nvPr>
-            <p:ph type="sldNum" idx="5" sz="quarter"/>
+            <p:ph type="sldNum" sz="quarter" idx="5"/>
           </p:nvPr>
         </p:nvSpPr>
         <p:spPr/>
@@ -551,7 +345,7 @@
 </file>
 
 <file path=ppt/notesSlides/notesSlide10.xml><?xml version="1.0" encoding="utf-8"?>
-<p:notes xmlns:a="http://schemas.openxmlformats.org/drawingml/2006/main" xmlns:p="http://schemas.openxmlformats.org/presentationml/2006/main" xmlns:r="http://schemas.openxmlformats.org/officeDocument/2006/relationships">
+<p:notes xmlns:a="http://schemas.openxmlformats.org/drawingml/2006/main" xmlns:r="http://schemas.openxmlformats.org/officeDocument/2006/relationships" xmlns:p="http://schemas.openxmlformats.org/presentationml/2006/main">
   <p:cSld>
     <p:spTree>
       <p:nvGrpSpPr>
@@ -571,7 +365,7 @@
         <p:nvSpPr>
           <p:cNvPr id="2" name="Slide Image Placeholder 1"/>
           <p:cNvSpPr>
-            <a:spLocks noGrp="1"/>
+            <a:spLocks noGrp="1" noRot="1" noChangeAspect="1"/>
           </p:cNvSpPr>
           <p:nvPr>
             <p:ph type="sldImg" idx="2"/>
@@ -586,7 +380,7 @@
             <a:spLocks noGrp="1"/>
           </p:cNvSpPr>
           <p:nvPr>
-            <p:ph type="body" idx="3" sz="quarter"/>
+            <p:ph type="body" sz="quarter" idx="3"/>
           </p:nvPr>
         </p:nvSpPr>
         <p:spPr/>
@@ -607,7 +401,7 @@
             <a:spLocks noGrp="1"/>
           </p:cNvSpPr>
           <p:nvPr>
-            <p:ph type="sldNum" idx="5" sz="quarter"/>
+            <p:ph type="sldNum" sz="quarter" idx="5"/>
           </p:nvPr>
         </p:nvSpPr>
         <p:spPr/>
@@ -621,7 +415,7 @@
 </file>
 
 <file path=ppt/notesSlides/notesSlide11.xml><?xml version="1.0" encoding="utf-8"?>
-<p:notes xmlns:a="http://schemas.openxmlformats.org/drawingml/2006/main" xmlns:p="http://schemas.openxmlformats.org/presentationml/2006/main" xmlns:r="http://schemas.openxmlformats.org/officeDocument/2006/relationships">
+<p:notes xmlns:a="http://schemas.openxmlformats.org/drawingml/2006/main" xmlns:r="http://schemas.openxmlformats.org/officeDocument/2006/relationships" xmlns:p="http://schemas.openxmlformats.org/presentationml/2006/main">
   <p:cSld>
     <p:spTree>
       <p:nvGrpSpPr>
@@ -641,7 +435,7 @@
         <p:nvSpPr>
           <p:cNvPr id="2" name="Slide Image Placeholder 1"/>
           <p:cNvSpPr>
-            <a:spLocks noGrp="1"/>
+            <a:spLocks noGrp="1" noRot="1" noChangeAspect="1"/>
           </p:cNvSpPr>
           <p:nvPr>
             <p:ph type="sldImg" idx="2"/>
@@ -656,7 +450,7 @@
             <a:spLocks noGrp="1"/>
           </p:cNvSpPr>
           <p:nvPr>
-            <p:ph type="body" idx="3" sz="quarter"/>
+            <p:ph type="body" sz="quarter" idx="3"/>
           </p:nvPr>
         </p:nvSpPr>
         <p:spPr/>
@@ -677,7 +471,7 @@
             <a:spLocks noGrp="1"/>
           </p:cNvSpPr>
           <p:nvPr>
-            <p:ph type="sldNum" idx="5" sz="quarter"/>
+            <p:ph type="sldNum" sz="quarter" idx="5"/>
           </p:nvPr>
         </p:nvSpPr>
         <p:spPr/>
@@ -691,7 +485,7 @@
 </file>
 
 <file path=ppt/notesSlides/notesSlide12.xml><?xml version="1.0" encoding="utf-8"?>
-<p:notes xmlns:a="http://schemas.openxmlformats.org/drawingml/2006/main" xmlns:p="http://schemas.openxmlformats.org/presentationml/2006/main" xmlns:r="http://schemas.openxmlformats.org/officeDocument/2006/relationships">
+<p:notes xmlns:a="http://schemas.openxmlformats.org/drawingml/2006/main" xmlns:r="http://schemas.openxmlformats.org/officeDocument/2006/relationships" xmlns:p="http://schemas.openxmlformats.org/presentationml/2006/main">
   <p:cSld>
     <p:spTree>
       <p:nvGrpSpPr>
@@ -711,7 +505,7 @@
         <p:nvSpPr>
           <p:cNvPr id="2" name="Slide Image Placeholder 1"/>
           <p:cNvSpPr>
-            <a:spLocks noGrp="1"/>
+            <a:spLocks noGrp="1" noRot="1" noChangeAspect="1"/>
           </p:cNvSpPr>
           <p:nvPr>
             <p:ph type="sldImg" idx="2"/>
@@ -726,7 +520,7 @@
             <a:spLocks noGrp="1"/>
           </p:cNvSpPr>
           <p:nvPr>
-            <p:ph type="body" idx="3" sz="quarter"/>
+            <p:ph type="body" sz="quarter" idx="3"/>
           </p:nvPr>
         </p:nvSpPr>
         <p:spPr/>
@@ -747,7 +541,7 @@
             <a:spLocks noGrp="1"/>
           </p:cNvSpPr>
           <p:nvPr>
-            <p:ph type="sldNum" idx="5" sz="quarter"/>
+            <p:ph type="sldNum" sz="quarter" idx="5"/>
           </p:nvPr>
         </p:nvSpPr>
         <p:spPr/>
@@ -761,7 +555,7 @@
 </file>
 
 <file path=ppt/notesSlides/notesSlide13.xml><?xml version="1.0" encoding="utf-8"?>
-<p:notes xmlns:a="http://schemas.openxmlformats.org/drawingml/2006/main" xmlns:p="http://schemas.openxmlformats.org/presentationml/2006/main" xmlns:r="http://schemas.openxmlformats.org/officeDocument/2006/relationships">
+<p:notes xmlns:a="http://schemas.openxmlformats.org/drawingml/2006/main" xmlns:r="http://schemas.openxmlformats.org/officeDocument/2006/relationships" xmlns:p="http://schemas.openxmlformats.org/presentationml/2006/main">
   <p:cSld>
     <p:spTree>
       <p:nvGrpSpPr>
@@ -781,7 +575,7 @@
         <p:nvSpPr>
           <p:cNvPr id="2" name="Slide Image Placeholder 1"/>
           <p:cNvSpPr>
-            <a:spLocks noGrp="1"/>
+            <a:spLocks noGrp="1" noRot="1" noChangeAspect="1"/>
           </p:cNvSpPr>
           <p:nvPr>
             <p:ph type="sldImg" idx="2"/>
@@ -796,7 +590,7 @@
             <a:spLocks noGrp="1"/>
           </p:cNvSpPr>
           <p:nvPr>
-            <p:ph type="body" idx="3" sz="quarter"/>
+            <p:ph type="body" sz="quarter" idx="3"/>
           </p:nvPr>
         </p:nvSpPr>
         <p:spPr/>
@@ -817,7 +611,7 @@
             <a:spLocks noGrp="1"/>
           </p:cNvSpPr>
           <p:nvPr>
-            <p:ph type="sldNum" idx="5" sz="quarter"/>
+            <p:ph type="sldNum" sz="quarter" idx="5"/>
           </p:nvPr>
         </p:nvSpPr>
         <p:spPr/>
@@ -831,7 +625,7 @@
 </file>
 
 <file path=ppt/notesSlides/notesSlide14.xml><?xml version="1.0" encoding="utf-8"?>
-<p:notes xmlns:a="http://schemas.openxmlformats.org/drawingml/2006/main" xmlns:p="http://schemas.openxmlformats.org/presentationml/2006/main" xmlns:r="http://schemas.openxmlformats.org/officeDocument/2006/relationships">
+<p:notes xmlns:a="http://schemas.openxmlformats.org/drawingml/2006/main" xmlns:r="http://schemas.openxmlformats.org/officeDocument/2006/relationships" xmlns:p="http://schemas.openxmlformats.org/presentationml/2006/main">
   <p:cSld>
     <p:spTree>
       <p:nvGrpSpPr>
@@ -851,7 +645,7 @@
         <p:nvSpPr>
           <p:cNvPr id="2" name="Slide Image Placeholder 1"/>
           <p:cNvSpPr>
-            <a:spLocks noGrp="1"/>
+            <a:spLocks noGrp="1" noRot="1" noChangeAspect="1"/>
           </p:cNvSpPr>
           <p:nvPr>
             <p:ph type="sldImg" idx="2"/>
@@ -866,7 +660,7 @@
             <a:spLocks noGrp="1"/>
           </p:cNvSpPr>
           <p:nvPr>
-            <p:ph type="body" idx="3" sz="quarter"/>
+            <p:ph type="body" sz="quarter" idx="3"/>
           </p:nvPr>
         </p:nvSpPr>
         <p:spPr/>
@@ -887,7 +681,7 @@
             <a:spLocks noGrp="1"/>
           </p:cNvSpPr>
           <p:nvPr>
-            <p:ph type="sldNum" idx="5" sz="quarter"/>
+            <p:ph type="sldNum" sz="quarter" idx="5"/>
           </p:nvPr>
         </p:nvSpPr>
         <p:spPr/>
@@ -901,7 +695,7 @@
 </file>
 
 <file path=ppt/notesSlides/notesSlide15.xml><?xml version="1.0" encoding="utf-8"?>
-<p:notes xmlns:a="http://schemas.openxmlformats.org/drawingml/2006/main" xmlns:p="http://schemas.openxmlformats.org/presentationml/2006/main" xmlns:r="http://schemas.openxmlformats.org/officeDocument/2006/relationships">
+<p:notes xmlns:a="http://schemas.openxmlformats.org/drawingml/2006/main" xmlns:r="http://schemas.openxmlformats.org/officeDocument/2006/relationships" xmlns:p="http://schemas.openxmlformats.org/presentationml/2006/main">
   <p:cSld>
     <p:spTree>
       <p:nvGrpSpPr>
@@ -921,7 +715,7 @@
         <p:nvSpPr>
           <p:cNvPr id="2" name="Slide Image Placeholder 1"/>
           <p:cNvSpPr>
-            <a:spLocks noGrp="1"/>
+            <a:spLocks noGrp="1" noRot="1" noChangeAspect="1"/>
           </p:cNvSpPr>
           <p:nvPr>
             <p:ph type="sldImg" idx="2"/>
@@ -936,7 +730,7 @@
             <a:spLocks noGrp="1"/>
           </p:cNvSpPr>
           <p:nvPr>
-            <p:ph type="body" idx="3" sz="quarter"/>
+            <p:ph type="body" sz="quarter" idx="3"/>
           </p:nvPr>
         </p:nvSpPr>
         <p:spPr/>
@@ -957,7 +751,7 @@
             <a:spLocks noGrp="1"/>
           </p:cNvSpPr>
           <p:nvPr>
-            <p:ph type="sldNum" idx="5" sz="quarter"/>
+            <p:ph type="sldNum" sz="quarter" idx="5"/>
           </p:nvPr>
         </p:nvSpPr>
         <p:spPr/>
@@ -971,7 +765,7 @@
 </file>
 
 <file path=ppt/notesSlides/notesSlide16.xml><?xml version="1.0" encoding="utf-8"?>
-<p:notes xmlns:a="http://schemas.openxmlformats.org/drawingml/2006/main" xmlns:p="http://schemas.openxmlformats.org/presentationml/2006/main" xmlns:r="http://schemas.openxmlformats.org/officeDocument/2006/relationships">
+<p:notes xmlns:a="http://schemas.openxmlformats.org/drawingml/2006/main" xmlns:r="http://schemas.openxmlformats.org/officeDocument/2006/relationships" xmlns:p="http://schemas.openxmlformats.org/presentationml/2006/main">
   <p:cSld>
     <p:spTree>
       <p:nvGrpSpPr>
@@ -991,7 +785,7 @@
         <p:nvSpPr>
           <p:cNvPr id="2" name="Slide Image Placeholder 1"/>
           <p:cNvSpPr>
-            <a:spLocks noGrp="1"/>
+            <a:spLocks noGrp="1" noRot="1" noChangeAspect="1"/>
           </p:cNvSpPr>
           <p:nvPr>
             <p:ph type="sldImg" idx="2"/>
@@ -1006,7 +800,7 @@
             <a:spLocks noGrp="1"/>
           </p:cNvSpPr>
           <p:nvPr>
-            <p:ph type="body" idx="3" sz="quarter"/>
+            <p:ph type="body" sz="quarter" idx="3"/>
           </p:nvPr>
         </p:nvSpPr>
         <p:spPr/>
@@ -1027,7 +821,7 @@
             <a:spLocks noGrp="1"/>
           </p:cNvSpPr>
           <p:nvPr>
-            <p:ph type="sldNum" idx="5" sz="quarter"/>
+            <p:ph type="sldNum" sz="quarter" idx="5"/>
           </p:nvPr>
         </p:nvSpPr>
         <p:spPr/>
@@ -1041,7 +835,7 @@
 </file>
 
 <file path=ppt/notesSlides/notesSlide17.xml><?xml version="1.0" encoding="utf-8"?>
-<p:notes xmlns:a="http://schemas.openxmlformats.org/drawingml/2006/main" xmlns:p="http://schemas.openxmlformats.org/presentationml/2006/main" xmlns:r="http://schemas.openxmlformats.org/officeDocument/2006/relationships">
+<p:notes xmlns:a="http://schemas.openxmlformats.org/drawingml/2006/main" xmlns:r="http://schemas.openxmlformats.org/officeDocument/2006/relationships" xmlns:p="http://schemas.openxmlformats.org/presentationml/2006/main">
   <p:cSld>
     <p:spTree>
       <p:nvGrpSpPr>
@@ -1061,7 +855,7 @@
         <p:nvSpPr>
           <p:cNvPr id="2" name="Slide Image Placeholder 1"/>
           <p:cNvSpPr>
-            <a:spLocks noGrp="1"/>
+            <a:spLocks noGrp="1" noRot="1" noChangeAspect="1"/>
           </p:cNvSpPr>
           <p:nvPr>
             <p:ph type="sldImg" idx="2"/>
@@ -1076,7 +870,7 @@
             <a:spLocks noGrp="1"/>
           </p:cNvSpPr>
           <p:nvPr>
-            <p:ph type="body" idx="3" sz="quarter"/>
+            <p:ph type="body" sz="quarter" idx="3"/>
           </p:nvPr>
         </p:nvSpPr>
         <p:spPr/>
@@ -1097,7 +891,7 @@
             <a:spLocks noGrp="1"/>
           </p:cNvSpPr>
           <p:nvPr>
-            <p:ph type="sldNum" idx="5" sz="quarter"/>
+            <p:ph type="sldNum" sz="quarter" idx="5"/>
           </p:nvPr>
         </p:nvSpPr>
         <p:spPr/>
@@ -1111,7 +905,7 @@
 </file>
 
 <file path=ppt/notesSlides/notesSlide18.xml><?xml version="1.0" encoding="utf-8"?>
-<p:notes xmlns:a="http://schemas.openxmlformats.org/drawingml/2006/main" xmlns:p="http://schemas.openxmlformats.org/presentationml/2006/main" xmlns:r="http://schemas.openxmlformats.org/officeDocument/2006/relationships">
+<p:notes xmlns:a="http://schemas.openxmlformats.org/drawingml/2006/main" xmlns:r="http://schemas.openxmlformats.org/officeDocument/2006/relationships" xmlns:p="http://schemas.openxmlformats.org/presentationml/2006/main">
   <p:cSld>
     <p:spTree>
       <p:nvGrpSpPr>
@@ -1131,7 +925,7 @@
         <p:nvSpPr>
           <p:cNvPr id="2" name="Slide Image Placeholder 1"/>
           <p:cNvSpPr>
-            <a:spLocks noGrp="1"/>
+            <a:spLocks noGrp="1" noRot="1" noChangeAspect="1"/>
           </p:cNvSpPr>
           <p:nvPr>
             <p:ph type="sldImg" idx="2"/>
@@ -1146,7 +940,7 @@
             <a:spLocks noGrp="1"/>
           </p:cNvSpPr>
           <p:nvPr>
-            <p:ph type="body" idx="3" sz="quarter"/>
+            <p:ph type="body" sz="quarter" idx="3"/>
           </p:nvPr>
         </p:nvSpPr>
         <p:spPr/>
@@ -1167,7 +961,7 @@
             <a:spLocks noGrp="1"/>
           </p:cNvSpPr>
           <p:nvPr>
-            <p:ph type="sldNum" idx="5" sz="quarter"/>
+            <p:ph type="sldNum" sz="quarter" idx="5"/>
           </p:nvPr>
         </p:nvSpPr>
         <p:spPr/>
@@ -1181,7 +975,7 @@
 </file>
 
 <file path=ppt/notesSlides/notesSlide19.xml><?xml version="1.0" encoding="utf-8"?>
-<p:notes xmlns:a="http://schemas.openxmlformats.org/drawingml/2006/main" xmlns:p="http://schemas.openxmlformats.org/presentationml/2006/main" xmlns:r="http://schemas.openxmlformats.org/officeDocument/2006/relationships">
+<p:notes xmlns:a="http://schemas.openxmlformats.org/drawingml/2006/main" xmlns:r="http://schemas.openxmlformats.org/officeDocument/2006/relationships" xmlns:p="http://schemas.openxmlformats.org/presentationml/2006/main">
   <p:cSld>
     <p:spTree>
       <p:nvGrpSpPr>
@@ -1201,7 +995,7 @@
         <p:nvSpPr>
           <p:cNvPr id="2" name="Slide Image Placeholder 1"/>
           <p:cNvSpPr>
-            <a:spLocks noGrp="1"/>
+            <a:spLocks noGrp="1" noRot="1" noChangeAspect="1"/>
           </p:cNvSpPr>
           <p:nvPr>
             <p:ph type="sldImg" idx="2"/>
@@ -1216,7 +1010,7 @@
             <a:spLocks noGrp="1"/>
           </p:cNvSpPr>
           <p:nvPr>
-            <p:ph type="body" idx="3" sz="quarter"/>
+            <p:ph type="body" sz="quarter" idx="3"/>
           </p:nvPr>
         </p:nvSpPr>
         <p:spPr/>
@@ -1225,8 +1019,10 @@
           <a:lstStyle/>
           <a:p>
             <a:r>
-              <a:t>Speaker D. [About 25 seconds. Name your ad hoc requirement and use case, then point to where the LLM sits in each diagram and which code checks it. Replace the three placeholders with your diagrams.]</a:t>
-            </a:r>
+              <a:rPr lang="en-US"/>
+              <a:t>I am Jiahang Bian, member D. UC-D1 shows both specialists working from evidence: the guide uses map coordinates and weather data; dining uses restaurant candidates and confirmed dietary preferences. The LLM drafts guidance, while deterministic code validates its output and budget. Forecasts are distinguished from climate context, and unavailable weather is disclosed.</a:t>
+            </a:r>
+            <a:endParaRPr/>
           </a:p>
         </p:txBody>
       </p:sp>
@@ -1237,7 +1033,7 @@
             <a:spLocks noGrp="1"/>
           </p:cNvSpPr>
           <p:nvPr>
-            <p:ph type="sldNum" idx="5" sz="quarter"/>
+            <p:ph type="sldNum" sz="quarter" idx="5"/>
           </p:nvPr>
         </p:nvSpPr>
         <p:spPr/>
@@ -1251,7 +1047,7 @@
 </file>
 
 <file path=ppt/notesSlides/notesSlide2.xml><?xml version="1.0" encoding="utf-8"?>
-<p:notes xmlns:a="http://schemas.openxmlformats.org/drawingml/2006/main" xmlns:p="http://schemas.openxmlformats.org/presentationml/2006/main" xmlns:r="http://schemas.openxmlformats.org/officeDocument/2006/relationships">
+<p:notes xmlns:a="http://schemas.openxmlformats.org/drawingml/2006/main" xmlns:r="http://schemas.openxmlformats.org/officeDocument/2006/relationships" xmlns:p="http://schemas.openxmlformats.org/presentationml/2006/main">
   <p:cSld>
     <p:spTree>
       <p:nvGrpSpPr>
@@ -1271,7 +1067,7 @@
         <p:nvSpPr>
           <p:cNvPr id="2" name="Slide Image Placeholder 1"/>
           <p:cNvSpPr>
-            <a:spLocks noGrp="1"/>
+            <a:spLocks noGrp="1" noRot="1" noChangeAspect="1"/>
           </p:cNvSpPr>
           <p:nvPr>
             <p:ph type="sldImg" idx="2"/>
@@ -1286,7 +1082,7 @@
             <a:spLocks noGrp="1"/>
           </p:cNvSpPr>
           <p:nvPr>
-            <p:ph type="body" idx="3" sz="quarter"/>
+            <p:ph type="body" sz="quarter" idx="3"/>
           </p:nvPr>
         </p:nvSpPr>
         <p:spPr/>
@@ -1307,7 +1103,7 @@
             <a:spLocks noGrp="1"/>
           </p:cNvSpPr>
           <p:nvPr>
-            <p:ph type="sldNum" idx="5" sz="quarter"/>
+            <p:ph type="sldNum" sz="quarter" idx="5"/>
           </p:nvPr>
         </p:nvSpPr>
         <p:spPr/>
@@ -1321,7 +1117,7 @@
 </file>
 
 <file path=ppt/notesSlides/notesSlide20.xml><?xml version="1.0" encoding="utf-8"?>
-<p:notes xmlns:a="http://schemas.openxmlformats.org/drawingml/2006/main" xmlns:p="http://schemas.openxmlformats.org/presentationml/2006/main" xmlns:r="http://schemas.openxmlformats.org/officeDocument/2006/relationships">
+<p:notes xmlns:a="http://schemas.openxmlformats.org/drawingml/2006/main" xmlns:r="http://schemas.openxmlformats.org/officeDocument/2006/relationships" xmlns:p="http://schemas.openxmlformats.org/presentationml/2006/main">
   <p:cSld>
     <p:spTree>
       <p:nvGrpSpPr>
@@ -1341,7 +1137,7 @@
         <p:nvSpPr>
           <p:cNvPr id="2" name="Slide Image Placeholder 1"/>
           <p:cNvSpPr>
-            <a:spLocks noGrp="1"/>
+            <a:spLocks noGrp="1" noRot="1" noChangeAspect="1"/>
           </p:cNvSpPr>
           <p:nvPr>
             <p:ph type="sldImg" idx="2"/>
@@ -1356,7 +1152,7 @@
             <a:spLocks noGrp="1"/>
           </p:cNvSpPr>
           <p:nvPr>
-            <p:ph type="body" idx="3" sz="quarter"/>
+            <p:ph type="body" sz="quarter" idx="3"/>
           </p:nvPr>
         </p:nvSpPr>
         <p:spPr/>
@@ -1377,7 +1173,7 @@
             <a:spLocks noGrp="1"/>
           </p:cNvSpPr>
           <p:nvPr>
-            <p:ph type="sldNum" idx="5" sz="quarter"/>
+            <p:ph type="sldNum" sz="quarter" idx="5"/>
           </p:nvPr>
         </p:nvSpPr>
         <p:spPr/>
@@ -1391,7 +1187,7 @@
 </file>
 
 <file path=ppt/notesSlides/notesSlide21.xml><?xml version="1.0" encoding="utf-8"?>
-<p:notes xmlns:a="http://schemas.openxmlformats.org/drawingml/2006/main" xmlns:p="http://schemas.openxmlformats.org/presentationml/2006/main" xmlns:r="http://schemas.openxmlformats.org/officeDocument/2006/relationships">
+<p:notes xmlns:a="http://schemas.openxmlformats.org/drawingml/2006/main" xmlns:r="http://schemas.openxmlformats.org/officeDocument/2006/relationships" xmlns:p="http://schemas.openxmlformats.org/presentationml/2006/main">
   <p:cSld>
     <p:spTree>
       <p:nvGrpSpPr>
@@ -1411,7 +1207,7 @@
         <p:nvSpPr>
           <p:cNvPr id="2" name="Slide Image Placeholder 1"/>
           <p:cNvSpPr>
-            <a:spLocks noGrp="1"/>
+            <a:spLocks noGrp="1" noRot="1" noChangeAspect="1"/>
           </p:cNvSpPr>
           <p:nvPr>
             <p:ph type="sldImg" idx="2"/>
@@ -1426,7 +1222,7 @@
             <a:spLocks noGrp="1"/>
           </p:cNvSpPr>
           <p:nvPr>
-            <p:ph type="body" idx="3" sz="quarter"/>
+            <p:ph type="body" sz="quarter" idx="3"/>
           </p:nvPr>
         </p:nvSpPr>
         <p:spPr/>
@@ -1447,7 +1243,7 @@
             <a:spLocks noGrp="1"/>
           </p:cNvSpPr>
           <p:nvPr>
-            <p:ph type="sldNum" idx="5" sz="quarter"/>
+            <p:ph type="sldNum" sz="quarter" idx="5"/>
           </p:nvPr>
         </p:nvSpPr>
         <p:spPr/>
@@ -1461,7 +1257,7 @@
 </file>
 
 <file path=ppt/notesSlides/notesSlide22.xml><?xml version="1.0" encoding="utf-8"?>
-<p:notes xmlns:a="http://schemas.openxmlformats.org/drawingml/2006/main" xmlns:p="http://schemas.openxmlformats.org/presentationml/2006/main" xmlns:r="http://schemas.openxmlformats.org/officeDocument/2006/relationships">
+<p:notes xmlns:a="http://schemas.openxmlformats.org/drawingml/2006/main" xmlns:r="http://schemas.openxmlformats.org/officeDocument/2006/relationships" xmlns:p="http://schemas.openxmlformats.org/presentationml/2006/main">
   <p:cSld>
     <p:spTree>
       <p:nvGrpSpPr>
@@ -1481,7 +1277,7 @@
         <p:nvSpPr>
           <p:cNvPr id="2" name="Slide Image Placeholder 1"/>
           <p:cNvSpPr>
-            <a:spLocks noGrp="1"/>
+            <a:spLocks noGrp="1" noRot="1" noChangeAspect="1"/>
           </p:cNvSpPr>
           <p:nvPr>
             <p:ph type="sldImg" idx="2"/>
@@ -1496,7 +1292,7 @@
             <a:spLocks noGrp="1"/>
           </p:cNvSpPr>
           <p:nvPr>
-            <p:ph type="body" idx="3" sz="quarter"/>
+            <p:ph type="body" sz="quarter" idx="3"/>
           </p:nvPr>
         </p:nvSpPr>
         <p:spPr/>
@@ -1517,7 +1313,7 @@
             <a:spLocks noGrp="1"/>
           </p:cNvSpPr>
           <p:nvPr>
-            <p:ph type="sldNum" idx="5" sz="quarter"/>
+            <p:ph type="sldNum" sz="quarter" idx="5"/>
           </p:nvPr>
         </p:nvSpPr>
         <p:spPr/>
@@ -1531,7 +1327,7 @@
 </file>
 
 <file path=ppt/notesSlides/notesSlide23.xml><?xml version="1.0" encoding="utf-8"?>
-<p:notes xmlns:a="http://schemas.openxmlformats.org/drawingml/2006/main" xmlns:p="http://schemas.openxmlformats.org/presentationml/2006/main" xmlns:r="http://schemas.openxmlformats.org/officeDocument/2006/relationships">
+<p:notes xmlns:a="http://schemas.openxmlformats.org/drawingml/2006/main" xmlns:r="http://schemas.openxmlformats.org/officeDocument/2006/relationships" xmlns:p="http://schemas.openxmlformats.org/presentationml/2006/main">
   <p:cSld>
     <p:spTree>
       <p:nvGrpSpPr>
@@ -1551,7 +1347,7 @@
         <p:nvSpPr>
           <p:cNvPr id="2" name="Slide Image Placeholder 1"/>
           <p:cNvSpPr>
-            <a:spLocks noGrp="1"/>
+            <a:spLocks noGrp="1" noRot="1" noChangeAspect="1"/>
           </p:cNvSpPr>
           <p:nvPr>
             <p:ph type="sldImg" idx="2"/>
@@ -1566,7 +1362,7 @@
             <a:spLocks noGrp="1"/>
           </p:cNvSpPr>
           <p:nvPr>
-            <p:ph type="body" idx="3" sz="quarter"/>
+            <p:ph type="body" sz="quarter" idx="3"/>
           </p:nvPr>
         </p:nvSpPr>
         <p:spPr/>
@@ -1587,7 +1383,7 @@
             <a:spLocks noGrp="1"/>
           </p:cNvSpPr>
           <p:nvPr>
-            <p:ph type="sldNum" idx="5" sz="quarter"/>
+            <p:ph type="sldNum" sz="quarter" idx="5"/>
           </p:nvPr>
         </p:nvSpPr>
         <p:spPr/>
@@ -1601,7 +1397,7 @@
 </file>
 
 <file path=ppt/notesSlides/notesSlide24.xml><?xml version="1.0" encoding="utf-8"?>
-<p:notes xmlns:a="http://schemas.openxmlformats.org/drawingml/2006/main" xmlns:p="http://schemas.openxmlformats.org/presentationml/2006/main" xmlns:r="http://schemas.openxmlformats.org/officeDocument/2006/relationships">
+<p:notes xmlns:a="http://schemas.openxmlformats.org/drawingml/2006/main" xmlns:r="http://schemas.openxmlformats.org/officeDocument/2006/relationships" xmlns:p="http://schemas.openxmlformats.org/presentationml/2006/main">
   <p:cSld>
     <p:spTree>
       <p:nvGrpSpPr>
@@ -1621,7 +1417,7 @@
         <p:nvSpPr>
           <p:cNvPr id="2" name="Slide Image Placeholder 1"/>
           <p:cNvSpPr>
-            <a:spLocks noGrp="1"/>
+            <a:spLocks noGrp="1" noRot="1" noChangeAspect="1"/>
           </p:cNvSpPr>
           <p:nvPr>
             <p:ph type="sldImg" idx="2"/>
@@ -1636,7 +1432,7 @@
             <a:spLocks noGrp="1"/>
           </p:cNvSpPr>
           <p:nvPr>
-            <p:ph type="body" idx="3" sz="quarter"/>
+            <p:ph type="body" sz="quarter" idx="3"/>
           </p:nvPr>
         </p:nvSpPr>
         <p:spPr/>
@@ -1657,7 +1453,7 @@
             <a:spLocks noGrp="1"/>
           </p:cNvSpPr>
           <p:nvPr>
-            <p:ph type="sldNum" idx="5" sz="quarter"/>
+            <p:ph type="sldNum" sz="quarter" idx="5"/>
           </p:nvPr>
         </p:nvSpPr>
         <p:spPr/>
@@ -1671,7 +1467,7 @@
 </file>
 
 <file path=ppt/notesSlides/notesSlide3.xml><?xml version="1.0" encoding="utf-8"?>
-<p:notes xmlns:a="http://schemas.openxmlformats.org/drawingml/2006/main" xmlns:p="http://schemas.openxmlformats.org/presentationml/2006/main" xmlns:r="http://schemas.openxmlformats.org/officeDocument/2006/relationships">
+<p:notes xmlns:a="http://schemas.openxmlformats.org/drawingml/2006/main" xmlns:r="http://schemas.openxmlformats.org/officeDocument/2006/relationships" xmlns:p="http://schemas.openxmlformats.org/presentationml/2006/main">
   <p:cSld>
     <p:spTree>
       <p:nvGrpSpPr>
@@ -1691,7 +1487,7 @@
         <p:nvSpPr>
           <p:cNvPr id="2" name="Slide Image Placeholder 1"/>
           <p:cNvSpPr>
-            <a:spLocks noGrp="1"/>
+            <a:spLocks noGrp="1" noRot="1" noChangeAspect="1"/>
           </p:cNvSpPr>
           <p:nvPr>
             <p:ph type="sldImg" idx="2"/>
@@ -1706,7 +1502,7 @@
             <a:spLocks noGrp="1"/>
           </p:cNvSpPr>
           <p:nvPr>
-            <p:ph type="body" idx="3" sz="quarter"/>
+            <p:ph type="body" sz="quarter" idx="3"/>
           </p:nvPr>
         </p:nvSpPr>
         <p:spPr/>
@@ -1727,7 +1523,7 @@
             <a:spLocks noGrp="1"/>
           </p:cNvSpPr>
           <p:nvPr>
-            <p:ph type="sldNum" idx="5" sz="quarter"/>
+            <p:ph type="sldNum" sz="quarter" idx="5"/>
           </p:nvPr>
         </p:nvSpPr>
         <p:spPr/>
@@ -1741,7 +1537,7 @@
 </file>
 
 <file path=ppt/notesSlides/notesSlide4.xml><?xml version="1.0" encoding="utf-8"?>
-<p:notes xmlns:a="http://schemas.openxmlformats.org/drawingml/2006/main" xmlns:p="http://schemas.openxmlformats.org/presentationml/2006/main" xmlns:r="http://schemas.openxmlformats.org/officeDocument/2006/relationships">
+<p:notes xmlns:a="http://schemas.openxmlformats.org/drawingml/2006/main" xmlns:r="http://schemas.openxmlformats.org/officeDocument/2006/relationships" xmlns:p="http://schemas.openxmlformats.org/presentationml/2006/main">
   <p:cSld>
     <p:spTree>
       <p:nvGrpSpPr>
@@ -1761,7 +1557,7 @@
         <p:nvSpPr>
           <p:cNvPr id="2" name="Slide Image Placeholder 1"/>
           <p:cNvSpPr>
-            <a:spLocks noGrp="1"/>
+            <a:spLocks noGrp="1" noRot="1" noChangeAspect="1"/>
           </p:cNvSpPr>
           <p:nvPr>
             <p:ph type="sldImg" idx="2"/>
@@ -1776,7 +1572,7 @@
             <a:spLocks noGrp="1"/>
           </p:cNvSpPr>
           <p:nvPr>
-            <p:ph type="body" idx="3" sz="quarter"/>
+            <p:ph type="body" sz="quarter" idx="3"/>
           </p:nvPr>
         </p:nvSpPr>
         <p:spPr/>
@@ -1797,7 +1593,7 @@
             <a:spLocks noGrp="1"/>
           </p:cNvSpPr>
           <p:nvPr>
-            <p:ph type="sldNum" idx="5" sz="quarter"/>
+            <p:ph type="sldNum" sz="quarter" idx="5"/>
           </p:nvPr>
         </p:nvSpPr>
         <p:spPr/>
@@ -1811,7 +1607,7 @@
 </file>
 
 <file path=ppt/notesSlides/notesSlide5.xml><?xml version="1.0" encoding="utf-8"?>
-<p:notes xmlns:a="http://schemas.openxmlformats.org/drawingml/2006/main" xmlns:p="http://schemas.openxmlformats.org/presentationml/2006/main" xmlns:r="http://schemas.openxmlformats.org/officeDocument/2006/relationships">
+<p:notes xmlns:a="http://schemas.openxmlformats.org/drawingml/2006/main" xmlns:r="http://schemas.openxmlformats.org/officeDocument/2006/relationships" xmlns:p="http://schemas.openxmlformats.org/presentationml/2006/main">
   <p:cSld>
     <p:spTree>
       <p:nvGrpSpPr>
@@ -1831,7 +1627,7 @@
         <p:nvSpPr>
           <p:cNvPr id="2" name="Slide Image Placeholder 1"/>
           <p:cNvSpPr>
-            <a:spLocks noGrp="1"/>
+            <a:spLocks noGrp="1" noRot="1" noChangeAspect="1"/>
           </p:cNvSpPr>
           <p:nvPr>
             <p:ph type="sldImg" idx="2"/>
@@ -1846,7 +1642,7 @@
             <a:spLocks noGrp="1"/>
           </p:cNvSpPr>
           <p:nvPr>
-            <p:ph type="body" idx="3" sz="quarter"/>
+            <p:ph type="body" sz="quarter" idx="3"/>
           </p:nvPr>
         </p:nvSpPr>
         <p:spPr/>
@@ -1867,7 +1663,7 @@
             <a:spLocks noGrp="1"/>
           </p:cNvSpPr>
           <p:nvPr>
-            <p:ph type="sldNum" idx="5" sz="quarter"/>
+            <p:ph type="sldNum" sz="quarter" idx="5"/>
           </p:nvPr>
         </p:nvSpPr>
         <p:spPr/>
@@ -1881,7 +1677,7 @@
 </file>
 
 <file path=ppt/notesSlides/notesSlide6.xml><?xml version="1.0" encoding="utf-8"?>
-<p:notes xmlns:a="http://schemas.openxmlformats.org/drawingml/2006/main" xmlns:p="http://schemas.openxmlformats.org/presentationml/2006/main" xmlns:r="http://schemas.openxmlformats.org/officeDocument/2006/relationships">
+<p:notes xmlns:a="http://schemas.openxmlformats.org/drawingml/2006/main" xmlns:r="http://schemas.openxmlformats.org/officeDocument/2006/relationships" xmlns:p="http://schemas.openxmlformats.org/presentationml/2006/main">
   <p:cSld>
     <p:spTree>
       <p:nvGrpSpPr>
@@ -1901,7 +1697,7 @@
         <p:nvSpPr>
           <p:cNvPr id="2" name="Slide Image Placeholder 1"/>
           <p:cNvSpPr>
-            <a:spLocks noGrp="1"/>
+            <a:spLocks noGrp="1" noRot="1" noChangeAspect="1"/>
           </p:cNvSpPr>
           <p:nvPr>
             <p:ph type="sldImg" idx="2"/>
@@ -1916,7 +1712,7 @@
             <a:spLocks noGrp="1"/>
           </p:cNvSpPr>
           <p:nvPr>
-            <p:ph type="body" idx="3" sz="quarter"/>
+            <p:ph type="body" sz="quarter" idx="3"/>
           </p:nvPr>
         </p:nvSpPr>
         <p:spPr/>
@@ -1937,7 +1733,7 @@
             <a:spLocks noGrp="1"/>
           </p:cNvSpPr>
           <p:nvPr>
-            <p:ph type="sldNum" idx="5" sz="quarter"/>
+            <p:ph type="sldNum" sz="quarter" idx="5"/>
           </p:nvPr>
         </p:nvSpPr>
         <p:spPr/>
@@ -1951,7 +1747,7 @@
 </file>
 
 <file path=ppt/notesSlides/notesSlide7.xml><?xml version="1.0" encoding="utf-8"?>
-<p:notes xmlns:a="http://schemas.openxmlformats.org/drawingml/2006/main" xmlns:p="http://schemas.openxmlformats.org/presentationml/2006/main" xmlns:r="http://schemas.openxmlformats.org/officeDocument/2006/relationships">
+<p:notes xmlns:a="http://schemas.openxmlformats.org/drawingml/2006/main" xmlns:r="http://schemas.openxmlformats.org/officeDocument/2006/relationships" xmlns:p="http://schemas.openxmlformats.org/presentationml/2006/main">
   <p:cSld>
     <p:spTree>
       <p:nvGrpSpPr>
@@ -1971,7 +1767,7 @@
         <p:nvSpPr>
           <p:cNvPr id="2" name="Slide Image Placeholder 1"/>
           <p:cNvSpPr>
-            <a:spLocks noGrp="1"/>
+            <a:spLocks noGrp="1" noRot="1" noChangeAspect="1"/>
           </p:cNvSpPr>
           <p:nvPr>
             <p:ph type="sldImg" idx="2"/>
@@ -1986,7 +1782,7 @@
             <a:spLocks noGrp="1"/>
           </p:cNvSpPr>
           <p:nvPr>
-            <p:ph type="body" idx="3" sz="quarter"/>
+            <p:ph type="body" sz="quarter" idx="3"/>
           </p:nvPr>
         </p:nvSpPr>
         <p:spPr/>
@@ -2007,7 +1803,7 @@
             <a:spLocks noGrp="1"/>
           </p:cNvSpPr>
           <p:nvPr>
-            <p:ph type="sldNum" idx="5" sz="quarter"/>
+            <p:ph type="sldNum" sz="quarter" idx="5"/>
           </p:nvPr>
         </p:nvSpPr>
         <p:spPr/>
@@ -2021,7 +1817,7 @@
 </file>
 
 <file path=ppt/notesSlides/notesSlide8.xml><?xml version="1.0" encoding="utf-8"?>
-<p:notes xmlns:a="http://schemas.openxmlformats.org/drawingml/2006/main" xmlns:p="http://schemas.openxmlformats.org/presentationml/2006/main" xmlns:r="http://schemas.openxmlformats.org/officeDocument/2006/relationships">
+<p:notes xmlns:a="http://schemas.openxmlformats.org/drawingml/2006/main" xmlns:r="http://schemas.openxmlformats.org/officeDocument/2006/relationships" xmlns:p="http://schemas.openxmlformats.org/presentationml/2006/main">
   <p:cSld>
     <p:spTree>
       <p:nvGrpSpPr>
@@ -2041,7 +1837,7 @@
         <p:nvSpPr>
           <p:cNvPr id="2" name="Slide Image Placeholder 1"/>
           <p:cNvSpPr>
-            <a:spLocks noGrp="1"/>
+            <a:spLocks noGrp="1" noRot="1" noChangeAspect="1"/>
           </p:cNvSpPr>
           <p:nvPr>
             <p:ph type="sldImg" idx="2"/>
@@ -2056,7 +1852,7 @@
             <a:spLocks noGrp="1"/>
           </p:cNvSpPr>
           <p:nvPr>
-            <p:ph type="body" idx="3" sz="quarter"/>
+            <p:ph type="body" sz="quarter" idx="3"/>
           </p:nvPr>
         </p:nvSpPr>
         <p:spPr/>
@@ -2077,7 +1873,7 @@
             <a:spLocks noGrp="1"/>
           </p:cNvSpPr>
           <p:nvPr>
-            <p:ph type="sldNum" idx="5" sz="quarter"/>
+            <p:ph type="sldNum" sz="quarter" idx="5"/>
           </p:nvPr>
         </p:nvSpPr>
         <p:spPr/>
@@ -2091,7 +1887,7 @@
 </file>
 
 <file path=ppt/notesSlides/notesSlide9.xml><?xml version="1.0" encoding="utf-8"?>
-<p:notes xmlns:a="http://schemas.openxmlformats.org/drawingml/2006/main" xmlns:p="http://schemas.openxmlformats.org/presentationml/2006/main" xmlns:r="http://schemas.openxmlformats.org/officeDocument/2006/relationships">
+<p:notes xmlns:a="http://schemas.openxmlformats.org/drawingml/2006/main" xmlns:r="http://schemas.openxmlformats.org/officeDocument/2006/relationships" xmlns:p="http://schemas.openxmlformats.org/presentationml/2006/main">
   <p:cSld>
     <p:spTree>
       <p:nvGrpSpPr>
@@ -2111,7 +1907,7 @@
         <p:nvSpPr>
           <p:cNvPr id="2" name="Slide Image Placeholder 1"/>
           <p:cNvSpPr>
-            <a:spLocks noGrp="1"/>
+            <a:spLocks noGrp="1" noRot="1" noChangeAspect="1"/>
           </p:cNvSpPr>
           <p:nvPr>
             <p:ph type="sldImg" idx="2"/>
@@ -2126,7 +1922,7 @@
             <a:spLocks noGrp="1"/>
           </p:cNvSpPr>
           <p:nvPr>
-            <p:ph type="body" idx="3" sz="quarter"/>
+            <p:ph type="body" sz="quarter" idx="3"/>
           </p:nvPr>
         </p:nvSpPr>
         <p:spPr/>
@@ -2147,7 +1943,7 @@
             <a:spLocks noGrp="1"/>
           </p:cNvSpPr>
           <p:nvPr>
-            <p:ph type="sldNum" idx="5" sz="quarter"/>
+            <p:ph type="sldNum" sz="quarter" idx="5"/>
           </p:nvPr>
         </p:nvSpPr>
         <p:spPr/>
@@ -2198,10 +1994,9 @@
           <a:lstStyle/>
           <a:p>
             <a:r>
-              <a:rPr lang="en-US" smtClean="0"/>
+              <a:rPr lang="en-US"/>
               <a:t>Click to edit Master title style</a:t>
             </a:r>
-            <a:endParaRPr lang="en-US"/>
           </a:p>
         </p:txBody>
       </p:sp>
@@ -2317,10 +2112,9 @@
           </a:lstStyle>
           <a:p>
             <a:r>
-              <a:rPr lang="en-US" smtClean="0"/>
+              <a:rPr lang="en-US"/>
               <a:t>Click to edit Master subtitle style</a:t>
             </a:r>
-            <a:endParaRPr lang="en-US"/>
           </a:p>
         </p:txBody>
       </p:sp>
@@ -2341,7 +2135,7 @@
           <a:p>
             <a:fld id="{5BCAD085-E8A6-8845-BD4E-CB4CCA059FC4}" type="datetimeFigureOut">
               <a:rPr lang="en-US" smtClean="0"/>
-              <a:t>1/27/13</a:t>
+              <a:t>10/4/2026</a:t>
             </a:fld>
             <a:endParaRPr lang="en-US"/>
           </a:p>
@@ -2435,10 +2229,9 @@
           <a:lstStyle/>
           <a:p>
             <a:r>
-              <a:rPr lang="en-US" smtClean="0"/>
+              <a:rPr lang="en-US"/>
               <a:t>Click to edit Master title style</a:t>
             </a:r>
-            <a:endParaRPr lang="en-US"/>
           </a:p>
         </p:txBody>
       </p:sp>
@@ -2459,38 +2252,37 @@
           <a:p>
             <a:pPr lvl="0"/>
             <a:r>
-              <a:rPr lang="en-US" smtClean="0"/>
+              <a:rPr lang="en-US"/>
               <a:t>Click to edit Master text styles</a:t>
             </a:r>
           </a:p>
           <a:p>
             <a:pPr lvl="1"/>
             <a:r>
-              <a:rPr lang="en-US" smtClean="0"/>
+              <a:rPr lang="en-US"/>
               <a:t>Second level</a:t>
             </a:r>
           </a:p>
           <a:p>
             <a:pPr lvl="2"/>
             <a:r>
-              <a:rPr lang="en-US" smtClean="0"/>
+              <a:rPr lang="en-US"/>
               <a:t>Third level</a:t>
             </a:r>
           </a:p>
           <a:p>
             <a:pPr lvl="3"/>
             <a:r>
-              <a:rPr lang="en-US" smtClean="0"/>
+              <a:rPr lang="en-US"/>
               <a:t>Fourth level</a:t>
             </a:r>
           </a:p>
           <a:p>
             <a:pPr lvl="4"/>
             <a:r>
-              <a:rPr lang="en-US" smtClean="0"/>
+              <a:rPr lang="en-US"/>
               <a:t>Fifth level</a:t>
             </a:r>
-            <a:endParaRPr lang="en-US"/>
           </a:p>
         </p:txBody>
       </p:sp>
@@ -2511,7 +2303,7 @@
           <a:p>
             <a:fld id="{5BCAD085-E8A6-8845-BD4E-CB4CCA059FC4}" type="datetimeFigureOut">
               <a:rPr lang="en-US" smtClean="0"/>
-              <a:t>1/27/13</a:t>
+              <a:t>10/4/2026</a:t>
             </a:fld>
             <a:endParaRPr lang="en-US"/>
           </a:p>
@@ -2610,10 +2402,9 @@
           <a:lstStyle/>
           <a:p>
             <a:r>
-              <a:rPr lang="en-US" smtClean="0"/>
+              <a:rPr lang="en-US"/>
               <a:t>Click to edit Master title style</a:t>
             </a:r>
-            <a:endParaRPr lang="en-US"/>
           </a:p>
         </p:txBody>
       </p:sp>
@@ -2639,38 +2430,37 @@
           <a:p>
             <a:pPr lvl="0"/>
             <a:r>
-              <a:rPr lang="en-US" smtClean="0"/>
+              <a:rPr lang="en-US"/>
               <a:t>Click to edit Master text styles</a:t>
             </a:r>
           </a:p>
           <a:p>
             <a:pPr lvl="1"/>
             <a:r>
-              <a:rPr lang="en-US" smtClean="0"/>
+              <a:rPr lang="en-US"/>
               <a:t>Second level</a:t>
             </a:r>
           </a:p>
           <a:p>
             <a:pPr lvl="2"/>
             <a:r>
-              <a:rPr lang="en-US" smtClean="0"/>
+              <a:rPr lang="en-US"/>
               <a:t>Third level</a:t>
             </a:r>
           </a:p>
           <a:p>
             <a:pPr lvl="3"/>
             <a:r>
-              <a:rPr lang="en-US" smtClean="0"/>
+              <a:rPr lang="en-US"/>
               <a:t>Fourth level</a:t>
             </a:r>
           </a:p>
           <a:p>
             <a:pPr lvl="4"/>
             <a:r>
-              <a:rPr lang="en-US" smtClean="0"/>
+              <a:rPr lang="en-US"/>
               <a:t>Fifth level</a:t>
             </a:r>
-            <a:endParaRPr lang="en-US"/>
           </a:p>
         </p:txBody>
       </p:sp>
@@ -2691,7 +2481,7 @@
           <a:p>
             <a:fld id="{5BCAD085-E8A6-8845-BD4E-CB4CCA059FC4}" type="datetimeFigureOut">
               <a:rPr lang="en-US" smtClean="0"/>
-              <a:t>1/27/13</a:t>
+              <a:t>10/4/2026</a:t>
             </a:fld>
             <a:endParaRPr lang="en-US"/>
           </a:p>
@@ -2785,10 +2575,9 @@
           <a:lstStyle/>
           <a:p>
             <a:r>
-              <a:rPr lang="en-US" smtClean="0"/>
+              <a:rPr lang="en-US"/>
               <a:t>Click to edit Master title style</a:t>
             </a:r>
-            <a:endParaRPr lang="en-US"/>
           </a:p>
         </p:txBody>
       </p:sp>
@@ -2809,38 +2598,37 @@
           <a:p>
             <a:pPr lvl="0"/>
             <a:r>
-              <a:rPr lang="en-US" smtClean="0"/>
+              <a:rPr lang="en-US"/>
               <a:t>Click to edit Master text styles</a:t>
             </a:r>
           </a:p>
           <a:p>
             <a:pPr lvl="1"/>
             <a:r>
-              <a:rPr lang="en-US" smtClean="0"/>
+              <a:rPr lang="en-US"/>
               <a:t>Second level</a:t>
             </a:r>
           </a:p>
           <a:p>
             <a:pPr lvl="2"/>
             <a:r>
-              <a:rPr lang="en-US" smtClean="0"/>
+              <a:rPr lang="en-US"/>
               <a:t>Third level</a:t>
             </a:r>
           </a:p>
           <a:p>
             <a:pPr lvl="3"/>
             <a:r>
-              <a:rPr lang="en-US" smtClean="0"/>
+              <a:rPr lang="en-US"/>
               <a:t>Fourth level</a:t>
             </a:r>
           </a:p>
           <a:p>
             <a:pPr lvl="4"/>
             <a:r>
-              <a:rPr lang="en-US" smtClean="0"/>
+              <a:rPr lang="en-US"/>
               <a:t>Fifth level</a:t>
             </a:r>
-            <a:endParaRPr lang="en-US"/>
           </a:p>
         </p:txBody>
       </p:sp>
@@ -2861,7 +2649,7 @@
           <a:p>
             <a:fld id="{5BCAD085-E8A6-8845-BD4E-CB4CCA059FC4}" type="datetimeFigureOut">
               <a:rPr lang="en-US" smtClean="0"/>
-              <a:t>1/27/13</a:t>
+              <a:t>10/4/2026</a:t>
             </a:fld>
             <a:endParaRPr lang="en-US"/>
           </a:p>
@@ -2964,10 +2752,9 @@
           </a:lstStyle>
           <a:p>
             <a:r>
-              <a:rPr lang="en-US" smtClean="0"/>
+              <a:rPr lang="en-US"/>
               <a:t>Click to edit Master title style</a:t>
             </a:r>
-            <a:endParaRPr lang="en-US"/>
           </a:p>
         </p:txBody>
       </p:sp>
@@ -3084,7 +2871,7 @@
           <a:p>
             <a:pPr lvl="0"/>
             <a:r>
-              <a:rPr lang="en-US" smtClean="0"/>
+              <a:rPr lang="en-US"/>
               <a:t>Click to edit Master text styles</a:t>
             </a:r>
           </a:p>
@@ -3107,7 +2894,7 @@
           <a:p>
             <a:fld id="{5BCAD085-E8A6-8845-BD4E-CB4CCA059FC4}" type="datetimeFigureOut">
               <a:rPr lang="en-US" smtClean="0"/>
-              <a:t>1/27/13</a:t>
+              <a:t>10/4/2026</a:t>
             </a:fld>
             <a:endParaRPr lang="en-US"/>
           </a:p>
@@ -3201,10 +2988,9 @@
           <a:lstStyle/>
           <a:p>
             <a:r>
-              <a:rPr lang="en-US" smtClean="0"/>
+              <a:rPr lang="en-US"/>
               <a:t>Click to edit Master title style</a:t>
             </a:r>
-            <a:endParaRPr lang="en-US"/>
           </a:p>
         </p:txBody>
       </p:sp>
@@ -3258,38 +3044,37 @@
           <a:p>
             <a:pPr lvl="0"/>
             <a:r>
-              <a:rPr lang="en-US" smtClean="0"/>
+              <a:rPr lang="en-US"/>
               <a:t>Click to edit Master text styles</a:t>
             </a:r>
           </a:p>
           <a:p>
             <a:pPr lvl="1"/>
             <a:r>
-              <a:rPr lang="en-US" smtClean="0"/>
+              <a:rPr lang="en-US"/>
               <a:t>Second level</a:t>
             </a:r>
           </a:p>
           <a:p>
             <a:pPr lvl="2"/>
             <a:r>
-              <a:rPr lang="en-US" smtClean="0"/>
+              <a:rPr lang="en-US"/>
               <a:t>Third level</a:t>
             </a:r>
           </a:p>
           <a:p>
             <a:pPr lvl="3"/>
             <a:r>
-              <a:rPr lang="en-US" smtClean="0"/>
+              <a:rPr lang="en-US"/>
               <a:t>Fourth level</a:t>
             </a:r>
           </a:p>
           <a:p>
             <a:pPr lvl="4"/>
             <a:r>
-              <a:rPr lang="en-US" smtClean="0"/>
+              <a:rPr lang="en-US"/>
               <a:t>Fifth level</a:t>
             </a:r>
-            <a:endParaRPr lang="en-US"/>
           </a:p>
         </p:txBody>
       </p:sp>
@@ -3343,38 +3128,37 @@
           <a:p>
             <a:pPr lvl="0"/>
             <a:r>
-              <a:rPr lang="en-US" smtClean="0"/>
+              <a:rPr lang="en-US"/>
               <a:t>Click to edit Master text styles</a:t>
             </a:r>
           </a:p>
           <a:p>
             <a:pPr lvl="1"/>
             <a:r>
-              <a:rPr lang="en-US" smtClean="0"/>
+              <a:rPr lang="en-US"/>
               <a:t>Second level</a:t>
             </a:r>
           </a:p>
           <a:p>
             <a:pPr lvl="2"/>
             <a:r>
-              <a:rPr lang="en-US" smtClean="0"/>
+              <a:rPr lang="en-US"/>
               <a:t>Third level</a:t>
             </a:r>
           </a:p>
           <a:p>
             <a:pPr lvl="3"/>
             <a:r>
-              <a:rPr lang="en-US" smtClean="0"/>
+              <a:rPr lang="en-US"/>
               <a:t>Fourth level</a:t>
             </a:r>
           </a:p>
           <a:p>
             <a:pPr lvl="4"/>
             <a:r>
-              <a:rPr lang="en-US" smtClean="0"/>
+              <a:rPr lang="en-US"/>
               <a:t>Fifth level</a:t>
             </a:r>
-            <a:endParaRPr lang="en-US"/>
           </a:p>
         </p:txBody>
       </p:sp>
@@ -3395,7 +3179,7 @@
           <a:p>
             <a:fld id="{5BCAD085-E8A6-8845-BD4E-CB4CCA059FC4}" type="datetimeFigureOut">
               <a:rPr lang="en-US" smtClean="0"/>
-              <a:t>1/27/13</a:t>
+              <a:t>10/4/2026</a:t>
             </a:fld>
             <a:endParaRPr lang="en-US"/>
           </a:p>
@@ -3493,10 +3277,9 @@
           </a:lstStyle>
           <a:p>
             <a:r>
-              <a:rPr lang="en-US" smtClean="0"/>
+              <a:rPr lang="en-US"/>
               <a:t>Click to edit Master title style</a:t>
             </a:r>
-            <a:endParaRPr lang="en-US"/>
           </a:p>
         </p:txBody>
       </p:sp>
@@ -3559,7 +3342,7 @@
           <a:p>
             <a:pPr lvl="0"/>
             <a:r>
-              <a:rPr lang="en-US" smtClean="0"/>
+              <a:rPr lang="en-US"/>
               <a:t>Click to edit Master text styles</a:t>
             </a:r>
           </a:p>
@@ -3615,38 +3398,37 @@
           <a:p>
             <a:pPr lvl="0"/>
             <a:r>
-              <a:rPr lang="en-US" smtClean="0"/>
+              <a:rPr lang="en-US"/>
               <a:t>Click to edit Master text styles</a:t>
             </a:r>
           </a:p>
           <a:p>
             <a:pPr lvl="1"/>
             <a:r>
-              <a:rPr lang="en-US" smtClean="0"/>
+              <a:rPr lang="en-US"/>
               <a:t>Second level</a:t>
             </a:r>
           </a:p>
           <a:p>
             <a:pPr lvl="2"/>
             <a:r>
-              <a:rPr lang="en-US" smtClean="0"/>
+              <a:rPr lang="en-US"/>
               <a:t>Third level</a:t>
             </a:r>
           </a:p>
           <a:p>
             <a:pPr lvl="3"/>
             <a:r>
-              <a:rPr lang="en-US" smtClean="0"/>
+              <a:rPr lang="en-US"/>
               <a:t>Fourth level</a:t>
             </a:r>
           </a:p>
           <a:p>
             <a:pPr lvl="4"/>
             <a:r>
-              <a:rPr lang="en-US" smtClean="0"/>
+              <a:rPr lang="en-US"/>
               <a:t>Fifth level</a:t>
             </a:r>
-            <a:endParaRPr lang="en-US"/>
           </a:p>
         </p:txBody>
       </p:sp>
@@ -3709,7 +3491,7 @@
           <a:p>
             <a:pPr lvl="0"/>
             <a:r>
-              <a:rPr lang="en-US" smtClean="0"/>
+              <a:rPr lang="en-US"/>
               <a:t>Click to edit Master text styles</a:t>
             </a:r>
           </a:p>
@@ -3765,38 +3547,37 @@
           <a:p>
             <a:pPr lvl="0"/>
             <a:r>
-              <a:rPr lang="en-US" smtClean="0"/>
+              <a:rPr lang="en-US"/>
               <a:t>Click to edit Master text styles</a:t>
             </a:r>
           </a:p>
           <a:p>
             <a:pPr lvl="1"/>
             <a:r>
-              <a:rPr lang="en-US" smtClean="0"/>
+              <a:rPr lang="en-US"/>
               <a:t>Second level</a:t>
             </a:r>
           </a:p>
           <a:p>
             <a:pPr lvl="2"/>
             <a:r>
-              <a:rPr lang="en-US" smtClean="0"/>
+              <a:rPr lang="en-US"/>
               <a:t>Third level</a:t>
             </a:r>
           </a:p>
           <a:p>
             <a:pPr lvl="3"/>
             <a:r>
-              <a:rPr lang="en-US" smtClean="0"/>
+              <a:rPr lang="en-US"/>
               <a:t>Fourth level</a:t>
             </a:r>
           </a:p>
           <a:p>
             <a:pPr lvl="4"/>
             <a:r>
-              <a:rPr lang="en-US" smtClean="0"/>
+              <a:rPr lang="en-US"/>
               <a:t>Fifth level</a:t>
             </a:r>
-            <a:endParaRPr lang="en-US"/>
           </a:p>
         </p:txBody>
       </p:sp>
@@ -3817,7 +3598,7 @@
           <a:p>
             <a:fld id="{5BCAD085-E8A6-8845-BD4E-CB4CCA059FC4}" type="datetimeFigureOut">
               <a:rPr lang="en-US" smtClean="0"/>
-              <a:t>1/27/13</a:t>
+              <a:t>10/4/2026</a:t>
             </a:fld>
             <a:endParaRPr lang="en-US"/>
           </a:p>
@@ -3911,10 +3692,9 @@
           <a:lstStyle/>
           <a:p>
             <a:r>
-              <a:rPr lang="en-US" smtClean="0"/>
+              <a:rPr lang="en-US"/>
               <a:t>Click to edit Master title style</a:t>
             </a:r>
-            <a:endParaRPr lang="en-US"/>
           </a:p>
         </p:txBody>
       </p:sp>
@@ -3935,7 +3715,7 @@
           <a:p>
             <a:fld id="{5BCAD085-E8A6-8845-BD4E-CB4CCA059FC4}" type="datetimeFigureOut">
               <a:rPr lang="en-US" smtClean="0"/>
-              <a:t>1/27/13</a:t>
+              <a:t>10/4/2026</a:t>
             </a:fld>
             <a:endParaRPr lang="en-US"/>
           </a:p>
@@ -4030,7 +3810,7 @@
           <a:p>
             <a:fld id="{5BCAD085-E8A6-8845-BD4E-CB4CCA059FC4}" type="datetimeFigureOut">
               <a:rPr lang="en-US" smtClean="0"/>
-              <a:t>1/27/13</a:t>
+              <a:t>10/4/2026</a:t>
             </a:fld>
             <a:endParaRPr lang="en-US"/>
           </a:p>
@@ -4133,10 +3913,9 @@
           </a:lstStyle>
           <a:p>
             <a:r>
-              <a:rPr lang="en-US" smtClean="0"/>
+              <a:rPr lang="en-US"/>
               <a:t>Click to edit Master title style</a:t>
             </a:r>
-            <a:endParaRPr lang="en-US"/>
           </a:p>
         </p:txBody>
       </p:sp>
@@ -4190,38 +3969,37 @@
           <a:p>
             <a:pPr lvl="0"/>
             <a:r>
-              <a:rPr lang="en-US" smtClean="0"/>
+              <a:rPr lang="en-US"/>
               <a:t>Click to edit Master text styles</a:t>
             </a:r>
           </a:p>
           <a:p>
             <a:pPr lvl="1"/>
             <a:r>
-              <a:rPr lang="en-US" smtClean="0"/>
+              <a:rPr lang="en-US"/>
               <a:t>Second level</a:t>
             </a:r>
           </a:p>
           <a:p>
             <a:pPr lvl="2"/>
             <a:r>
-              <a:rPr lang="en-US" smtClean="0"/>
+              <a:rPr lang="en-US"/>
               <a:t>Third level</a:t>
             </a:r>
           </a:p>
           <a:p>
             <a:pPr lvl="3"/>
             <a:r>
-              <a:rPr lang="en-US" smtClean="0"/>
+              <a:rPr lang="en-US"/>
               <a:t>Fourth level</a:t>
             </a:r>
           </a:p>
           <a:p>
             <a:pPr lvl="4"/>
             <a:r>
-              <a:rPr lang="en-US" smtClean="0"/>
+              <a:rPr lang="en-US"/>
               <a:t>Fifth level</a:t>
             </a:r>
-            <a:endParaRPr lang="en-US"/>
           </a:p>
         </p:txBody>
       </p:sp>
@@ -4284,7 +4062,7 @@
           <a:p>
             <a:pPr lvl="0"/>
             <a:r>
-              <a:rPr lang="en-US" smtClean="0"/>
+              <a:rPr lang="en-US"/>
               <a:t>Click to edit Master text styles</a:t>
             </a:r>
           </a:p>
@@ -4307,7 +4085,7 @@
           <a:p>
             <a:fld id="{5BCAD085-E8A6-8845-BD4E-CB4CCA059FC4}" type="datetimeFigureOut">
               <a:rPr lang="en-US" smtClean="0"/>
-              <a:t>1/27/13</a:t>
+              <a:t>10/4/2026</a:t>
             </a:fld>
             <a:endParaRPr lang="en-US"/>
           </a:p>
@@ -4410,10 +4188,9 @@
           </a:lstStyle>
           <a:p>
             <a:r>
-              <a:rPr lang="en-US" smtClean="0"/>
+              <a:rPr lang="en-US"/>
               <a:t>Click to edit Master title style</a:t>
             </a:r>
-            <a:endParaRPr lang="en-US"/>
           </a:p>
         </p:txBody>
       </p:sp>
@@ -4537,7 +4314,7 @@
           <a:p>
             <a:pPr lvl="0"/>
             <a:r>
-              <a:rPr lang="en-US" smtClean="0"/>
+              <a:rPr lang="en-US"/>
               <a:t>Click to edit Master text styles</a:t>
             </a:r>
           </a:p>
@@ -4560,7 +4337,7 @@
           <a:p>
             <a:fld id="{5BCAD085-E8A6-8845-BD4E-CB4CCA059FC4}" type="datetimeFigureOut">
               <a:rPr lang="en-US" smtClean="0"/>
-              <a:t>1/27/13</a:t>
+              <a:t>10/4/2026</a:t>
             </a:fld>
             <a:endParaRPr lang="en-US"/>
           </a:p>
@@ -4669,10 +4446,9 @@
           <a:lstStyle/>
           <a:p>
             <a:r>
-              <a:rPr lang="en-US" smtClean="0"/>
+              <a:rPr lang="en-US"/>
               <a:t>Click to edit Master title style</a:t>
             </a:r>
-            <a:endParaRPr lang="en-US"/>
           </a:p>
         </p:txBody>
       </p:sp>
@@ -4703,38 +4479,37 @@
           <a:p>
             <a:pPr lvl="0"/>
             <a:r>
-              <a:rPr lang="en-US" smtClean="0"/>
+              <a:rPr lang="en-US"/>
               <a:t>Click to edit Master text styles</a:t>
             </a:r>
           </a:p>
           <a:p>
             <a:pPr lvl="1"/>
             <a:r>
-              <a:rPr lang="en-US" smtClean="0"/>
+              <a:rPr lang="en-US"/>
               <a:t>Second level</a:t>
             </a:r>
           </a:p>
           <a:p>
             <a:pPr lvl="2"/>
             <a:r>
-              <a:rPr lang="en-US" smtClean="0"/>
+              <a:rPr lang="en-US"/>
               <a:t>Third level</a:t>
             </a:r>
           </a:p>
           <a:p>
             <a:pPr lvl="3"/>
             <a:r>
-              <a:rPr lang="en-US" smtClean="0"/>
+              <a:rPr lang="en-US"/>
               <a:t>Fourth level</a:t>
             </a:r>
           </a:p>
           <a:p>
             <a:pPr lvl="4"/>
             <a:r>
-              <a:rPr lang="en-US" smtClean="0"/>
+              <a:rPr lang="en-US"/>
               <a:t>Fifth level</a:t>
             </a:r>
-            <a:endParaRPr lang="en-US"/>
           </a:p>
         </p:txBody>
       </p:sp>
@@ -4773,7 +4548,7 @@
           <a:p>
             <a:fld id="{5BCAD085-E8A6-8845-BD4E-CB4CCA059FC4}" type="datetimeFigureOut">
               <a:rPr lang="en-US" smtClean="0"/>
-              <a:t>1/27/13</a:t>
+              <a:t>10/4/2026</a:t>
             </a:fld>
             <a:endParaRPr lang="en-US"/>
           </a:p>
@@ -5132,7 +4907,7 @@
 </file>
 
 <file path=ppt/slides/slide1.xml><?xml version="1.0" encoding="utf-8"?>
-<p:sld xmlns:a="http://schemas.openxmlformats.org/drawingml/2006/main" xmlns:p="http://schemas.openxmlformats.org/presentationml/2006/main" xmlns:r="http://schemas.openxmlformats.org/officeDocument/2006/relationships">
+<p:sld xmlns:a="http://schemas.openxmlformats.org/drawingml/2006/main" xmlns:r="http://schemas.openxmlformats.org/officeDocument/2006/relationships" xmlns:p="http://schemas.openxmlformats.org/presentationml/2006/main">
   <p:cSld>
     <p:bg>
       <p:bgPr>
@@ -5148,7 +4923,14 @@
         <p:cNvGrpSpPr/>
         <p:nvPr/>
       </p:nvGrpSpPr>
-      <p:grpSpPr/>
+      <p:grpSpPr>
+        <a:xfrm>
+          <a:off x="0" y="0"/>
+          <a:ext cx="0" cy="0"/>
+          <a:chOff x="0" y="0"/>
+          <a:chExt cx="0" cy="0"/>
+        </a:xfrm>
+      </p:grpSpPr>
       <p:sp>
         <p:nvSpPr>
           <p:cNvPr id="2" name="TextBox 1"/>
@@ -5166,7 +4948,7 @@
           <a:noFill/>
         </p:spPr>
         <p:txBody>
-          <a:bodyPr wrap="square" lIns="0" rIns="0" tIns="0" bIns="0" anchor="t">
+          <a:bodyPr wrap="square" lIns="0" tIns="0" rIns="0" bIns="0" anchor="t">
             <a:spAutoFit/>
           </a:bodyPr>
           <a:lstStyle/>
@@ -5201,7 +4983,7 @@
           <a:noFill/>
         </p:spPr>
         <p:txBody>
-          <a:bodyPr wrap="square" lIns="0" rIns="0" tIns="0" bIns="0" anchor="t">
+          <a:bodyPr wrap="square" lIns="0" tIns="0" rIns="0" bIns="0" anchor="t">
             <a:spAutoFit/>
           </a:bodyPr>
           <a:lstStyle/>
@@ -5240,7 +5022,7 @@
           <a:noFill/>
         </p:spPr>
         <p:txBody>
-          <a:bodyPr wrap="square" lIns="0" rIns="0" tIns="0" bIns="0" anchor="t">
+          <a:bodyPr wrap="square" lIns="0" tIns="0" rIns="0" bIns="0" anchor="t">
             <a:spAutoFit/>
           </a:bodyPr>
           <a:lstStyle/>
@@ -5301,7 +5083,7 @@
           </a:fontRef>
         </p:style>
         <p:txBody>
-          <a:bodyPr rtlCol="0" anchor="ctr" wrap="square" lIns="152400" rIns="152400" tIns="0" bIns="0"/>
+          <a:bodyPr wrap="square" lIns="152400" tIns="0" rIns="152400" bIns="0" rtlCol="0" anchor="ctr"/>
           <a:lstStyle/>
           <a:p>
             <a:pPr algn="l"/>
@@ -5356,7 +5138,7 @@
           </a:fontRef>
         </p:style>
         <p:txBody>
-          <a:bodyPr rtlCol="0" anchor="ctr" wrap="square" lIns="152400" rIns="152400" tIns="0" bIns="0"/>
+          <a:bodyPr wrap="square" lIns="152400" tIns="0" rIns="152400" bIns="0" rtlCol="0" anchor="ctr"/>
           <a:lstStyle/>
           <a:p>
             <a:pPr algn="l"/>
@@ -5411,7 +5193,7 @@
           </a:fontRef>
         </p:style>
         <p:txBody>
-          <a:bodyPr rtlCol="0" anchor="ctr" wrap="square" lIns="152400" rIns="152400" tIns="0" bIns="0"/>
+          <a:bodyPr wrap="square" lIns="152400" tIns="0" rIns="152400" bIns="0" rtlCol="0" anchor="ctr"/>
           <a:lstStyle/>
           <a:p>
             <a:pPr algn="l"/>
@@ -5466,7 +5248,7 @@
           </a:fontRef>
         </p:style>
         <p:txBody>
-          <a:bodyPr rtlCol="0" anchor="ctr" wrap="square" lIns="152400" rIns="152400" tIns="0" bIns="0"/>
+          <a:bodyPr wrap="square" lIns="152400" tIns="0" rIns="152400" bIns="0" rtlCol="0" anchor="ctr"/>
           <a:lstStyle/>
           <a:p>
             <a:pPr algn="l"/>
@@ -5521,7 +5303,7 @@
           </a:fontRef>
         </p:style>
         <p:txBody>
-          <a:bodyPr rtlCol="0" anchor="ctr" wrap="square" lIns="152400" rIns="152400" tIns="0" bIns="0"/>
+          <a:bodyPr wrap="square" lIns="152400" tIns="0" rIns="152400" bIns="0" rtlCol="0" anchor="ctr"/>
           <a:lstStyle/>
           <a:p>
             <a:pPr algn="l"/>
@@ -5546,7 +5328,7 @@
 </file>
 
 <file path=ppt/slides/slide10.xml><?xml version="1.0" encoding="utf-8"?>
-<p:sld xmlns:a="http://schemas.openxmlformats.org/drawingml/2006/main" xmlns:p="http://schemas.openxmlformats.org/presentationml/2006/main" xmlns:r="http://schemas.openxmlformats.org/officeDocument/2006/relationships">
+<p:sld xmlns:a="http://schemas.openxmlformats.org/drawingml/2006/main" xmlns:r="http://schemas.openxmlformats.org/officeDocument/2006/relationships" xmlns:p="http://schemas.openxmlformats.org/presentationml/2006/main">
   <p:cSld>
     <p:bg>
       <p:bgPr>
@@ -5562,7 +5344,14 @@
         <p:cNvGrpSpPr/>
         <p:nvPr/>
       </p:nvGrpSpPr>
-      <p:grpSpPr/>
+      <p:grpSpPr>
+        <a:xfrm>
+          <a:off x="0" y="0"/>
+          <a:ext cx="0" cy="0"/>
+          <a:chOff x="0" y="0"/>
+          <a:chExt cx="0" cy="0"/>
+        </a:xfrm>
+      </p:grpSpPr>
       <p:sp>
         <p:nvSpPr>
           <p:cNvPr id="2" name="TextBox 1"/>
@@ -5580,7 +5369,7 @@
           <a:noFill/>
         </p:spPr>
         <p:txBody>
-          <a:bodyPr wrap="square" lIns="0" rIns="0" tIns="0" bIns="0" anchor="t">
+          <a:bodyPr wrap="square" lIns="0" tIns="0" rIns="0" bIns="0" anchor="t">
             <a:spAutoFit/>
           </a:bodyPr>
           <a:lstStyle/>
@@ -5615,7 +5404,7 @@
           <a:noFill/>
         </p:spPr>
         <p:txBody>
-          <a:bodyPr wrap="square" lIns="0" rIns="0" tIns="0" bIns="0" anchor="t">
+          <a:bodyPr wrap="square" lIns="0" tIns="0" rIns="0" bIns="0" anchor="t">
             <a:spAutoFit/>
           </a:bodyPr>
           <a:lstStyle/>
@@ -5680,6 +5469,7 @@
           <a:lstStyle/>
           <a:p>
             <a:pPr algn="ctr"/>
+            <a:endParaRPr/>
           </a:p>
         </p:txBody>
       </p:sp>
@@ -5700,7 +5490,7 @@
           <a:noFill/>
         </p:spPr>
         <p:txBody>
-          <a:bodyPr wrap="square" lIns="0" rIns="0" tIns="0" bIns="0" anchor="t">
+          <a:bodyPr wrap="square" lIns="0" tIns="0" rIns="0" bIns="0" anchor="t">
             <a:spAutoFit/>
           </a:bodyPr>
           <a:lstStyle/>
@@ -5739,7 +5529,7 @@
           <a:noFill/>
         </p:spPr>
         <p:txBody>
-          <a:bodyPr wrap="square" lIns="0" rIns="0" tIns="0" bIns="0" anchor="t">
+          <a:bodyPr wrap="square" lIns="0" tIns="0" rIns="0" bIns="0" anchor="t">
             <a:spAutoFit/>
           </a:bodyPr>
           <a:lstStyle/>
@@ -5802,6 +5592,7 @@
           <a:lstStyle/>
           <a:p>
             <a:pPr algn="ctr"/>
+            <a:endParaRPr/>
           </a:p>
         </p:txBody>
       </p:sp>
@@ -5822,7 +5613,7 @@
           <a:noFill/>
         </p:spPr>
         <p:txBody>
-          <a:bodyPr wrap="square" lIns="0" rIns="0" tIns="0" bIns="0" anchor="t">
+          <a:bodyPr wrap="square" lIns="0" tIns="0" rIns="0" bIns="0" anchor="t">
             <a:spAutoFit/>
           </a:bodyPr>
           <a:lstStyle/>
@@ -5857,7 +5648,7 @@
           <a:noFill/>
         </p:spPr>
         <p:txBody>
-          <a:bodyPr wrap="square" lIns="0" rIns="0" tIns="0" bIns="0" anchor="t">
+          <a:bodyPr wrap="square" lIns="0" tIns="0" rIns="0" bIns="0" anchor="t">
             <a:spAutoFit/>
           </a:bodyPr>
           <a:lstStyle/>
@@ -5924,6 +5715,7 @@
           <a:lstStyle/>
           <a:p>
             <a:pPr algn="ctr"/>
+            <a:endParaRPr/>
           </a:p>
         </p:txBody>
       </p:sp>
@@ -5944,7 +5736,7 @@
           <a:noFill/>
         </p:spPr>
         <p:txBody>
-          <a:bodyPr wrap="square" lIns="0" rIns="0" tIns="0" bIns="0" anchor="t">
+          <a:bodyPr wrap="square" lIns="0" tIns="0" rIns="0" bIns="0" anchor="t">
             <a:spAutoFit/>
           </a:bodyPr>
           <a:lstStyle/>
@@ -5979,7 +5771,7 @@
           <a:noFill/>
         </p:spPr>
         <p:txBody>
-          <a:bodyPr wrap="square" lIns="0" rIns="0" tIns="0" bIns="0" anchor="t">
+          <a:bodyPr wrap="square" lIns="0" tIns="0" rIns="0" bIns="0" anchor="t">
             <a:spAutoFit/>
           </a:bodyPr>
           <a:lstStyle/>
@@ -6018,7 +5810,7 @@
           <a:noFill/>
         </p:spPr>
         <p:txBody>
-          <a:bodyPr wrap="square" lIns="0" rIns="0" tIns="0" bIns="0" anchor="t">
+          <a:bodyPr wrap="square" lIns="0" tIns="0" rIns="0" bIns="0" anchor="t">
             <a:spAutoFit/>
           </a:bodyPr>
           <a:lstStyle/>
@@ -6045,7 +5837,7 @@
 </file>
 
 <file path=ppt/slides/slide11.xml><?xml version="1.0" encoding="utf-8"?>
-<p:sld xmlns:a="http://schemas.openxmlformats.org/drawingml/2006/main" xmlns:p="http://schemas.openxmlformats.org/presentationml/2006/main" xmlns:r="http://schemas.openxmlformats.org/officeDocument/2006/relationships">
+<p:sld xmlns:a="http://schemas.openxmlformats.org/drawingml/2006/main" xmlns:r="http://schemas.openxmlformats.org/officeDocument/2006/relationships" xmlns:p="http://schemas.openxmlformats.org/presentationml/2006/main">
   <p:cSld>
     <p:bg>
       <p:bgPr>
@@ -6061,7 +5853,14 @@
         <p:cNvGrpSpPr/>
         <p:nvPr/>
       </p:nvGrpSpPr>
-      <p:grpSpPr/>
+      <p:grpSpPr>
+        <a:xfrm>
+          <a:off x="0" y="0"/>
+          <a:ext cx="0" cy="0"/>
+          <a:chOff x="0" y="0"/>
+          <a:chExt cx="0" cy="0"/>
+        </a:xfrm>
+      </p:grpSpPr>
       <p:sp>
         <p:nvSpPr>
           <p:cNvPr id="2" name="TextBox 1"/>
@@ -6079,7 +5878,7 @@
           <a:noFill/>
         </p:spPr>
         <p:txBody>
-          <a:bodyPr wrap="square" lIns="0" rIns="0" tIns="0" bIns="0" anchor="t">
+          <a:bodyPr wrap="square" lIns="0" tIns="0" rIns="0" bIns="0" anchor="t">
             <a:spAutoFit/>
           </a:bodyPr>
           <a:lstStyle/>
@@ -6114,7 +5913,7 @@
           <a:noFill/>
         </p:spPr>
         <p:txBody>
-          <a:bodyPr wrap="square" lIns="0" rIns="0" tIns="0" bIns="0" anchor="t">
+          <a:bodyPr wrap="square" lIns="0" tIns="0" rIns="0" bIns="0" anchor="t">
             <a:spAutoFit/>
           </a:bodyPr>
           <a:lstStyle/>
@@ -6181,6 +5980,7 @@
           <a:lstStyle/>
           <a:p>
             <a:pPr algn="ctr"/>
+            <a:endParaRPr/>
           </a:p>
         </p:txBody>
       </p:sp>
@@ -6193,7 +5993,7 @@
           <p:nvPr/>
         </p:nvPicPr>
         <p:blipFill>
-          <a:blip r:embed="rId2"/>
+          <a:blip r:embed="rId3"/>
           <a:stretch>
             <a:fillRect/>
           </a:stretch>
@@ -6225,7 +6025,7 @@
           <a:noFill/>
         </p:spPr>
         <p:txBody>
-          <a:bodyPr wrap="square" lIns="0" rIns="0" tIns="0" bIns="0" anchor="t">
+          <a:bodyPr wrap="square" lIns="0" tIns="0" rIns="0" bIns="0" anchor="t">
             <a:spAutoFit/>
           </a:bodyPr>
           <a:lstStyle/>
@@ -6318,7 +6118,7 @@
           <a:noFill/>
         </p:spPr>
         <p:txBody>
-          <a:bodyPr wrap="square" lIns="0" rIns="0" tIns="0" bIns="0" anchor="t">
+          <a:bodyPr wrap="square" lIns="0" tIns="0" rIns="0" bIns="0" anchor="t">
             <a:spAutoFit/>
           </a:bodyPr>
           <a:lstStyle/>
@@ -6345,7 +6145,7 @@
 </file>
 
 <file path=ppt/slides/slide12.xml><?xml version="1.0" encoding="utf-8"?>
-<p:sld xmlns:a="http://schemas.openxmlformats.org/drawingml/2006/main" xmlns:p="http://schemas.openxmlformats.org/presentationml/2006/main" xmlns:r="http://schemas.openxmlformats.org/officeDocument/2006/relationships">
+<p:sld xmlns:a="http://schemas.openxmlformats.org/drawingml/2006/main" xmlns:r="http://schemas.openxmlformats.org/officeDocument/2006/relationships" xmlns:p="http://schemas.openxmlformats.org/presentationml/2006/main">
   <p:cSld>
     <p:bg>
       <p:bgPr>
@@ -6361,7 +6161,14 @@
         <p:cNvGrpSpPr/>
         <p:nvPr/>
       </p:nvGrpSpPr>
-      <p:grpSpPr/>
+      <p:grpSpPr>
+        <a:xfrm>
+          <a:off x="0" y="0"/>
+          <a:ext cx="0" cy="0"/>
+          <a:chOff x="0" y="0"/>
+          <a:chExt cx="0" cy="0"/>
+        </a:xfrm>
+      </p:grpSpPr>
       <p:sp>
         <p:nvSpPr>
           <p:cNvPr id="2" name="TextBox 1"/>
@@ -6379,7 +6186,7 @@
           <a:noFill/>
         </p:spPr>
         <p:txBody>
-          <a:bodyPr wrap="square" lIns="0" rIns="0" tIns="0" bIns="0" anchor="t">
+          <a:bodyPr wrap="square" lIns="0" tIns="0" rIns="0" bIns="0" anchor="t">
             <a:spAutoFit/>
           </a:bodyPr>
           <a:lstStyle/>
@@ -6414,7 +6221,7 @@
           <a:noFill/>
         </p:spPr>
         <p:txBody>
-          <a:bodyPr wrap="square" lIns="0" rIns="0" tIns="0" bIns="0" anchor="t">
+          <a:bodyPr wrap="square" lIns="0" tIns="0" rIns="0" bIns="0" anchor="t">
             <a:spAutoFit/>
           </a:bodyPr>
           <a:lstStyle/>
@@ -6481,6 +6288,7 @@
           <a:lstStyle/>
           <a:p>
             <a:pPr algn="ctr"/>
+            <a:endParaRPr/>
           </a:p>
         </p:txBody>
       </p:sp>
@@ -6493,7 +6301,7 @@
           <p:nvPr/>
         </p:nvPicPr>
         <p:blipFill>
-          <a:blip r:embed="rId2"/>
+          <a:blip r:embed="rId3"/>
           <a:stretch>
             <a:fillRect/>
           </a:stretch>
@@ -6553,6 +6361,7 @@
           <a:lstStyle/>
           <a:p>
             <a:pPr algn="ctr"/>
+            <a:endParaRPr/>
           </a:p>
         </p:txBody>
       </p:sp>
@@ -6565,7 +6374,7 @@
           <p:nvPr/>
         </p:nvPicPr>
         <p:blipFill>
-          <a:blip r:embed="rId3"/>
+          <a:blip r:embed="rId4"/>
           <a:stretch>
             <a:fillRect/>
           </a:stretch>
@@ -6597,7 +6406,7 @@
           <a:noFill/>
         </p:spPr>
         <p:txBody>
-          <a:bodyPr wrap="square" lIns="0" rIns="0" tIns="0" bIns="0" anchor="t">
+          <a:bodyPr wrap="square" lIns="0" tIns="0" rIns="0" bIns="0" anchor="t">
             <a:spAutoFit/>
           </a:bodyPr>
           <a:lstStyle/>
@@ -6624,7 +6433,7 @@
 </file>
 
 <file path=ppt/slides/slide13.xml><?xml version="1.0" encoding="utf-8"?>
-<p:sld xmlns:a="http://schemas.openxmlformats.org/drawingml/2006/main" xmlns:p="http://schemas.openxmlformats.org/presentationml/2006/main" xmlns:r="http://schemas.openxmlformats.org/officeDocument/2006/relationships">
+<p:sld xmlns:a="http://schemas.openxmlformats.org/drawingml/2006/main" xmlns:r="http://schemas.openxmlformats.org/officeDocument/2006/relationships" xmlns:p="http://schemas.openxmlformats.org/presentationml/2006/main">
   <p:cSld>
     <p:bg>
       <p:bgPr>
@@ -6640,7 +6449,14 @@
         <p:cNvGrpSpPr/>
         <p:nvPr/>
       </p:nvGrpSpPr>
-      <p:grpSpPr/>
+      <p:grpSpPr>
+        <a:xfrm>
+          <a:off x="0" y="0"/>
+          <a:ext cx="0" cy="0"/>
+          <a:chOff x="0" y="0"/>
+          <a:chExt cx="0" cy="0"/>
+        </a:xfrm>
+      </p:grpSpPr>
       <p:sp>
         <p:nvSpPr>
           <p:cNvPr id="2" name="TextBox 1"/>
@@ -6658,7 +6474,7 @@
           <a:noFill/>
         </p:spPr>
         <p:txBody>
-          <a:bodyPr wrap="square" lIns="0" rIns="0" tIns="0" bIns="0" anchor="t">
+          <a:bodyPr wrap="square" lIns="0" tIns="0" rIns="0" bIns="0" anchor="t">
             <a:spAutoFit/>
           </a:bodyPr>
           <a:lstStyle/>
@@ -6693,7 +6509,7 @@
           <a:noFill/>
         </p:spPr>
         <p:txBody>
-          <a:bodyPr wrap="square" lIns="0" rIns="0" tIns="0" bIns="0" anchor="t">
+          <a:bodyPr wrap="square" lIns="0" tIns="0" rIns="0" bIns="0" anchor="t">
             <a:spAutoFit/>
           </a:bodyPr>
           <a:lstStyle/>
@@ -6760,6 +6576,7 @@
           <a:lstStyle/>
           <a:p>
             <a:pPr algn="ctr"/>
+            <a:endParaRPr/>
           </a:p>
         </p:txBody>
       </p:sp>
@@ -6772,7 +6589,7 @@
           <p:nvPr/>
         </p:nvPicPr>
         <p:blipFill>
-          <a:blip r:embed="rId2"/>
+          <a:blip r:embed="rId3"/>
           <a:stretch>
             <a:fillRect/>
           </a:stretch>
@@ -6804,7 +6621,7 @@
           <a:noFill/>
         </p:spPr>
         <p:txBody>
-          <a:bodyPr wrap="square" lIns="0" rIns="0" tIns="0" bIns="0" anchor="t">
+          <a:bodyPr wrap="square" lIns="0" tIns="0" rIns="0" bIns="0" anchor="t">
             <a:spAutoFit/>
           </a:bodyPr>
           <a:lstStyle/>
@@ -6852,7 +6669,7 @@
           <a:noFill/>
         </p:spPr>
         <p:txBody>
-          <a:bodyPr wrap="square" lIns="0" rIns="0" tIns="0" bIns="0" anchor="t">
+          <a:bodyPr wrap="square" lIns="0" tIns="0" rIns="0" bIns="0" anchor="t">
             <a:spAutoFit/>
           </a:bodyPr>
           <a:lstStyle/>
@@ -6900,7 +6717,7 @@
           <a:noFill/>
         </p:spPr>
         <p:txBody>
-          <a:bodyPr wrap="square" lIns="0" rIns="0" tIns="0" bIns="0" anchor="t">
+          <a:bodyPr wrap="square" lIns="0" tIns="0" rIns="0" bIns="0" anchor="t">
             <a:spAutoFit/>
           </a:bodyPr>
           <a:lstStyle/>
@@ -6948,7 +6765,7 @@
           <a:noFill/>
         </p:spPr>
         <p:txBody>
-          <a:bodyPr wrap="square" lIns="0" rIns="0" tIns="0" bIns="0" anchor="t">
+          <a:bodyPr wrap="square" lIns="0" tIns="0" rIns="0" bIns="0" anchor="t">
             <a:spAutoFit/>
           </a:bodyPr>
           <a:lstStyle/>
@@ -6996,7 +6813,7 @@
           <a:noFill/>
         </p:spPr>
         <p:txBody>
-          <a:bodyPr wrap="square" lIns="0" rIns="0" tIns="0" bIns="0" anchor="t">
+          <a:bodyPr wrap="square" lIns="0" tIns="0" rIns="0" bIns="0" anchor="t">
             <a:spAutoFit/>
           </a:bodyPr>
           <a:lstStyle/>
@@ -7023,7 +6840,7 @@
 </file>
 
 <file path=ppt/slides/slide14.xml><?xml version="1.0" encoding="utf-8"?>
-<p:sld xmlns:a="http://schemas.openxmlformats.org/drawingml/2006/main" xmlns:p="http://schemas.openxmlformats.org/presentationml/2006/main" xmlns:r="http://schemas.openxmlformats.org/officeDocument/2006/relationships">
+<p:sld xmlns:a="http://schemas.openxmlformats.org/drawingml/2006/main" xmlns:r="http://schemas.openxmlformats.org/officeDocument/2006/relationships" xmlns:p="http://schemas.openxmlformats.org/presentationml/2006/main">
   <p:cSld>
     <p:bg>
       <p:bgPr>
@@ -7039,7 +6856,14 @@
         <p:cNvGrpSpPr/>
         <p:nvPr/>
       </p:nvGrpSpPr>
-      <p:grpSpPr/>
+      <p:grpSpPr>
+        <a:xfrm>
+          <a:off x="0" y="0"/>
+          <a:ext cx="0" cy="0"/>
+          <a:chOff x="0" y="0"/>
+          <a:chExt cx="0" cy="0"/>
+        </a:xfrm>
+      </p:grpSpPr>
       <p:sp>
         <p:nvSpPr>
           <p:cNvPr id="2" name="TextBox 1"/>
@@ -7057,7 +6881,7 @@
           <a:noFill/>
         </p:spPr>
         <p:txBody>
-          <a:bodyPr wrap="square" lIns="0" rIns="0" tIns="0" bIns="0" anchor="t">
+          <a:bodyPr wrap="square" lIns="0" tIns="0" rIns="0" bIns="0" anchor="t">
             <a:spAutoFit/>
           </a:bodyPr>
           <a:lstStyle/>
@@ -7092,7 +6916,7 @@
           <a:noFill/>
         </p:spPr>
         <p:txBody>
-          <a:bodyPr wrap="square" lIns="0" rIns="0" tIns="0" bIns="0" anchor="t">
+          <a:bodyPr wrap="square" lIns="0" tIns="0" rIns="0" bIns="0" anchor="t">
             <a:spAutoFit/>
           </a:bodyPr>
           <a:lstStyle/>
@@ -7159,6 +6983,7 @@
           <a:lstStyle/>
           <a:p>
             <a:pPr algn="ctr"/>
+            <a:endParaRPr/>
           </a:p>
         </p:txBody>
       </p:sp>
@@ -7171,7 +6996,7 @@
           <p:nvPr/>
         </p:nvPicPr>
         <p:blipFill>
-          <a:blip r:embed="rId2"/>
+          <a:blip r:embed="rId3"/>
           <a:stretch>
             <a:fillRect/>
           </a:stretch>
@@ -7203,7 +7028,7 @@
           <a:noFill/>
         </p:spPr>
         <p:txBody>
-          <a:bodyPr wrap="square" lIns="0" rIns="0" tIns="0" bIns="0" anchor="t">
+          <a:bodyPr wrap="square" lIns="0" tIns="0" rIns="0" bIns="0" anchor="t">
             <a:spAutoFit/>
           </a:bodyPr>
           <a:lstStyle/>
@@ -7251,7 +7076,7 @@
           <a:noFill/>
         </p:spPr>
         <p:txBody>
-          <a:bodyPr wrap="square" lIns="0" rIns="0" tIns="0" bIns="0" anchor="t">
+          <a:bodyPr wrap="square" lIns="0" tIns="0" rIns="0" bIns="0" anchor="t">
             <a:spAutoFit/>
           </a:bodyPr>
           <a:lstStyle/>
@@ -7299,7 +7124,7 @@
           <a:noFill/>
         </p:spPr>
         <p:txBody>
-          <a:bodyPr wrap="square" lIns="0" rIns="0" tIns="0" bIns="0" anchor="t">
+          <a:bodyPr wrap="square" lIns="0" tIns="0" rIns="0" bIns="0" anchor="t">
             <a:spAutoFit/>
           </a:bodyPr>
           <a:lstStyle/>
@@ -7347,7 +7172,7 @@
           <a:noFill/>
         </p:spPr>
         <p:txBody>
-          <a:bodyPr wrap="square" lIns="0" rIns="0" tIns="0" bIns="0" anchor="t">
+          <a:bodyPr wrap="square" lIns="0" tIns="0" rIns="0" bIns="0" anchor="t">
             <a:spAutoFit/>
           </a:bodyPr>
           <a:lstStyle/>
@@ -7395,7 +7220,7 @@
           <a:noFill/>
         </p:spPr>
         <p:txBody>
-          <a:bodyPr wrap="square" lIns="0" rIns="0" tIns="0" bIns="0" anchor="t">
+          <a:bodyPr wrap="square" lIns="0" tIns="0" rIns="0" bIns="0" anchor="t">
             <a:spAutoFit/>
           </a:bodyPr>
           <a:lstStyle/>
@@ -7422,7 +7247,7 @@
 </file>
 
 <file path=ppt/slides/slide15.xml><?xml version="1.0" encoding="utf-8"?>
-<p:sld xmlns:a="http://schemas.openxmlformats.org/drawingml/2006/main" xmlns:p="http://schemas.openxmlformats.org/presentationml/2006/main" xmlns:r="http://schemas.openxmlformats.org/officeDocument/2006/relationships">
+<p:sld xmlns:a="http://schemas.openxmlformats.org/drawingml/2006/main" xmlns:r="http://schemas.openxmlformats.org/officeDocument/2006/relationships" xmlns:p="http://schemas.openxmlformats.org/presentationml/2006/main">
   <p:cSld>
     <p:bg>
       <p:bgPr>
@@ -7438,7 +7263,14 @@
         <p:cNvGrpSpPr/>
         <p:nvPr/>
       </p:nvGrpSpPr>
-      <p:grpSpPr/>
+      <p:grpSpPr>
+        <a:xfrm>
+          <a:off x="0" y="0"/>
+          <a:ext cx="0" cy="0"/>
+          <a:chOff x="0" y="0"/>
+          <a:chExt cx="0" cy="0"/>
+        </a:xfrm>
+      </p:grpSpPr>
       <p:sp>
         <p:nvSpPr>
           <p:cNvPr id="2" name="TextBox 1"/>
@@ -7456,7 +7288,7 @@
           <a:noFill/>
         </p:spPr>
         <p:txBody>
-          <a:bodyPr wrap="square" lIns="0" rIns="0" tIns="0" bIns="0" anchor="t">
+          <a:bodyPr wrap="square" lIns="0" tIns="0" rIns="0" bIns="0" anchor="t">
             <a:spAutoFit/>
           </a:bodyPr>
           <a:lstStyle/>
@@ -7491,7 +7323,7 @@
           <a:noFill/>
         </p:spPr>
         <p:txBody>
-          <a:bodyPr wrap="square" lIns="0" rIns="0" tIns="0" bIns="0" anchor="t">
+          <a:bodyPr wrap="square" lIns="0" tIns="0" rIns="0" bIns="0" anchor="t">
             <a:spAutoFit/>
           </a:bodyPr>
           <a:lstStyle/>
@@ -7558,6 +7390,7 @@
           <a:lstStyle/>
           <a:p>
             <a:pPr algn="ctr"/>
+            <a:endParaRPr/>
           </a:p>
         </p:txBody>
       </p:sp>
@@ -7570,7 +7403,7 @@
           <p:nvPr/>
         </p:nvPicPr>
         <p:blipFill>
-          <a:blip r:embed="rId2"/>
+          <a:blip r:embed="rId3"/>
           <a:stretch>
             <a:fillRect/>
           </a:stretch>
@@ -7600,10 +7433,22 @@
         <a:graphic>
           <a:graphicData uri="http://schemas.openxmlformats.org/drawingml/2006/table">
             <a:tbl>
-              <a:tblPr firstRow="0" bandRow="0"/>
+              <a:tblPr/>
               <a:tblGrid>
-                <a:gridCol w="3102570"/>
-                <a:gridCol w="2538512"/>
+                <a:gridCol w="3102570">
+                  <a:extLst>
+                    <a:ext uri="{9D8B030D-6E8A-4147-A177-3AD203B41FA5}">
+                      <a16:colId xmlns:a16="http://schemas.microsoft.com/office/drawing/2014/main" val="20000"/>
+                    </a:ext>
+                  </a:extLst>
+                </a:gridCol>
+                <a:gridCol w="2538512">
+                  <a:extLst>
+                    <a:ext uri="{9D8B030D-6E8A-4147-A177-3AD203B41FA5}">
+                      <a16:colId xmlns:a16="http://schemas.microsoft.com/office/drawing/2014/main" val="20001"/>
+                    </a:ext>
+                  </a:extLst>
+                </a:gridCol>
               </a:tblGrid>
               <a:tr h="767358">
                 <a:tc>
@@ -7690,6 +7535,11 @@
                     </a:solidFill>
                   </a:tcPr>
                 </a:tc>
+                <a:extLst>
+                  <a:ext uri="{0D108BD9-81ED-4DB2-BD59-A6C34878D82A}">
+                    <a16:rowId xmlns:a16="http://schemas.microsoft.com/office/drawing/2014/main" val="10000"/>
+                  </a:ext>
+                </a:extLst>
               </a:tr>
               <a:tr h="1235770">
                 <a:tc>
@@ -7776,6 +7626,11 @@
                     </a:solidFill>
                   </a:tcPr>
                 </a:tc>
+                <a:extLst>
+                  <a:ext uri="{0D108BD9-81ED-4DB2-BD59-A6C34878D82A}">
+                    <a16:rowId xmlns:a16="http://schemas.microsoft.com/office/drawing/2014/main" val="10001"/>
+                  </a:ext>
+                </a:extLst>
               </a:tr>
               <a:tr h="767358">
                 <a:tc>
@@ -7862,6 +7717,11 @@
                     </a:solidFill>
                   </a:tcPr>
                 </a:tc>
+                <a:extLst>
+                  <a:ext uri="{0D108BD9-81ED-4DB2-BD59-A6C34878D82A}">
+                    <a16:rowId xmlns:a16="http://schemas.microsoft.com/office/drawing/2014/main" val="10002"/>
+                  </a:ext>
+                </a:extLst>
               </a:tr>
               <a:tr h="767358">
                 <a:tc>
@@ -7948,6 +7808,11 @@
                     </a:solidFill>
                   </a:tcPr>
                 </a:tc>
+                <a:extLst>
+                  <a:ext uri="{0D108BD9-81ED-4DB2-BD59-A6C34878D82A}">
+                    <a16:rowId xmlns:a16="http://schemas.microsoft.com/office/drawing/2014/main" val="10003"/>
+                  </a:ext>
+                </a:extLst>
               </a:tr>
               <a:tr h="767457">
                 <a:tc>
@@ -8034,6 +7899,11 @@
                     </a:solidFill>
                   </a:tcPr>
                 </a:tc>
+                <a:extLst>
+                  <a:ext uri="{0D108BD9-81ED-4DB2-BD59-A6C34878D82A}">
+                    <a16:rowId xmlns:a16="http://schemas.microsoft.com/office/drawing/2014/main" val="10004"/>
+                  </a:ext>
+                </a:extLst>
               </a:tr>
             </a:tbl>
           </a:graphicData>
@@ -8056,7 +7926,7 @@
           <a:noFill/>
         </p:spPr>
         <p:txBody>
-          <a:bodyPr wrap="square" lIns="0" rIns="0" tIns="0" bIns="0" anchor="t">
+          <a:bodyPr wrap="square" lIns="0" tIns="0" rIns="0" bIns="0" anchor="t">
             <a:spAutoFit/>
           </a:bodyPr>
           <a:lstStyle/>
@@ -8083,7 +7953,7 @@
 </file>
 
 <file path=ppt/slides/slide16.xml><?xml version="1.0" encoding="utf-8"?>
-<p:sld xmlns:a="http://schemas.openxmlformats.org/drawingml/2006/main" xmlns:p="http://schemas.openxmlformats.org/presentationml/2006/main" xmlns:r="http://schemas.openxmlformats.org/officeDocument/2006/relationships">
+<p:sld xmlns:a="http://schemas.openxmlformats.org/drawingml/2006/main" xmlns:r="http://schemas.openxmlformats.org/officeDocument/2006/relationships" xmlns:p="http://schemas.openxmlformats.org/presentationml/2006/main">
   <p:cSld>
     <p:bg>
       <p:bgPr>
@@ -8099,7 +7969,14 @@
         <p:cNvGrpSpPr/>
         <p:nvPr/>
       </p:nvGrpSpPr>
-      <p:grpSpPr/>
+      <p:grpSpPr>
+        <a:xfrm>
+          <a:off x="0" y="0"/>
+          <a:ext cx="0" cy="0"/>
+          <a:chOff x="0" y="0"/>
+          <a:chExt cx="0" cy="0"/>
+        </a:xfrm>
+      </p:grpSpPr>
       <p:sp>
         <p:nvSpPr>
           <p:cNvPr id="2" name="TextBox 1"/>
@@ -8117,7 +7994,7 @@
           <a:noFill/>
         </p:spPr>
         <p:txBody>
-          <a:bodyPr wrap="square" lIns="0" rIns="0" tIns="0" bIns="0" anchor="t">
+          <a:bodyPr wrap="square" lIns="0" tIns="0" rIns="0" bIns="0" anchor="t">
             <a:spAutoFit/>
           </a:bodyPr>
           <a:lstStyle/>
@@ -8152,7 +8029,7 @@
           <a:noFill/>
         </p:spPr>
         <p:txBody>
-          <a:bodyPr wrap="square" lIns="0" rIns="0" tIns="0" bIns="0" anchor="t">
+          <a:bodyPr wrap="square" lIns="0" tIns="0" rIns="0" bIns="0" anchor="t">
             <a:spAutoFit/>
           </a:bodyPr>
           <a:lstStyle/>
@@ -8219,6 +8096,7 @@
           <a:lstStyle/>
           <a:p>
             <a:pPr algn="ctr"/>
+            <a:endParaRPr/>
           </a:p>
         </p:txBody>
       </p:sp>
@@ -8231,7 +8109,7 @@
           <p:nvPr/>
         </p:nvPicPr>
         <p:blipFill>
-          <a:blip r:embed="rId2"/>
+          <a:blip r:embed="rId3"/>
           <a:stretch>
             <a:fillRect/>
           </a:stretch>
@@ -8285,7 +8163,7 @@
           </a:fontRef>
         </p:style>
         <p:txBody>
-          <a:bodyPr rtlCol="0" anchor="ctr" wrap="square" lIns="152400" rIns="152400" tIns="0" bIns="0"/>
+          <a:bodyPr wrap="square" lIns="152400" tIns="0" rIns="152400" bIns="0" rtlCol="0" anchor="ctr"/>
           <a:lstStyle/>
           <a:p>
             <a:pPr algn="l"/>
@@ -8349,7 +8227,7 @@
           </a:fontRef>
         </p:style>
         <p:txBody>
-          <a:bodyPr rtlCol="0" anchor="ctr" wrap="square" lIns="152400" rIns="152400" tIns="0" bIns="0"/>
+          <a:bodyPr wrap="square" lIns="152400" tIns="0" rIns="152400" bIns="0" rtlCol="0" anchor="ctr"/>
           <a:lstStyle/>
           <a:p>
             <a:pPr algn="l"/>
@@ -8413,7 +8291,7 @@
           </a:fontRef>
         </p:style>
         <p:txBody>
-          <a:bodyPr rtlCol="0" anchor="ctr" wrap="square" lIns="152400" rIns="152400" tIns="0" bIns="0"/>
+          <a:bodyPr wrap="square" lIns="152400" tIns="0" rIns="152400" bIns="0" rtlCol="0" anchor="ctr"/>
           <a:lstStyle/>
           <a:p>
             <a:pPr algn="l"/>
@@ -8477,7 +8355,7 @@
           </a:fontRef>
         </p:style>
         <p:txBody>
-          <a:bodyPr rtlCol="0" anchor="ctr" wrap="square" lIns="152400" rIns="152400" tIns="0" bIns="0"/>
+          <a:bodyPr wrap="square" lIns="152400" tIns="0" rIns="152400" bIns="0" rtlCol="0" anchor="ctr"/>
           <a:lstStyle/>
           <a:p>
             <a:pPr algn="l"/>
@@ -8541,7 +8419,7 @@
           </a:fontRef>
         </p:style>
         <p:txBody>
-          <a:bodyPr rtlCol="0" anchor="ctr" wrap="square" lIns="152400" rIns="152400" tIns="0" bIns="0"/>
+          <a:bodyPr wrap="square" lIns="152400" tIns="0" rIns="152400" bIns="0" rtlCol="0" anchor="ctr"/>
           <a:lstStyle/>
           <a:p>
             <a:pPr algn="l"/>
@@ -8605,7 +8483,7 @@
           </a:fontRef>
         </p:style>
         <p:txBody>
-          <a:bodyPr rtlCol="0" anchor="ctr" wrap="square" lIns="152400" rIns="152400" tIns="0" bIns="0"/>
+          <a:bodyPr wrap="square" lIns="152400" tIns="0" rIns="152400" bIns="0" rtlCol="0" anchor="ctr"/>
           <a:lstStyle/>
           <a:p>
             <a:pPr algn="l"/>
@@ -8647,7 +8525,7 @@
           <a:noFill/>
         </p:spPr>
         <p:txBody>
-          <a:bodyPr wrap="square" lIns="0" rIns="0" tIns="0" bIns="0" anchor="t">
+          <a:bodyPr wrap="square" lIns="0" tIns="0" rIns="0" bIns="0" anchor="t">
             <a:spAutoFit/>
           </a:bodyPr>
           <a:lstStyle/>
@@ -8674,7 +8552,7 @@
 </file>
 
 <file path=ppt/slides/slide17.xml><?xml version="1.0" encoding="utf-8"?>
-<p:sld xmlns:a="http://schemas.openxmlformats.org/drawingml/2006/main" xmlns:p="http://schemas.openxmlformats.org/presentationml/2006/main" xmlns:r="http://schemas.openxmlformats.org/officeDocument/2006/relationships">
+<p:sld xmlns:a="http://schemas.openxmlformats.org/drawingml/2006/main" xmlns:r="http://schemas.openxmlformats.org/officeDocument/2006/relationships" xmlns:p="http://schemas.openxmlformats.org/presentationml/2006/main">
   <p:cSld>
     <p:bg>
       <p:bgPr>
@@ -8690,7 +8568,14 @@
         <p:cNvGrpSpPr/>
         <p:nvPr/>
       </p:nvGrpSpPr>
-      <p:grpSpPr/>
+      <p:grpSpPr>
+        <a:xfrm>
+          <a:off x="0" y="0"/>
+          <a:ext cx="0" cy="0"/>
+          <a:chOff x="0" y="0"/>
+          <a:chExt cx="0" cy="0"/>
+        </a:xfrm>
+      </p:grpSpPr>
       <p:sp>
         <p:nvSpPr>
           <p:cNvPr id="2" name="TextBox 1"/>
@@ -8708,7 +8593,7 @@
           <a:noFill/>
         </p:spPr>
         <p:txBody>
-          <a:bodyPr wrap="square" lIns="0" rIns="0" tIns="0" bIns="0" anchor="t">
+          <a:bodyPr wrap="square" lIns="0" tIns="0" rIns="0" bIns="0" anchor="t">
             <a:spAutoFit/>
           </a:bodyPr>
           <a:lstStyle/>
@@ -8743,7 +8628,7 @@
           <a:noFill/>
         </p:spPr>
         <p:txBody>
-          <a:bodyPr wrap="square" lIns="0" rIns="0" tIns="0" bIns="0" anchor="t">
+          <a:bodyPr wrap="square" lIns="0" tIns="0" rIns="0" bIns="0" anchor="t">
             <a:spAutoFit/>
           </a:bodyPr>
           <a:lstStyle/>
@@ -8810,6 +8695,7 @@
           <a:lstStyle/>
           <a:p>
             <a:pPr algn="ctr"/>
+            <a:endParaRPr/>
           </a:p>
         </p:txBody>
       </p:sp>
@@ -8822,7 +8708,7 @@
           <p:nvPr/>
         </p:nvPicPr>
         <p:blipFill>
-          <a:blip r:embed="rId2"/>
+          <a:blip r:embed="rId3"/>
           <a:stretch>
             <a:fillRect/>
           </a:stretch>
@@ -8852,11 +8738,29 @@
         <a:graphic>
           <a:graphicData uri="http://schemas.openxmlformats.org/drawingml/2006/table">
             <a:tbl>
-              <a:tblPr firstRow="0" bandRow="0"/>
+              <a:tblPr/>
               <a:tblGrid>
-                <a:gridCol w="3167955"/>
-                <a:gridCol w="2323207"/>
-                <a:gridCol w="5068888"/>
+                <a:gridCol w="3167955">
+                  <a:extLst>
+                    <a:ext uri="{9D8B030D-6E8A-4147-A177-3AD203B41FA5}">
+                      <a16:colId xmlns:a16="http://schemas.microsoft.com/office/drawing/2014/main" val="20000"/>
+                    </a:ext>
+                  </a:extLst>
+                </a:gridCol>
+                <a:gridCol w="2323207">
+                  <a:extLst>
+                    <a:ext uri="{9D8B030D-6E8A-4147-A177-3AD203B41FA5}">
+                      <a16:colId xmlns:a16="http://schemas.microsoft.com/office/drawing/2014/main" val="20001"/>
+                    </a:ext>
+                  </a:extLst>
+                </a:gridCol>
+                <a:gridCol w="5068888">
+                  <a:extLst>
+                    <a:ext uri="{9D8B030D-6E8A-4147-A177-3AD203B41FA5}">
+                      <a16:colId xmlns:a16="http://schemas.microsoft.com/office/drawing/2014/main" val="20002"/>
+                    </a:ext>
+                  </a:extLst>
+                </a:gridCol>
               </a:tblGrid>
               <a:tr h="301625">
                 <a:tc>
@@ -8985,6 +8889,11 @@
                     </a:solidFill>
                   </a:tcPr>
                 </a:tc>
+                <a:extLst>
+                  <a:ext uri="{0D108BD9-81ED-4DB2-BD59-A6C34878D82A}">
+                    <a16:rowId xmlns:a16="http://schemas.microsoft.com/office/drawing/2014/main" val="10000"/>
+                  </a:ext>
+                </a:extLst>
               </a:tr>
               <a:tr h="301625">
                 <a:tc>
@@ -9113,6 +9022,11 @@
                     </a:solidFill>
                   </a:tcPr>
                 </a:tc>
+                <a:extLst>
+                  <a:ext uri="{0D108BD9-81ED-4DB2-BD59-A6C34878D82A}">
+                    <a16:rowId xmlns:a16="http://schemas.microsoft.com/office/drawing/2014/main" val="10001"/>
+                  </a:ext>
+                </a:extLst>
               </a:tr>
               <a:tr h="301625">
                 <a:tc>
@@ -9241,6 +9155,11 @@
                     </a:solidFill>
                   </a:tcPr>
                 </a:tc>
+                <a:extLst>
+                  <a:ext uri="{0D108BD9-81ED-4DB2-BD59-A6C34878D82A}">
+                    <a16:rowId xmlns:a16="http://schemas.microsoft.com/office/drawing/2014/main" val="10002"/>
+                  </a:ext>
+                </a:extLst>
               </a:tr>
             </a:tbl>
           </a:graphicData>
@@ -9263,7 +9182,7 @@
           <a:noFill/>
         </p:spPr>
         <p:txBody>
-          <a:bodyPr wrap="square" lIns="0" rIns="0" tIns="0" bIns="0" anchor="t">
+          <a:bodyPr wrap="square" lIns="0" tIns="0" rIns="0" bIns="0" anchor="t">
             <a:spAutoFit/>
           </a:bodyPr>
           <a:lstStyle/>
@@ -9290,7 +9209,7 @@
 </file>
 
 <file path=ppt/slides/slide18.xml><?xml version="1.0" encoding="utf-8"?>
-<p:sld xmlns:a="http://schemas.openxmlformats.org/drawingml/2006/main" xmlns:p="http://schemas.openxmlformats.org/presentationml/2006/main" xmlns:r="http://schemas.openxmlformats.org/officeDocument/2006/relationships">
+<p:sld xmlns:a="http://schemas.openxmlformats.org/drawingml/2006/main" xmlns:r="http://schemas.openxmlformats.org/officeDocument/2006/relationships" xmlns:p="http://schemas.openxmlformats.org/presentationml/2006/main">
   <p:cSld>
     <p:bg>
       <p:bgPr>
@@ -9306,7 +9225,14 @@
         <p:cNvGrpSpPr/>
         <p:nvPr/>
       </p:nvGrpSpPr>
-      <p:grpSpPr/>
+      <p:grpSpPr>
+        <a:xfrm>
+          <a:off x="0" y="0"/>
+          <a:ext cx="0" cy="0"/>
+          <a:chOff x="0" y="0"/>
+          <a:chExt cx="0" cy="0"/>
+        </a:xfrm>
+      </p:grpSpPr>
       <p:sp>
         <p:nvSpPr>
           <p:cNvPr id="2" name="TextBox 1"/>
@@ -9324,7 +9250,7 @@
           <a:noFill/>
         </p:spPr>
         <p:txBody>
-          <a:bodyPr wrap="square" lIns="0" rIns="0" tIns="0" bIns="0" anchor="t">
+          <a:bodyPr wrap="square" lIns="0" tIns="0" rIns="0" bIns="0" anchor="t">
             <a:spAutoFit/>
           </a:bodyPr>
           <a:lstStyle/>
@@ -9359,7 +9285,7 @@
           <a:noFill/>
         </p:spPr>
         <p:txBody>
-          <a:bodyPr wrap="square" lIns="0" rIns="0" tIns="0" bIns="0" anchor="t">
+          <a:bodyPr wrap="square" lIns="0" tIns="0" rIns="0" bIns="0" anchor="t">
             <a:spAutoFit/>
           </a:bodyPr>
           <a:lstStyle/>
@@ -9396,11 +9322,29 @@
         <a:graphic>
           <a:graphicData uri="http://schemas.openxmlformats.org/drawingml/2006/table">
             <a:tbl>
-              <a:tblPr firstRow="0" bandRow="0"/>
+              <a:tblPr/>
               <a:tblGrid>
-                <a:gridCol w="2534345"/>
-                <a:gridCol w="3590330"/>
-                <a:gridCol w="4435376"/>
+                <a:gridCol w="2534345">
+                  <a:extLst>
+                    <a:ext uri="{9D8B030D-6E8A-4147-A177-3AD203B41FA5}">
+                      <a16:colId xmlns:a16="http://schemas.microsoft.com/office/drawing/2014/main" val="20000"/>
+                    </a:ext>
+                  </a:extLst>
+                </a:gridCol>
+                <a:gridCol w="3590330">
+                  <a:extLst>
+                    <a:ext uri="{9D8B030D-6E8A-4147-A177-3AD203B41FA5}">
+                      <a16:colId xmlns:a16="http://schemas.microsoft.com/office/drawing/2014/main" val="20001"/>
+                    </a:ext>
+                  </a:extLst>
+                </a:gridCol>
+                <a:gridCol w="4435376">
+                  <a:extLst>
+                    <a:ext uri="{9D8B030D-6E8A-4147-A177-3AD203B41FA5}">
+                      <a16:colId xmlns:a16="http://schemas.microsoft.com/office/drawing/2014/main" val="20002"/>
+                    </a:ext>
+                  </a:extLst>
+                </a:gridCol>
               </a:tblGrid>
               <a:tr h="301625">
                 <a:tc>
@@ -9529,6 +9473,11 @@
                     </a:solidFill>
                   </a:tcPr>
                 </a:tc>
+                <a:extLst>
+                  <a:ext uri="{0D108BD9-81ED-4DB2-BD59-A6C34878D82A}">
+                    <a16:rowId xmlns:a16="http://schemas.microsoft.com/office/drawing/2014/main" val="10000"/>
+                  </a:ext>
+                </a:extLst>
               </a:tr>
               <a:tr h="301625">
                 <a:tc>
@@ -9657,6 +9606,11 @@
                     </a:solidFill>
                   </a:tcPr>
                 </a:tc>
+                <a:extLst>
+                  <a:ext uri="{0D108BD9-81ED-4DB2-BD59-A6C34878D82A}">
+                    <a16:rowId xmlns:a16="http://schemas.microsoft.com/office/drawing/2014/main" val="10001"/>
+                  </a:ext>
+                </a:extLst>
               </a:tr>
               <a:tr h="301625">
                 <a:tc>
@@ -9785,6 +9739,11 @@
                     </a:solidFill>
                   </a:tcPr>
                 </a:tc>
+                <a:extLst>
+                  <a:ext uri="{0D108BD9-81ED-4DB2-BD59-A6C34878D82A}">
+                    <a16:rowId xmlns:a16="http://schemas.microsoft.com/office/drawing/2014/main" val="10002"/>
+                  </a:ext>
+                </a:extLst>
               </a:tr>
               <a:tr h="301625">
                 <a:tc>
@@ -9913,6 +9872,11 @@
                     </a:solidFill>
                   </a:tcPr>
                 </a:tc>
+                <a:extLst>
+                  <a:ext uri="{0D108BD9-81ED-4DB2-BD59-A6C34878D82A}">
+                    <a16:rowId xmlns:a16="http://schemas.microsoft.com/office/drawing/2014/main" val="10003"/>
+                  </a:ext>
+                </a:extLst>
               </a:tr>
               <a:tr h="301625">
                 <a:tc>
@@ -10041,6 +10005,11 @@
                     </a:solidFill>
                   </a:tcPr>
                 </a:tc>
+                <a:extLst>
+                  <a:ext uri="{0D108BD9-81ED-4DB2-BD59-A6C34878D82A}">
+                    <a16:rowId xmlns:a16="http://schemas.microsoft.com/office/drawing/2014/main" val="10004"/>
+                  </a:ext>
+                </a:extLst>
               </a:tr>
               <a:tr h="301625">
                 <a:tc>
@@ -10169,6 +10138,11 @@
                     </a:solidFill>
                   </a:tcPr>
                 </a:tc>
+                <a:extLst>
+                  <a:ext uri="{0D108BD9-81ED-4DB2-BD59-A6C34878D82A}">
+                    <a16:rowId xmlns:a16="http://schemas.microsoft.com/office/drawing/2014/main" val="10005"/>
+                  </a:ext>
+                </a:extLst>
               </a:tr>
               <a:tr h="301625">
                 <a:tc>
@@ -10297,6 +10271,11 @@
                     </a:solidFill>
                   </a:tcPr>
                 </a:tc>
+                <a:extLst>
+                  <a:ext uri="{0D108BD9-81ED-4DB2-BD59-A6C34878D82A}">
+                    <a16:rowId xmlns:a16="http://schemas.microsoft.com/office/drawing/2014/main" val="10006"/>
+                  </a:ext>
+                </a:extLst>
               </a:tr>
             </a:tbl>
           </a:graphicData>
@@ -10319,7 +10298,7 @@
           <a:noFill/>
         </p:spPr>
         <p:txBody>
-          <a:bodyPr wrap="square" lIns="0" rIns="0" tIns="0" bIns="0" anchor="t">
+          <a:bodyPr wrap="square" lIns="0" tIns="0" rIns="0" bIns="0" anchor="t">
             <a:spAutoFit/>
           </a:bodyPr>
           <a:lstStyle/>
@@ -10346,7 +10325,7 @@
 </file>
 
 <file path=ppt/slides/slide19.xml><?xml version="1.0" encoding="utf-8"?>
-<p:sld xmlns:a="http://schemas.openxmlformats.org/drawingml/2006/main" xmlns:p="http://schemas.openxmlformats.org/presentationml/2006/main" xmlns:r="http://schemas.openxmlformats.org/officeDocument/2006/relationships">
+<p:sld xmlns:a="http://schemas.openxmlformats.org/drawingml/2006/main" xmlns:r="http://schemas.openxmlformats.org/officeDocument/2006/relationships" xmlns:p="http://schemas.openxmlformats.org/presentationml/2006/main">
   <p:cSld>
     <p:bg>
       <p:bgPr>
@@ -10362,7 +10341,14 @@
         <p:cNvGrpSpPr/>
         <p:nvPr/>
       </p:nvGrpSpPr>
-      <p:grpSpPr/>
+      <p:grpSpPr>
+        <a:xfrm>
+          <a:off x="0" y="0"/>
+          <a:ext cx="0" cy="0"/>
+          <a:chOff x="0" y="0"/>
+          <a:chExt cx="0" cy="0"/>
+        </a:xfrm>
+      </p:grpSpPr>
       <p:sp>
         <p:nvSpPr>
           <p:cNvPr id="2" name="TextBox 1"/>
@@ -10380,7 +10366,7 @@
           <a:noFill/>
         </p:spPr>
         <p:txBody>
-          <a:bodyPr wrap="square" lIns="0" rIns="0" tIns="0" bIns="0" anchor="t">
+          <a:bodyPr wrap="square" lIns="0" tIns="0" rIns="0" bIns="0" anchor="t">
             <a:spAutoFit/>
           </a:bodyPr>
           <a:lstStyle/>
@@ -10407,7 +10393,7 @@
         <p:spPr>
           <a:xfrm>
             <a:off x="812800" y="939800"/>
-            <a:ext cx="10617200" cy="438150"/>
+            <a:ext cx="10617200" cy="478977"/>
           </a:xfrm>
           <a:prstGeom prst="rect">
             <a:avLst/>
@@ -10415,7 +10401,7 @@
           <a:noFill/>
         </p:spPr>
         <p:txBody>
-          <a:bodyPr wrap="square" lIns="0" rIns="0" tIns="0" bIns="0" anchor="t">
+          <a:bodyPr wrap="square" lIns="0" tIns="0" rIns="0" bIns="0" anchor="t">
             <a:spAutoFit/>
           </a:bodyPr>
           <a:lstStyle/>
@@ -10426,14 +10412,20 @@
               </a:lnSpc>
             </a:pPr>
             <a:r>
-              <a:rPr sz="3000" b="1" i="0">
+              <a:rPr lang="en-US" sz="3000" b="1" i="0">
                 <a:solidFill>
                   <a:srgbClr val="14213D"/>
                 </a:solidFill>
                 <a:latin typeface="Rubik"/>
               </a:rPr>
-              <a:t>[D's use case]: activity, sequence and state machine</a:t>
-            </a:r>
+              <a:t>UC-D1: weather and dietary guidance</a:t>
+            </a:r>
+            <a:endParaRPr sz="3000" b="1" i="0">
+              <a:solidFill>
+                <a:srgbClr val="14213D"/>
+              </a:solidFill>
+              <a:latin typeface="Rubik"/>
+            </a:endParaRPr>
           </a:p>
         </p:txBody>
       </p:sp>
@@ -10483,41 +10475,7 @@
           <a:lstStyle/>
           <a:p>
             <a:pPr algn="ctr"/>
-          </a:p>
-        </p:txBody>
-      </p:sp>
-      <p:sp>
-        <p:nvSpPr>
-          <p:cNvPr id="5" name="TextBox 4"/>
-          <p:cNvSpPr txBox="1"/>
-          <p:nvPr/>
-        </p:nvSpPr>
-        <p:spPr>
-          <a:xfrm>
-            <a:off x="1829296" y="3584575"/>
-            <a:ext cx="1404441" cy="203200"/>
-          </a:xfrm>
-          <a:prstGeom prst="rect">
-            <a:avLst/>
-          </a:prstGeom>
-          <a:noFill/>
-        </p:spPr>
-        <p:txBody>
-          <a:bodyPr wrap="square" lIns="0" rIns="0" tIns="0" bIns="0" anchor="t">
-            <a:spAutoFit/>
-          </a:bodyPr>
-          <a:lstStyle/>
-          <a:p>
-            <a:pPr algn="l"/>
-            <a:r>
-              <a:rPr sz="1400" b="0" i="0">
-                <a:solidFill>
-                  <a:srgbClr val="5A6478"/>
-                </a:solidFill>
-                <a:latin typeface="IBM Plex Sans"/>
-              </a:rPr>
-              <a:t>[Activity diagram]</a:t>
-            </a:r>
+            <a:endParaRPr/>
           </a:p>
         </p:txBody>
       </p:sp>
@@ -10567,41 +10525,7 @@
           <a:lstStyle/>
           <a:p>
             <a:pPr algn="ctr"/>
-          </a:p>
-        </p:txBody>
-      </p:sp>
-      <p:sp>
-        <p:nvSpPr>
-          <p:cNvPr id="7" name="TextBox 6"/>
-          <p:cNvSpPr txBox="1"/>
-          <p:nvPr/>
-        </p:nvSpPr>
-        <p:spPr>
-          <a:xfrm>
-            <a:off x="5300266" y="3584575"/>
-            <a:ext cx="1642170" cy="203200"/>
-          </a:xfrm>
-          <a:prstGeom prst="rect">
-            <a:avLst/>
-          </a:prstGeom>
-          <a:noFill/>
-        </p:spPr>
-        <p:txBody>
-          <a:bodyPr wrap="square" lIns="0" rIns="0" tIns="0" bIns="0" anchor="t">
-            <a:spAutoFit/>
-          </a:bodyPr>
-          <a:lstStyle/>
-          <a:p>
-            <a:pPr algn="l"/>
-            <a:r>
-              <a:rPr sz="1400" b="0" i="0">
-                <a:solidFill>
-                  <a:srgbClr val="5A6478"/>
-                </a:solidFill>
-                <a:latin typeface="IBM Plex Sans"/>
-              </a:rPr>
-              <a:t>[Sequence diagram]</a:t>
-            </a:r>
+            <a:endParaRPr/>
           </a:p>
         </p:txBody>
       </p:sp>
@@ -10651,19 +10575,20 @@
           <a:lstStyle/>
           <a:p>
             <a:pPr algn="ctr"/>
-          </a:p>
-        </p:txBody>
-      </p:sp>
-      <p:sp>
-        <p:nvSpPr>
-          <p:cNvPr id="9" name="TextBox 8"/>
+            <a:endParaRPr/>
+          </a:p>
+        </p:txBody>
+      </p:sp>
+      <p:sp>
+        <p:nvSpPr>
+          <p:cNvPr id="10" name="TextBox 9"/>
           <p:cNvSpPr txBox="1"/>
           <p:nvPr/>
         </p:nvSpPr>
         <p:spPr>
           <a:xfrm>
-            <a:off x="9067998" y="3584575"/>
-            <a:ext cx="1286272" cy="203200"/>
+            <a:off x="812800" y="6273800"/>
+            <a:ext cx="10617200" cy="177800"/>
           </a:xfrm>
           <a:prstGeom prst="rect">
             <a:avLst/>
@@ -10671,42 +10596,7 @@
           <a:noFill/>
         </p:spPr>
         <p:txBody>
-          <a:bodyPr wrap="square" lIns="0" rIns="0" tIns="0" bIns="0" anchor="t">
-            <a:spAutoFit/>
-          </a:bodyPr>
-          <a:lstStyle/>
-          <a:p>
-            <a:pPr algn="l"/>
-            <a:r>
-              <a:rPr sz="1400" b="0" i="0">
-                <a:solidFill>
-                  <a:srgbClr val="5A6478"/>
-                </a:solidFill>
-                <a:latin typeface="IBM Plex Sans"/>
-              </a:rPr>
-              <a:t>[State machine]</a:t>
-            </a:r>
-          </a:p>
-        </p:txBody>
-      </p:sp>
-      <p:sp>
-        <p:nvSpPr>
-          <p:cNvPr id="10" name="TextBox 9"/>
-          <p:cNvSpPr txBox="1"/>
-          <p:nvPr/>
-        </p:nvSpPr>
-        <p:spPr>
-          <a:xfrm>
-            <a:off x="812800" y="6273800"/>
-            <a:ext cx="10617200" cy="177800"/>
-          </a:xfrm>
-          <a:prstGeom prst="rect">
-            <a:avLst/>
-          </a:prstGeom>
-          <a:noFill/>
-        </p:spPr>
-        <p:txBody>
-          <a:bodyPr wrap="square" lIns="0" rIns="0" tIns="0" bIns="0" anchor="t">
+          <a:bodyPr wrap="square" lIns="0" tIns="0" rIns="0" bIns="0" anchor="t">
             <a:spAutoFit/>
           </a:bodyPr>
           <a:lstStyle/>
@@ -10721,6 +10611,219 @@
               </a:rPr>
               <a:t>AI Trip Planner · ELEC5620 Stage 1</a:t>
             </a:r>
+          </a:p>
+        </p:txBody>
+      </p:sp>
+      <p:pic>
+        <p:nvPicPr>
+          <p:cNvPr id="12" name="D activity model" descr="Activity · evidence to LLM to validation">
+            <a:extLst>
+              <a:ext uri="{FF2B5EF4-FFF2-40B4-BE49-F238E27FC236}">
+                <a16:creationId xmlns:a16="http://schemas.microsoft.com/office/drawing/2014/main" id="{223A48C1-00DA-899E-98A9-E301C8A0A736}"/>
+              </a:ext>
+            </a:extLst>
+          </p:cNvPr>
+          <p:cNvPicPr>
+            <a:picLocks noChangeAspect="1"/>
+          </p:cNvPicPr>
+          <p:nvPr/>
+        </p:nvPicPr>
+        <p:blipFill>
+          <a:blip r:embed="rId3"/>
+          <a:stretch>
+            <a:fillRect/>
+          </a:stretch>
+        </p:blipFill>
+        <p:spPr>
+          <a:xfrm>
+            <a:off x="1768128" y="1682750"/>
+            <a:ext cx="1475979" cy="3448050"/>
+          </a:xfrm>
+          <a:prstGeom prst="rect">
+            <a:avLst/>
+          </a:prstGeom>
+        </p:spPr>
+      </p:pic>
+      <p:sp>
+        <p:nvSpPr>
+          <p:cNvPr id="5" name="TextBox 4"/>
+          <p:cNvSpPr txBox="1"/>
+          <p:nvPr/>
+        </p:nvSpPr>
+        <p:spPr>
+          <a:xfrm>
+            <a:off x="914399" y="5461000"/>
+            <a:ext cx="3183434" cy="138499"/>
+          </a:xfrm>
+          <a:prstGeom prst="rect">
+            <a:avLst/>
+          </a:prstGeom>
+          <a:noFill/>
+        </p:spPr>
+        <p:txBody>
+          <a:bodyPr wrap="square" lIns="0" tIns="0" rIns="0" bIns="0" anchor="t">
+            <a:spAutoFit/>
+          </a:bodyPr>
+          <a:lstStyle/>
+          <a:p>
+            <a:pPr algn="ctr"/>
+            <a:r>
+              <a:rPr lang="en-US" sz="900" b="0" i="0">
+                <a:solidFill>
+                  <a:srgbClr val="5A6478"/>
+                </a:solidFill>
+                <a:latin typeface="IBM Plex Sans"/>
+              </a:rPr>
+              <a:t>Activity · evidence to LLM to validation</a:t>
+            </a:r>
+            <a:endParaRPr sz="900" b="0" i="0">
+              <a:solidFill>
+                <a:srgbClr val="5A6478"/>
+              </a:solidFill>
+              <a:latin typeface="IBM Plex Sans"/>
+            </a:endParaRPr>
+          </a:p>
+        </p:txBody>
+      </p:sp>
+      <p:pic>
+        <p:nvPicPr>
+          <p:cNvPr id="14" name="D sequence model" descr="Sequence · parallel guide and dining">
+            <a:extLst>
+              <a:ext uri="{FF2B5EF4-FFF2-40B4-BE49-F238E27FC236}">
+                <a16:creationId xmlns:a16="http://schemas.microsoft.com/office/drawing/2014/main" id="{F5336A86-BCDE-512B-A105-63A69ECB88A8}"/>
+              </a:ext>
+            </a:extLst>
+          </p:cNvPr>
+          <p:cNvPicPr>
+            <a:picLocks noChangeAspect="1"/>
+          </p:cNvPicPr>
+          <p:nvPr/>
+        </p:nvPicPr>
+        <p:blipFill>
+          <a:blip r:embed="rId4"/>
+          <a:stretch>
+            <a:fillRect/>
+          </a:stretch>
+        </p:blipFill>
+        <p:spPr>
+          <a:xfrm>
+            <a:off x="4597464" y="1682750"/>
+            <a:ext cx="2996975" cy="3448050"/>
+          </a:xfrm>
+          <a:prstGeom prst="rect">
+            <a:avLst/>
+          </a:prstGeom>
+        </p:spPr>
+      </p:pic>
+      <p:sp>
+        <p:nvSpPr>
+          <p:cNvPr id="7" name="TextBox 6"/>
+          <p:cNvSpPr txBox="1"/>
+          <p:nvPr/>
+        </p:nvSpPr>
+        <p:spPr>
+          <a:xfrm>
+            <a:off x="4504234" y="5461000"/>
+            <a:ext cx="3183434" cy="138499"/>
+          </a:xfrm>
+          <a:prstGeom prst="rect">
+            <a:avLst/>
+          </a:prstGeom>
+          <a:noFill/>
+        </p:spPr>
+        <p:txBody>
+          <a:bodyPr wrap="square" lIns="0" tIns="0" rIns="0" bIns="0" anchor="t">
+            <a:spAutoFit/>
+          </a:bodyPr>
+          <a:lstStyle/>
+          <a:p>
+            <a:pPr algn="ctr"/>
+            <a:r>
+              <a:rPr lang="en-US" sz="900" b="0" i="0">
+                <a:solidFill>
+                  <a:srgbClr val="5A6478"/>
+                </a:solidFill>
+                <a:latin typeface="IBM Plex Sans"/>
+              </a:rPr>
+              <a:t>Sequence · parallel guide and dining</a:t>
+            </a:r>
+            <a:endParaRPr sz="900" b="0" i="0">
+              <a:solidFill>
+                <a:srgbClr val="5A6478"/>
+              </a:solidFill>
+              <a:latin typeface="IBM Plex Sans"/>
+            </a:endParaRPr>
+          </a:p>
+        </p:txBody>
+      </p:sp>
+      <p:pic>
+        <p:nvPicPr>
+          <p:cNvPr id="16" name="D state model" descr="States · ready, fallback, failure">
+            <a:extLst>
+              <a:ext uri="{FF2B5EF4-FFF2-40B4-BE49-F238E27FC236}">
+                <a16:creationId xmlns:a16="http://schemas.microsoft.com/office/drawing/2014/main" id="{1533364A-48F9-1670-65FD-A4C783A34C64}"/>
+              </a:ext>
+            </a:extLst>
+          </p:cNvPr>
+          <p:cNvPicPr>
+            <a:picLocks noChangeAspect="1"/>
+          </p:cNvPicPr>
+          <p:nvPr/>
+        </p:nvPicPr>
+        <p:blipFill>
+          <a:blip r:embed="rId5"/>
+          <a:stretch>
+            <a:fillRect/>
+          </a:stretch>
+        </p:blipFill>
+        <p:spPr>
+          <a:xfrm>
+            <a:off x="8401583" y="1682750"/>
+            <a:ext cx="2568403" cy="3448050"/>
+          </a:xfrm>
+          <a:prstGeom prst="rect">
+            <a:avLst/>
+          </a:prstGeom>
+        </p:spPr>
+      </p:pic>
+      <p:sp>
+        <p:nvSpPr>
+          <p:cNvPr id="9" name="TextBox 8"/>
+          <p:cNvSpPr txBox="1"/>
+          <p:nvPr/>
+        </p:nvSpPr>
+        <p:spPr>
+          <a:xfrm>
+            <a:off x="8094067" y="5461000"/>
+            <a:ext cx="3183434" cy="138499"/>
+          </a:xfrm>
+          <a:prstGeom prst="rect">
+            <a:avLst/>
+          </a:prstGeom>
+          <a:noFill/>
+        </p:spPr>
+        <p:txBody>
+          <a:bodyPr wrap="square" lIns="0" tIns="0" rIns="0" bIns="0" anchor="t">
+            <a:spAutoFit/>
+          </a:bodyPr>
+          <a:lstStyle/>
+          <a:p>
+            <a:pPr algn="ctr"/>
+            <a:r>
+              <a:rPr lang="en-GB" sz="900" b="0" i="0">
+                <a:solidFill>
+                  <a:srgbClr val="5A6478"/>
+                </a:solidFill>
+                <a:latin typeface="IBM Plex Sans"/>
+              </a:rPr>
+              <a:t>States · ready, fallback, failure</a:t>
+            </a:r>
+            <a:endParaRPr sz="900" b="0" i="0">
+              <a:solidFill>
+                <a:srgbClr val="5A6478"/>
+              </a:solidFill>
+              <a:latin typeface="IBM Plex Sans"/>
+            </a:endParaRPr>
           </a:p>
         </p:txBody>
       </p:sp>
@@ -10733,7 +10836,7 @@
 </file>
 
 <file path=ppt/slides/slide2.xml><?xml version="1.0" encoding="utf-8"?>
-<p:sld xmlns:a="http://schemas.openxmlformats.org/drawingml/2006/main" xmlns:p="http://schemas.openxmlformats.org/presentationml/2006/main" xmlns:r="http://schemas.openxmlformats.org/officeDocument/2006/relationships">
+<p:sld xmlns:a="http://schemas.openxmlformats.org/drawingml/2006/main" xmlns:r="http://schemas.openxmlformats.org/officeDocument/2006/relationships" xmlns:p="http://schemas.openxmlformats.org/presentationml/2006/main">
   <p:cSld>
     <p:bg>
       <p:bgPr>
@@ -10749,7 +10852,14 @@
         <p:cNvGrpSpPr/>
         <p:nvPr/>
       </p:nvGrpSpPr>
-      <p:grpSpPr/>
+      <p:grpSpPr>
+        <a:xfrm>
+          <a:off x="0" y="0"/>
+          <a:ext cx="0" cy="0"/>
+          <a:chOff x="0" y="0"/>
+          <a:chExt cx="0" cy="0"/>
+        </a:xfrm>
+      </p:grpSpPr>
       <p:sp>
         <p:nvSpPr>
           <p:cNvPr id="2" name="TextBox 1"/>
@@ -10767,7 +10877,7 @@
           <a:noFill/>
         </p:spPr>
         <p:txBody>
-          <a:bodyPr wrap="square" lIns="0" rIns="0" tIns="0" bIns="0" anchor="t">
+          <a:bodyPr wrap="square" lIns="0" tIns="0" rIns="0" bIns="0" anchor="t">
             <a:spAutoFit/>
           </a:bodyPr>
           <a:lstStyle/>
@@ -10802,7 +10912,7 @@
           <a:noFill/>
         </p:spPr>
         <p:txBody>
-          <a:bodyPr wrap="square" lIns="0" rIns="0" tIns="0" bIns="0" anchor="t">
+          <a:bodyPr wrap="square" lIns="0" tIns="0" rIns="0" bIns="0" anchor="t">
             <a:spAutoFit/>
           </a:bodyPr>
           <a:lstStyle/>
@@ -10869,6 +10979,7 @@
           <a:lstStyle/>
           <a:p>
             <a:pPr algn="ctr"/>
+            <a:endParaRPr/>
           </a:p>
         </p:txBody>
       </p:sp>
@@ -10889,7 +11000,7 @@
           <a:noFill/>
         </p:spPr>
         <p:txBody>
-          <a:bodyPr wrap="square" lIns="0" rIns="0" tIns="0" bIns="0" anchor="t">
+          <a:bodyPr wrap="square" lIns="0" tIns="0" rIns="0" bIns="0" anchor="t">
             <a:spAutoFit/>
           </a:bodyPr>
           <a:lstStyle/>
@@ -10924,7 +11035,7 @@
           <a:noFill/>
         </p:spPr>
         <p:txBody>
-          <a:bodyPr wrap="square" lIns="0" rIns="0" tIns="0" bIns="0" anchor="t">
+          <a:bodyPr wrap="square" lIns="0" tIns="0" rIns="0" bIns="0" anchor="t">
             <a:spAutoFit/>
           </a:bodyPr>
           <a:lstStyle/>
@@ -10991,6 +11102,7 @@
           <a:lstStyle/>
           <a:p>
             <a:pPr algn="ctr"/>
+            <a:endParaRPr/>
           </a:p>
         </p:txBody>
       </p:sp>
@@ -11011,7 +11123,7 @@
           <a:noFill/>
         </p:spPr>
         <p:txBody>
-          <a:bodyPr wrap="square" lIns="0" rIns="0" tIns="0" bIns="0" anchor="t">
+          <a:bodyPr wrap="square" lIns="0" tIns="0" rIns="0" bIns="0" anchor="t">
             <a:spAutoFit/>
           </a:bodyPr>
           <a:lstStyle/>
@@ -11046,7 +11158,7 @@
           <a:noFill/>
         </p:spPr>
         <p:txBody>
-          <a:bodyPr wrap="square" lIns="0" rIns="0" tIns="0" bIns="0" anchor="t">
+          <a:bodyPr wrap="square" lIns="0" tIns="0" rIns="0" bIns="0" anchor="t">
             <a:spAutoFit/>
           </a:bodyPr>
           <a:lstStyle/>
@@ -11111,6 +11223,7 @@
           <a:lstStyle/>
           <a:p>
             <a:pPr algn="ctr"/>
+            <a:endParaRPr/>
           </a:p>
         </p:txBody>
       </p:sp>
@@ -11131,7 +11244,7 @@
           <a:noFill/>
         </p:spPr>
         <p:txBody>
-          <a:bodyPr wrap="square" lIns="0" rIns="0" tIns="0" bIns="0" anchor="t">
+          <a:bodyPr wrap="square" lIns="0" tIns="0" rIns="0" bIns="0" anchor="t">
             <a:spAutoFit/>
           </a:bodyPr>
           <a:lstStyle/>
@@ -11166,7 +11279,7 @@
           <a:noFill/>
         </p:spPr>
         <p:txBody>
-          <a:bodyPr wrap="square" lIns="0" rIns="0" tIns="0" bIns="0" anchor="t">
+          <a:bodyPr wrap="square" lIns="0" tIns="0" rIns="0" bIns="0" anchor="t">
             <a:spAutoFit/>
           </a:bodyPr>
           <a:lstStyle/>
@@ -11205,7 +11318,7 @@
           <a:noFill/>
         </p:spPr>
         <p:txBody>
-          <a:bodyPr wrap="square" lIns="0" rIns="0" tIns="0" bIns="0" anchor="t">
+          <a:bodyPr wrap="square" lIns="0" tIns="0" rIns="0" bIns="0" anchor="t">
             <a:spAutoFit/>
           </a:bodyPr>
           <a:lstStyle/>
@@ -11232,7 +11345,7 @@
 </file>
 
 <file path=ppt/slides/slide20.xml><?xml version="1.0" encoding="utf-8"?>
-<p:sld xmlns:a="http://schemas.openxmlformats.org/drawingml/2006/main" xmlns:p="http://schemas.openxmlformats.org/presentationml/2006/main" xmlns:r="http://schemas.openxmlformats.org/officeDocument/2006/relationships">
+<p:sld xmlns:a="http://schemas.openxmlformats.org/drawingml/2006/main" xmlns:r="http://schemas.openxmlformats.org/officeDocument/2006/relationships" xmlns:p="http://schemas.openxmlformats.org/presentationml/2006/main">
   <p:cSld>
     <p:bg>
       <p:bgPr>
@@ -11248,7 +11361,14 @@
         <p:cNvGrpSpPr/>
         <p:nvPr/>
       </p:nvGrpSpPr>
-      <p:grpSpPr/>
+      <p:grpSpPr>
+        <a:xfrm>
+          <a:off x="0" y="0"/>
+          <a:ext cx="0" cy="0"/>
+          <a:chOff x="0" y="0"/>
+          <a:chExt cx="0" cy="0"/>
+        </a:xfrm>
+      </p:grpSpPr>
       <p:sp>
         <p:nvSpPr>
           <p:cNvPr id="2" name="TextBox 1"/>
@@ -11266,7 +11386,7 @@
           <a:noFill/>
         </p:spPr>
         <p:txBody>
-          <a:bodyPr wrap="square" lIns="0" rIns="0" tIns="0" bIns="0" anchor="t">
+          <a:bodyPr wrap="square" lIns="0" tIns="0" rIns="0" bIns="0" anchor="t">
             <a:spAutoFit/>
           </a:bodyPr>
           <a:lstStyle/>
@@ -11301,7 +11421,7 @@
           <a:noFill/>
         </p:spPr>
         <p:txBody>
-          <a:bodyPr wrap="square" lIns="0" rIns="0" tIns="0" bIns="0" anchor="t">
+          <a:bodyPr wrap="square" lIns="0" tIns="0" rIns="0" bIns="0" anchor="t">
             <a:spAutoFit/>
           </a:bodyPr>
           <a:lstStyle/>
@@ -11368,6 +11488,7 @@
           <a:lstStyle/>
           <a:p>
             <a:pPr algn="ctr"/>
+            <a:endParaRPr/>
           </a:p>
         </p:txBody>
       </p:sp>
@@ -11380,7 +11501,7 @@
           <p:nvPr/>
         </p:nvPicPr>
         <p:blipFill>
-          <a:blip r:embed="rId2"/>
+          <a:blip r:embed="rId3"/>
           <a:stretch>
             <a:fillRect/>
           </a:stretch>
@@ -11412,7 +11533,7 @@
           <a:noFill/>
         </p:spPr>
         <p:txBody>
-          <a:bodyPr wrap="square" lIns="0" rIns="0" tIns="0" bIns="0" anchor="t">
+          <a:bodyPr wrap="square" lIns="0" tIns="0" rIns="0" bIns="0" anchor="t">
             <a:spAutoFit/>
           </a:bodyPr>
           <a:lstStyle/>
@@ -11460,7 +11581,7 @@
           <a:noFill/>
         </p:spPr>
         <p:txBody>
-          <a:bodyPr wrap="square" lIns="0" rIns="0" tIns="0" bIns="0" anchor="t">
+          <a:bodyPr wrap="square" lIns="0" tIns="0" rIns="0" bIns="0" anchor="t">
             <a:spAutoFit/>
           </a:bodyPr>
           <a:lstStyle/>
@@ -11508,7 +11629,7 @@
           <a:noFill/>
         </p:spPr>
         <p:txBody>
-          <a:bodyPr wrap="square" lIns="0" rIns="0" tIns="0" bIns="0" anchor="t">
+          <a:bodyPr wrap="square" lIns="0" tIns="0" rIns="0" bIns="0" anchor="t">
             <a:spAutoFit/>
           </a:bodyPr>
           <a:lstStyle/>
@@ -11556,7 +11677,7 @@
           <a:noFill/>
         </p:spPr>
         <p:txBody>
-          <a:bodyPr wrap="square" lIns="0" rIns="0" tIns="0" bIns="0" anchor="t">
+          <a:bodyPr wrap="square" lIns="0" tIns="0" rIns="0" bIns="0" anchor="t">
             <a:spAutoFit/>
           </a:bodyPr>
           <a:lstStyle/>
@@ -11604,7 +11725,7 @@
           <a:noFill/>
         </p:spPr>
         <p:txBody>
-          <a:bodyPr wrap="square" lIns="0" rIns="0" tIns="0" bIns="0" anchor="t">
+          <a:bodyPr wrap="square" lIns="0" tIns="0" rIns="0" bIns="0" anchor="t">
             <a:spAutoFit/>
           </a:bodyPr>
           <a:lstStyle/>
@@ -11631,7 +11752,7 @@
 </file>
 
 <file path=ppt/slides/slide21.xml><?xml version="1.0" encoding="utf-8"?>
-<p:sld xmlns:a="http://schemas.openxmlformats.org/drawingml/2006/main" xmlns:p="http://schemas.openxmlformats.org/presentationml/2006/main" xmlns:r="http://schemas.openxmlformats.org/officeDocument/2006/relationships">
+<p:sld xmlns:a="http://schemas.openxmlformats.org/drawingml/2006/main" xmlns:r="http://schemas.openxmlformats.org/officeDocument/2006/relationships" xmlns:p="http://schemas.openxmlformats.org/presentationml/2006/main">
   <p:cSld>
     <p:bg>
       <p:bgPr>
@@ -11647,7 +11768,14 @@
         <p:cNvGrpSpPr/>
         <p:nvPr/>
       </p:nvGrpSpPr>
-      <p:grpSpPr/>
+      <p:grpSpPr>
+        <a:xfrm>
+          <a:off x="0" y="0"/>
+          <a:ext cx="0" cy="0"/>
+          <a:chOff x="0" y="0"/>
+          <a:chExt cx="0" cy="0"/>
+        </a:xfrm>
+      </p:grpSpPr>
       <p:sp>
         <p:nvSpPr>
           <p:cNvPr id="2" name="TextBox 1"/>
@@ -11665,7 +11793,7 @@
           <a:noFill/>
         </p:spPr>
         <p:txBody>
-          <a:bodyPr wrap="square" lIns="0" rIns="0" tIns="0" bIns="0" anchor="t">
+          <a:bodyPr wrap="square" lIns="0" tIns="0" rIns="0" bIns="0" anchor="t">
             <a:spAutoFit/>
           </a:bodyPr>
           <a:lstStyle/>
@@ -11700,7 +11828,7 @@
           <a:noFill/>
         </p:spPr>
         <p:txBody>
-          <a:bodyPr wrap="square" lIns="0" rIns="0" tIns="0" bIns="0" anchor="t">
+          <a:bodyPr wrap="square" lIns="0" tIns="0" rIns="0" bIns="0" anchor="t">
             <a:spAutoFit/>
           </a:bodyPr>
           <a:lstStyle/>
@@ -11767,6 +11895,7 @@
           <a:lstStyle/>
           <a:p>
             <a:pPr algn="ctr"/>
+            <a:endParaRPr/>
           </a:p>
         </p:txBody>
       </p:sp>
@@ -11779,7 +11908,7 @@
           <p:nvPr/>
         </p:nvPicPr>
         <p:blipFill>
-          <a:blip r:embed="rId2"/>
+          <a:blip r:embed="rId3"/>
           <a:stretch>
             <a:fillRect/>
           </a:stretch>
@@ -11811,7 +11940,7 @@
           <a:noFill/>
         </p:spPr>
         <p:txBody>
-          <a:bodyPr wrap="square" lIns="0" rIns="0" tIns="0" bIns="0" anchor="t">
+          <a:bodyPr wrap="square" lIns="0" tIns="0" rIns="0" bIns="0" anchor="t">
             <a:spAutoFit/>
           </a:bodyPr>
           <a:lstStyle/>
@@ -11859,7 +11988,7 @@
           <a:noFill/>
         </p:spPr>
         <p:txBody>
-          <a:bodyPr wrap="square" lIns="0" rIns="0" tIns="0" bIns="0" anchor="t">
+          <a:bodyPr wrap="square" lIns="0" tIns="0" rIns="0" bIns="0" anchor="t">
             <a:spAutoFit/>
           </a:bodyPr>
           <a:lstStyle/>
@@ -11907,7 +12036,7 @@
           <a:noFill/>
         </p:spPr>
         <p:txBody>
-          <a:bodyPr wrap="square" lIns="0" rIns="0" tIns="0" bIns="0" anchor="t">
+          <a:bodyPr wrap="square" lIns="0" tIns="0" rIns="0" bIns="0" anchor="t">
             <a:spAutoFit/>
           </a:bodyPr>
           <a:lstStyle/>
@@ -11955,7 +12084,7 @@
           <a:noFill/>
         </p:spPr>
         <p:txBody>
-          <a:bodyPr wrap="square" lIns="0" rIns="0" tIns="0" bIns="0" anchor="t">
+          <a:bodyPr wrap="square" lIns="0" tIns="0" rIns="0" bIns="0" anchor="t">
             <a:spAutoFit/>
           </a:bodyPr>
           <a:lstStyle/>
@@ -12003,7 +12132,7 @@
           <a:noFill/>
         </p:spPr>
         <p:txBody>
-          <a:bodyPr wrap="square" lIns="0" rIns="0" tIns="0" bIns="0" anchor="t">
+          <a:bodyPr wrap="square" lIns="0" tIns="0" rIns="0" bIns="0" anchor="t">
             <a:spAutoFit/>
           </a:bodyPr>
           <a:lstStyle/>
@@ -12030,7 +12159,7 @@
 </file>
 
 <file path=ppt/slides/slide22.xml><?xml version="1.0" encoding="utf-8"?>
-<p:sld xmlns:a="http://schemas.openxmlformats.org/drawingml/2006/main" xmlns:p="http://schemas.openxmlformats.org/presentationml/2006/main" xmlns:r="http://schemas.openxmlformats.org/officeDocument/2006/relationships">
+<p:sld xmlns:a="http://schemas.openxmlformats.org/drawingml/2006/main" xmlns:r="http://schemas.openxmlformats.org/officeDocument/2006/relationships" xmlns:p="http://schemas.openxmlformats.org/presentationml/2006/main">
   <p:cSld>
     <p:bg>
       <p:bgPr>
@@ -12046,7 +12175,14 @@
         <p:cNvGrpSpPr/>
         <p:nvPr/>
       </p:nvGrpSpPr>
-      <p:grpSpPr/>
+      <p:grpSpPr>
+        <a:xfrm>
+          <a:off x="0" y="0"/>
+          <a:ext cx="0" cy="0"/>
+          <a:chOff x="0" y="0"/>
+          <a:chExt cx="0" cy="0"/>
+        </a:xfrm>
+      </p:grpSpPr>
       <p:sp>
         <p:nvSpPr>
           <p:cNvPr id="2" name="TextBox 1"/>
@@ -12064,7 +12200,7 @@
           <a:noFill/>
         </p:spPr>
         <p:txBody>
-          <a:bodyPr wrap="square" lIns="0" rIns="0" tIns="0" bIns="0" anchor="t">
+          <a:bodyPr wrap="square" lIns="0" tIns="0" rIns="0" bIns="0" anchor="t">
             <a:spAutoFit/>
           </a:bodyPr>
           <a:lstStyle/>
@@ -12099,7 +12235,7 @@
           <a:noFill/>
         </p:spPr>
         <p:txBody>
-          <a:bodyPr wrap="square" lIns="0" rIns="0" tIns="0" bIns="0" anchor="t">
+          <a:bodyPr wrap="square" lIns="0" tIns="0" rIns="0" bIns="0" anchor="t">
             <a:spAutoFit/>
           </a:bodyPr>
           <a:lstStyle/>
@@ -12166,6 +12302,7 @@
           <a:lstStyle/>
           <a:p>
             <a:pPr algn="ctr"/>
+            <a:endParaRPr/>
           </a:p>
         </p:txBody>
       </p:sp>
@@ -12186,7 +12323,7 @@
           <a:noFill/>
         </p:spPr>
         <p:txBody>
-          <a:bodyPr wrap="square" lIns="0" rIns="0" tIns="0" bIns="0" anchor="t">
+          <a:bodyPr wrap="square" lIns="0" tIns="0" rIns="0" bIns="0" anchor="t">
             <a:spAutoFit/>
           </a:bodyPr>
           <a:lstStyle/>
@@ -12221,7 +12358,7 @@
           <a:noFill/>
         </p:spPr>
         <p:txBody>
-          <a:bodyPr wrap="square" lIns="0" rIns="0" tIns="0" bIns="0" anchor="t">
+          <a:bodyPr wrap="square" lIns="0" tIns="0" rIns="0" bIns="0" anchor="t">
             <a:spAutoFit/>
           </a:bodyPr>
           <a:lstStyle/>
@@ -12323,6 +12460,7 @@
           <a:lstStyle/>
           <a:p>
             <a:pPr algn="ctr"/>
+            <a:endParaRPr/>
           </a:p>
         </p:txBody>
       </p:sp>
@@ -12343,7 +12481,7 @@
           <a:noFill/>
         </p:spPr>
         <p:txBody>
-          <a:bodyPr wrap="square" lIns="0" rIns="0" tIns="0" bIns="0" anchor="t">
+          <a:bodyPr wrap="square" lIns="0" tIns="0" rIns="0" bIns="0" anchor="t">
             <a:spAutoFit/>
           </a:bodyPr>
           <a:lstStyle/>
@@ -12378,7 +12516,7 @@
           <a:noFill/>
         </p:spPr>
         <p:txBody>
-          <a:bodyPr wrap="square" lIns="0" rIns="0" tIns="0" bIns="0" anchor="t">
+          <a:bodyPr wrap="square" lIns="0" tIns="0" rIns="0" bIns="0" anchor="t">
             <a:spAutoFit/>
           </a:bodyPr>
           <a:lstStyle/>
@@ -12469,7 +12607,7 @@
           <a:noFill/>
         </p:spPr>
         <p:txBody>
-          <a:bodyPr wrap="square" lIns="0" rIns="0" tIns="0" bIns="0" anchor="t">
+          <a:bodyPr wrap="square" lIns="0" tIns="0" rIns="0" bIns="0" anchor="t">
             <a:spAutoFit/>
           </a:bodyPr>
           <a:lstStyle/>
@@ -12517,7 +12655,7 @@
           <a:noFill/>
         </p:spPr>
         <p:txBody>
-          <a:bodyPr wrap="square" lIns="0" rIns="0" tIns="0" bIns="0" anchor="t">
+          <a:bodyPr wrap="square" lIns="0" tIns="0" rIns="0" bIns="0" anchor="t">
             <a:spAutoFit/>
           </a:bodyPr>
           <a:lstStyle/>
@@ -12544,7 +12682,7 @@
 </file>
 
 <file path=ppt/slides/slide23.xml><?xml version="1.0" encoding="utf-8"?>
-<p:sld xmlns:a="http://schemas.openxmlformats.org/drawingml/2006/main" xmlns:p="http://schemas.openxmlformats.org/presentationml/2006/main" xmlns:r="http://schemas.openxmlformats.org/officeDocument/2006/relationships">
+<p:sld xmlns:a="http://schemas.openxmlformats.org/drawingml/2006/main" xmlns:r="http://schemas.openxmlformats.org/officeDocument/2006/relationships" xmlns:p="http://schemas.openxmlformats.org/presentationml/2006/main">
   <p:cSld>
     <p:bg>
       <p:bgPr>
@@ -12560,7 +12698,14 @@
         <p:cNvGrpSpPr/>
         <p:nvPr/>
       </p:nvGrpSpPr>
-      <p:grpSpPr/>
+      <p:grpSpPr>
+        <a:xfrm>
+          <a:off x="0" y="0"/>
+          <a:ext cx="0" cy="0"/>
+          <a:chOff x="0" y="0"/>
+          <a:chExt cx="0" cy="0"/>
+        </a:xfrm>
+      </p:grpSpPr>
       <p:sp>
         <p:nvSpPr>
           <p:cNvPr id="2" name="TextBox 1"/>
@@ -12578,7 +12723,7 @@
           <a:noFill/>
         </p:spPr>
         <p:txBody>
-          <a:bodyPr wrap="square" lIns="0" rIns="0" tIns="0" bIns="0" anchor="t">
+          <a:bodyPr wrap="square" lIns="0" tIns="0" rIns="0" bIns="0" anchor="t">
             <a:spAutoFit/>
           </a:bodyPr>
           <a:lstStyle/>
@@ -12613,7 +12758,7 @@
           <a:noFill/>
         </p:spPr>
         <p:txBody>
-          <a:bodyPr wrap="square" lIns="0" rIns="0" tIns="0" bIns="0" anchor="t">
+          <a:bodyPr wrap="square" lIns="0" tIns="0" rIns="0" bIns="0" anchor="t">
             <a:spAutoFit/>
           </a:bodyPr>
           <a:lstStyle/>
@@ -12681,6 +12826,7 @@
           <a:lstStyle/>
           <a:p>
             <a:pPr algn="ctr"/>
+            <a:endParaRPr/>
           </a:p>
         </p:txBody>
       </p:sp>
@@ -12701,7 +12847,7 @@
           <a:noFill/>
         </p:spPr>
         <p:txBody>
-          <a:bodyPr wrap="square" lIns="0" rIns="0" tIns="0" bIns="0" anchor="t">
+          <a:bodyPr wrap="square" lIns="0" tIns="0" rIns="0" bIns="0" anchor="t">
             <a:spAutoFit/>
           </a:bodyPr>
           <a:lstStyle/>
@@ -12765,6 +12911,7 @@
           <a:lstStyle/>
           <a:p>
             <a:pPr algn="ctr"/>
+            <a:endParaRPr/>
           </a:p>
         </p:txBody>
       </p:sp>
@@ -12785,7 +12932,7 @@
           <a:noFill/>
         </p:spPr>
         <p:txBody>
-          <a:bodyPr wrap="square" lIns="0" rIns="0" tIns="0" bIns="0" anchor="t">
+          <a:bodyPr wrap="square" lIns="0" tIns="0" rIns="0" bIns="0" anchor="t">
             <a:spAutoFit/>
           </a:bodyPr>
           <a:lstStyle/>
@@ -12849,6 +12996,7 @@
           <a:lstStyle/>
           <a:p>
             <a:pPr algn="ctr"/>
+            <a:endParaRPr/>
           </a:p>
         </p:txBody>
       </p:sp>
@@ -12869,7 +13017,7 @@
           <a:noFill/>
         </p:spPr>
         <p:txBody>
-          <a:bodyPr wrap="square" lIns="0" rIns="0" tIns="0" bIns="0" anchor="t">
+          <a:bodyPr wrap="square" lIns="0" tIns="0" rIns="0" bIns="0" anchor="t">
             <a:spAutoFit/>
           </a:bodyPr>
           <a:lstStyle/>
@@ -12904,7 +13052,7 @@
           <a:noFill/>
         </p:spPr>
         <p:txBody>
-          <a:bodyPr wrap="square" lIns="0" rIns="0" tIns="0" bIns="0" anchor="t">
+          <a:bodyPr wrap="square" lIns="0" tIns="0" rIns="0" bIns="0" anchor="t">
             <a:spAutoFit/>
           </a:bodyPr>
           <a:lstStyle/>
@@ -12931,7 +13079,7 @@
 </file>
 
 <file path=ppt/slides/slide24.xml><?xml version="1.0" encoding="utf-8"?>
-<p:sld xmlns:a="http://schemas.openxmlformats.org/drawingml/2006/main" xmlns:p="http://schemas.openxmlformats.org/presentationml/2006/main" xmlns:r="http://schemas.openxmlformats.org/officeDocument/2006/relationships">
+<p:sld xmlns:a="http://schemas.openxmlformats.org/drawingml/2006/main" xmlns:r="http://schemas.openxmlformats.org/officeDocument/2006/relationships" xmlns:p="http://schemas.openxmlformats.org/presentationml/2006/main">
   <p:cSld>
     <p:bg>
       <p:bgPr>
@@ -12947,7 +13095,14 @@
         <p:cNvGrpSpPr/>
         <p:nvPr/>
       </p:nvGrpSpPr>
-      <p:grpSpPr/>
+      <p:grpSpPr>
+        <a:xfrm>
+          <a:off x="0" y="0"/>
+          <a:ext cx="0" cy="0"/>
+          <a:chOff x="0" y="0"/>
+          <a:chExt cx="0" cy="0"/>
+        </a:xfrm>
+      </p:grpSpPr>
       <p:sp>
         <p:nvSpPr>
           <p:cNvPr id="2" name="TextBox 1"/>
@@ -12965,7 +13120,7 @@
           <a:noFill/>
         </p:spPr>
         <p:txBody>
-          <a:bodyPr wrap="square" lIns="0" rIns="0" tIns="0" bIns="0" anchor="t">
+          <a:bodyPr wrap="square" lIns="0" tIns="0" rIns="0" bIns="0" anchor="t">
             <a:spAutoFit/>
           </a:bodyPr>
           <a:lstStyle/>
@@ -13000,7 +13155,7 @@
           <a:noFill/>
         </p:spPr>
         <p:txBody>
-          <a:bodyPr wrap="square" lIns="0" rIns="0" tIns="0" bIns="0" anchor="t">
+          <a:bodyPr wrap="square" lIns="0" tIns="0" rIns="0" bIns="0" anchor="t">
             <a:spAutoFit/>
           </a:bodyPr>
           <a:lstStyle/>
@@ -13039,7 +13194,7 @@
           <a:noFill/>
         </p:spPr>
         <p:txBody>
-          <a:bodyPr wrap="square" lIns="0" rIns="0" tIns="0" bIns="0" anchor="t">
+          <a:bodyPr wrap="square" lIns="0" tIns="0" rIns="0" bIns="0" anchor="t">
             <a:spAutoFit/>
           </a:bodyPr>
           <a:lstStyle/>
@@ -13078,7 +13233,7 @@
           <a:noFill/>
         </p:spPr>
         <p:txBody>
-          <a:bodyPr wrap="square" lIns="0" rIns="0" tIns="0" bIns="0" anchor="t">
+          <a:bodyPr wrap="square" lIns="0" tIns="0" rIns="0" bIns="0" anchor="t">
             <a:spAutoFit/>
           </a:bodyPr>
           <a:lstStyle/>
@@ -13105,7 +13260,7 @@
 </file>
 
 <file path=ppt/slides/slide3.xml><?xml version="1.0" encoding="utf-8"?>
-<p:sld xmlns:a="http://schemas.openxmlformats.org/drawingml/2006/main" xmlns:p="http://schemas.openxmlformats.org/presentationml/2006/main" xmlns:r="http://schemas.openxmlformats.org/officeDocument/2006/relationships">
+<p:sld xmlns:a="http://schemas.openxmlformats.org/drawingml/2006/main" xmlns:r="http://schemas.openxmlformats.org/officeDocument/2006/relationships" xmlns:p="http://schemas.openxmlformats.org/presentationml/2006/main">
   <p:cSld>
     <p:bg>
       <p:bgPr>
@@ -13121,7 +13276,14 @@
         <p:cNvGrpSpPr/>
         <p:nvPr/>
       </p:nvGrpSpPr>
-      <p:grpSpPr/>
+      <p:grpSpPr>
+        <a:xfrm>
+          <a:off x="0" y="0"/>
+          <a:ext cx="0" cy="0"/>
+          <a:chOff x="0" y="0"/>
+          <a:chExt cx="0" cy="0"/>
+        </a:xfrm>
+      </p:grpSpPr>
       <p:sp>
         <p:nvSpPr>
           <p:cNvPr id="2" name="TextBox 1"/>
@@ -13139,7 +13301,7 @@
           <a:noFill/>
         </p:spPr>
         <p:txBody>
-          <a:bodyPr wrap="square" lIns="0" rIns="0" tIns="0" bIns="0" anchor="t">
+          <a:bodyPr wrap="square" lIns="0" tIns="0" rIns="0" bIns="0" anchor="t">
             <a:spAutoFit/>
           </a:bodyPr>
           <a:lstStyle/>
@@ -13174,7 +13336,7 @@
           <a:noFill/>
         </p:spPr>
         <p:txBody>
-          <a:bodyPr wrap="square" lIns="0" rIns="0" tIns="0" bIns="0" anchor="t">
+          <a:bodyPr wrap="square" lIns="0" tIns="0" rIns="0" bIns="0" anchor="t">
             <a:spAutoFit/>
           </a:bodyPr>
           <a:lstStyle/>
@@ -13211,11 +13373,29 @@
         <a:graphic>
           <a:graphicData uri="http://schemas.openxmlformats.org/drawingml/2006/table">
             <a:tbl>
-              <a:tblPr firstRow="0" bandRow="0"/>
+              <a:tblPr/>
               <a:tblGrid>
-                <a:gridCol w="3167955"/>
-                <a:gridCol w="1689596"/>
-                <a:gridCol w="5702498"/>
+                <a:gridCol w="3167955">
+                  <a:extLst>
+                    <a:ext uri="{9D8B030D-6E8A-4147-A177-3AD203B41FA5}">
+                      <a16:colId xmlns:a16="http://schemas.microsoft.com/office/drawing/2014/main" val="20000"/>
+                    </a:ext>
+                  </a:extLst>
+                </a:gridCol>
+                <a:gridCol w="1689596">
+                  <a:extLst>
+                    <a:ext uri="{9D8B030D-6E8A-4147-A177-3AD203B41FA5}">
+                      <a16:colId xmlns:a16="http://schemas.microsoft.com/office/drawing/2014/main" val="20001"/>
+                    </a:ext>
+                  </a:extLst>
+                </a:gridCol>
+                <a:gridCol w="5702498">
+                  <a:extLst>
+                    <a:ext uri="{9D8B030D-6E8A-4147-A177-3AD203B41FA5}">
+                      <a16:colId xmlns:a16="http://schemas.microsoft.com/office/drawing/2014/main" val="20002"/>
+                    </a:ext>
+                  </a:extLst>
+                </a:gridCol>
               </a:tblGrid>
               <a:tr h="318691">
                 <a:tc>
@@ -13344,6 +13524,11 @@
                     </a:solidFill>
                   </a:tcPr>
                 </a:tc>
+                <a:extLst>
+                  <a:ext uri="{0D108BD9-81ED-4DB2-BD59-A6C34878D82A}">
+                    <a16:rowId xmlns:a16="http://schemas.microsoft.com/office/drawing/2014/main" val="10000"/>
+                  </a:ext>
+                </a:extLst>
               </a:tr>
               <a:tr h="318691">
                 <a:tc>
@@ -13472,6 +13657,11 @@
                     </a:solidFill>
                   </a:tcPr>
                 </a:tc>
+                <a:extLst>
+                  <a:ext uri="{0D108BD9-81ED-4DB2-BD59-A6C34878D82A}">
+                    <a16:rowId xmlns:a16="http://schemas.microsoft.com/office/drawing/2014/main" val="10001"/>
+                  </a:ext>
+                </a:extLst>
               </a:tr>
               <a:tr h="318691">
                 <a:tc>
@@ -13600,6 +13790,11 @@
                     </a:solidFill>
                   </a:tcPr>
                 </a:tc>
+                <a:extLst>
+                  <a:ext uri="{0D108BD9-81ED-4DB2-BD59-A6C34878D82A}">
+                    <a16:rowId xmlns:a16="http://schemas.microsoft.com/office/drawing/2014/main" val="10002"/>
+                  </a:ext>
+                </a:extLst>
               </a:tr>
               <a:tr h="318691">
                 <a:tc>
@@ -13728,6 +13923,11 @@
                     </a:solidFill>
                   </a:tcPr>
                 </a:tc>
+                <a:extLst>
+                  <a:ext uri="{0D108BD9-81ED-4DB2-BD59-A6C34878D82A}">
+                    <a16:rowId xmlns:a16="http://schemas.microsoft.com/office/drawing/2014/main" val="10003"/>
+                  </a:ext>
+                </a:extLst>
               </a:tr>
               <a:tr h="318691">
                 <a:tc>
@@ -13856,6 +14056,11 @@
                     </a:solidFill>
                   </a:tcPr>
                 </a:tc>
+                <a:extLst>
+                  <a:ext uri="{0D108BD9-81ED-4DB2-BD59-A6C34878D82A}">
+                    <a16:rowId xmlns:a16="http://schemas.microsoft.com/office/drawing/2014/main" val="10004"/>
+                  </a:ext>
+                </a:extLst>
               </a:tr>
               <a:tr h="318691">
                 <a:tc>
@@ -13984,6 +14189,11 @@
                     </a:solidFill>
                   </a:tcPr>
                 </a:tc>
+                <a:extLst>
+                  <a:ext uri="{0D108BD9-81ED-4DB2-BD59-A6C34878D82A}">
+                    <a16:rowId xmlns:a16="http://schemas.microsoft.com/office/drawing/2014/main" val="10005"/>
+                  </a:ext>
+                </a:extLst>
               </a:tr>
               <a:tr h="318691">
                 <a:tc>
@@ -14112,6 +14322,11 @@
                     </a:solidFill>
                   </a:tcPr>
                 </a:tc>
+                <a:extLst>
+                  <a:ext uri="{0D108BD9-81ED-4DB2-BD59-A6C34878D82A}">
+                    <a16:rowId xmlns:a16="http://schemas.microsoft.com/office/drawing/2014/main" val="10006"/>
+                  </a:ext>
+                </a:extLst>
               </a:tr>
               <a:tr h="318691">
                 <a:tc>
@@ -14240,6 +14455,11 @@
                     </a:solidFill>
                   </a:tcPr>
                 </a:tc>
+                <a:extLst>
+                  <a:ext uri="{0D108BD9-81ED-4DB2-BD59-A6C34878D82A}">
+                    <a16:rowId xmlns:a16="http://schemas.microsoft.com/office/drawing/2014/main" val="10007"/>
+                  </a:ext>
+                </a:extLst>
               </a:tr>
             </a:tbl>
           </a:graphicData>
@@ -14262,7 +14482,7 @@
           <a:noFill/>
         </p:spPr>
         <p:txBody>
-          <a:bodyPr wrap="square" lIns="0" rIns="0" tIns="0" bIns="0" anchor="t">
+          <a:bodyPr wrap="square" lIns="0" tIns="0" rIns="0" bIns="0" anchor="t">
             <a:spAutoFit/>
           </a:bodyPr>
           <a:lstStyle/>
@@ -14289,7 +14509,7 @@
 </file>
 
 <file path=ppt/slides/slide4.xml><?xml version="1.0" encoding="utf-8"?>
-<p:sld xmlns:a="http://schemas.openxmlformats.org/drawingml/2006/main" xmlns:p="http://schemas.openxmlformats.org/presentationml/2006/main" xmlns:r="http://schemas.openxmlformats.org/officeDocument/2006/relationships">
+<p:sld xmlns:a="http://schemas.openxmlformats.org/drawingml/2006/main" xmlns:r="http://schemas.openxmlformats.org/officeDocument/2006/relationships" xmlns:p="http://schemas.openxmlformats.org/presentationml/2006/main">
   <p:cSld>
     <p:bg>
       <p:bgPr>
@@ -14305,7 +14525,14 @@
         <p:cNvGrpSpPr/>
         <p:nvPr/>
       </p:nvGrpSpPr>
-      <p:grpSpPr/>
+      <p:grpSpPr>
+        <a:xfrm>
+          <a:off x="0" y="0"/>
+          <a:ext cx="0" cy="0"/>
+          <a:chOff x="0" y="0"/>
+          <a:chExt cx="0" cy="0"/>
+        </a:xfrm>
+      </p:grpSpPr>
       <p:sp>
         <p:nvSpPr>
           <p:cNvPr id="2" name="TextBox 1"/>
@@ -14323,7 +14550,7 @@
           <a:noFill/>
         </p:spPr>
         <p:txBody>
-          <a:bodyPr wrap="square" lIns="0" rIns="0" tIns="0" bIns="0" anchor="t">
+          <a:bodyPr wrap="square" lIns="0" tIns="0" rIns="0" bIns="0" anchor="t">
             <a:spAutoFit/>
           </a:bodyPr>
           <a:lstStyle/>
@@ -14358,7 +14585,7 @@
           <a:noFill/>
         </p:spPr>
         <p:txBody>
-          <a:bodyPr wrap="square" lIns="0" rIns="0" tIns="0" bIns="0" anchor="t">
+          <a:bodyPr wrap="square" lIns="0" tIns="0" rIns="0" bIns="0" anchor="t">
             <a:spAutoFit/>
           </a:bodyPr>
           <a:lstStyle/>
@@ -14425,6 +14652,7 @@
           <a:lstStyle/>
           <a:p>
             <a:pPr algn="ctr"/>
+            <a:endParaRPr/>
           </a:p>
         </p:txBody>
       </p:sp>
@@ -14437,7 +14665,7 @@
           <p:nvPr/>
         </p:nvPicPr>
         <p:blipFill>
-          <a:blip r:embed="rId2"/>
+          <a:blip r:embed="rId3"/>
           <a:stretch>
             <a:fillRect/>
           </a:stretch>
@@ -14497,6 +14725,7 @@
           <a:lstStyle/>
           <a:p>
             <a:pPr algn="ctr"/>
+            <a:endParaRPr/>
           </a:p>
         </p:txBody>
       </p:sp>
@@ -14517,7 +14746,7 @@
           <a:noFill/>
         </p:spPr>
         <p:txBody>
-          <a:bodyPr wrap="square" lIns="0" rIns="0" tIns="0" bIns="0" anchor="t">
+          <a:bodyPr wrap="square" lIns="0" tIns="0" rIns="0" bIns="0" anchor="t">
             <a:spAutoFit/>
           </a:bodyPr>
           <a:lstStyle/>
@@ -14565,7 +14794,7 @@
           <a:noFill/>
         </p:spPr>
         <p:txBody>
-          <a:bodyPr wrap="square" lIns="0" rIns="0" tIns="0" bIns="0" anchor="t">
+          <a:bodyPr wrap="square" lIns="0" tIns="0" rIns="0" bIns="0" anchor="t">
             <a:spAutoFit/>
           </a:bodyPr>
           <a:lstStyle/>
@@ -14613,7 +14842,7 @@
           <a:noFill/>
         </p:spPr>
         <p:txBody>
-          <a:bodyPr wrap="square" lIns="0" rIns="0" tIns="0" bIns="0" anchor="t">
+          <a:bodyPr wrap="square" lIns="0" tIns="0" rIns="0" bIns="0" anchor="t">
             <a:spAutoFit/>
           </a:bodyPr>
           <a:lstStyle/>
@@ -14689,6 +14918,7 @@
           <a:lstStyle/>
           <a:p>
             <a:pPr algn="ctr"/>
+            <a:endParaRPr/>
           </a:p>
         </p:txBody>
       </p:sp>
@@ -14701,7 +14931,7 @@
           <p:nvPr/>
         </p:nvPicPr>
         <p:blipFill>
-          <a:blip r:embed="rId3"/>
+          <a:blip r:embed="rId4"/>
           <a:stretch>
             <a:fillRect/>
           </a:stretch>
@@ -14733,7 +14963,7 @@
           <a:noFill/>
         </p:spPr>
         <p:txBody>
-          <a:bodyPr wrap="square" lIns="0" rIns="0" tIns="0" bIns="0" anchor="t">
+          <a:bodyPr wrap="square" lIns="0" tIns="0" rIns="0" bIns="0" anchor="t">
             <a:spAutoFit/>
           </a:bodyPr>
           <a:lstStyle/>
@@ -14760,7 +14990,7 @@
 </file>
 
 <file path=ppt/slides/slide5.xml><?xml version="1.0" encoding="utf-8"?>
-<p:sld xmlns:a="http://schemas.openxmlformats.org/drawingml/2006/main" xmlns:p="http://schemas.openxmlformats.org/presentationml/2006/main" xmlns:r="http://schemas.openxmlformats.org/officeDocument/2006/relationships">
+<p:sld xmlns:a="http://schemas.openxmlformats.org/drawingml/2006/main" xmlns:r="http://schemas.openxmlformats.org/officeDocument/2006/relationships" xmlns:p="http://schemas.openxmlformats.org/presentationml/2006/main">
   <p:cSld>
     <p:bg>
       <p:bgPr>
@@ -14776,7 +15006,14 @@
         <p:cNvGrpSpPr/>
         <p:nvPr/>
       </p:nvGrpSpPr>
-      <p:grpSpPr/>
+      <p:grpSpPr>
+        <a:xfrm>
+          <a:off x="0" y="0"/>
+          <a:ext cx="0" cy="0"/>
+          <a:chOff x="0" y="0"/>
+          <a:chExt cx="0" cy="0"/>
+        </a:xfrm>
+      </p:grpSpPr>
       <p:sp>
         <p:nvSpPr>
           <p:cNvPr id="2" name="TextBox 1"/>
@@ -14794,7 +15031,7 @@
           <a:noFill/>
         </p:spPr>
         <p:txBody>
-          <a:bodyPr wrap="square" lIns="0" rIns="0" tIns="0" bIns="0" anchor="t">
+          <a:bodyPr wrap="square" lIns="0" tIns="0" rIns="0" bIns="0" anchor="t">
             <a:spAutoFit/>
           </a:bodyPr>
           <a:lstStyle/>
@@ -14829,7 +15066,7 @@
           <a:noFill/>
         </p:spPr>
         <p:txBody>
-          <a:bodyPr wrap="square" lIns="0" rIns="0" tIns="0" bIns="0" anchor="t">
+          <a:bodyPr wrap="square" lIns="0" tIns="0" rIns="0" bIns="0" anchor="t">
             <a:spAutoFit/>
           </a:bodyPr>
           <a:lstStyle/>
@@ -14897,6 +15134,7 @@
           <a:lstStyle/>
           <a:p>
             <a:pPr algn="ctr"/>
+            <a:endParaRPr/>
           </a:p>
         </p:txBody>
       </p:sp>
@@ -14917,7 +15155,7 @@
           <a:noFill/>
         </p:spPr>
         <p:txBody>
-          <a:bodyPr wrap="square" lIns="0" rIns="0" tIns="0" bIns="0" anchor="t">
+          <a:bodyPr wrap="square" lIns="0" tIns="0" rIns="0" bIns="0" anchor="t">
             <a:spAutoFit/>
           </a:bodyPr>
           <a:lstStyle/>
@@ -14981,6 +15219,7 @@
           <a:lstStyle/>
           <a:p>
             <a:pPr algn="ctr"/>
+            <a:endParaRPr/>
           </a:p>
         </p:txBody>
       </p:sp>
@@ -15001,7 +15240,7 @@
           <a:noFill/>
         </p:spPr>
         <p:txBody>
-          <a:bodyPr wrap="square" lIns="0" rIns="0" tIns="0" bIns="0" anchor="t">
+          <a:bodyPr wrap="square" lIns="0" tIns="0" rIns="0" bIns="0" anchor="t">
             <a:spAutoFit/>
           </a:bodyPr>
           <a:lstStyle/>
@@ -15065,6 +15304,7 @@
           <a:lstStyle/>
           <a:p>
             <a:pPr algn="ctr"/>
+            <a:endParaRPr/>
           </a:p>
         </p:txBody>
       </p:sp>
@@ -15085,7 +15325,7 @@
           <a:noFill/>
         </p:spPr>
         <p:txBody>
-          <a:bodyPr wrap="square" lIns="0" rIns="0" tIns="0" bIns="0" anchor="t">
+          <a:bodyPr wrap="square" lIns="0" tIns="0" rIns="0" bIns="0" anchor="t">
             <a:spAutoFit/>
           </a:bodyPr>
           <a:lstStyle/>
@@ -15120,7 +15360,7 @@
           <a:noFill/>
         </p:spPr>
         <p:txBody>
-          <a:bodyPr wrap="square" lIns="0" rIns="0" tIns="0" bIns="0" anchor="t">
+          <a:bodyPr wrap="square" lIns="0" tIns="0" rIns="0" bIns="0" anchor="t">
             <a:spAutoFit/>
           </a:bodyPr>
           <a:lstStyle/>
@@ -15147,7 +15387,7 @@
 </file>
 
 <file path=ppt/slides/slide6.xml><?xml version="1.0" encoding="utf-8"?>
-<p:sld xmlns:a="http://schemas.openxmlformats.org/drawingml/2006/main" xmlns:p="http://schemas.openxmlformats.org/presentationml/2006/main" xmlns:r="http://schemas.openxmlformats.org/officeDocument/2006/relationships">
+<p:sld xmlns:a="http://schemas.openxmlformats.org/drawingml/2006/main" xmlns:r="http://schemas.openxmlformats.org/officeDocument/2006/relationships" xmlns:p="http://schemas.openxmlformats.org/presentationml/2006/main">
   <p:cSld>
     <p:bg>
       <p:bgPr>
@@ -15163,7 +15403,14 @@
         <p:cNvGrpSpPr/>
         <p:nvPr/>
       </p:nvGrpSpPr>
-      <p:grpSpPr/>
+      <p:grpSpPr>
+        <a:xfrm>
+          <a:off x="0" y="0"/>
+          <a:ext cx="0" cy="0"/>
+          <a:chOff x="0" y="0"/>
+          <a:chExt cx="0" cy="0"/>
+        </a:xfrm>
+      </p:grpSpPr>
       <p:sp>
         <p:nvSpPr>
           <p:cNvPr id="2" name="TextBox 1"/>
@@ -15181,7 +15428,7 @@
           <a:noFill/>
         </p:spPr>
         <p:txBody>
-          <a:bodyPr wrap="square" lIns="0" rIns="0" tIns="0" bIns="0" anchor="t">
+          <a:bodyPr wrap="square" lIns="0" tIns="0" rIns="0" bIns="0" anchor="t">
             <a:spAutoFit/>
           </a:bodyPr>
           <a:lstStyle/>
@@ -15216,7 +15463,7 @@
           <a:noFill/>
         </p:spPr>
         <p:txBody>
-          <a:bodyPr wrap="square" lIns="0" rIns="0" tIns="0" bIns="0" anchor="t">
+          <a:bodyPr wrap="square" lIns="0" tIns="0" rIns="0" bIns="0" anchor="t">
             <a:spAutoFit/>
           </a:bodyPr>
           <a:lstStyle/>
@@ -15253,12 +15500,36 @@
         <a:graphic>
           <a:graphicData uri="http://schemas.openxmlformats.org/drawingml/2006/table">
             <a:tbl>
-              <a:tblPr firstRow="0" bandRow="0"/>
+              <a:tblPr/>
               <a:tblGrid>
-                <a:gridCol w="633512"/>
-                <a:gridCol w="3484761"/>
-                <a:gridCol w="3484761"/>
-                <a:gridCol w="2957016"/>
+                <a:gridCol w="633512">
+                  <a:extLst>
+                    <a:ext uri="{9D8B030D-6E8A-4147-A177-3AD203B41FA5}">
+                      <a16:colId xmlns:a16="http://schemas.microsoft.com/office/drawing/2014/main" val="20000"/>
+                    </a:ext>
+                  </a:extLst>
+                </a:gridCol>
+                <a:gridCol w="3484761">
+                  <a:extLst>
+                    <a:ext uri="{9D8B030D-6E8A-4147-A177-3AD203B41FA5}">
+                      <a16:colId xmlns:a16="http://schemas.microsoft.com/office/drawing/2014/main" val="20001"/>
+                    </a:ext>
+                  </a:extLst>
+                </a:gridCol>
+                <a:gridCol w="3484761">
+                  <a:extLst>
+                    <a:ext uri="{9D8B030D-6E8A-4147-A177-3AD203B41FA5}">
+                      <a16:colId xmlns:a16="http://schemas.microsoft.com/office/drawing/2014/main" val="20002"/>
+                    </a:ext>
+                  </a:extLst>
+                </a:gridCol>
+                <a:gridCol w="2957016">
+                  <a:extLst>
+                    <a:ext uri="{9D8B030D-6E8A-4147-A177-3AD203B41FA5}">
+                      <a16:colId xmlns:a16="http://schemas.microsoft.com/office/drawing/2014/main" val="20003"/>
+                    </a:ext>
+                  </a:extLst>
+                </a:gridCol>
               </a:tblGrid>
               <a:tr h="301625">
                 <a:tc>
@@ -15429,6 +15700,11 @@
                     </a:solidFill>
                   </a:tcPr>
                 </a:tc>
+                <a:extLst>
+                  <a:ext uri="{0D108BD9-81ED-4DB2-BD59-A6C34878D82A}">
+                    <a16:rowId xmlns:a16="http://schemas.microsoft.com/office/drawing/2014/main" val="10000"/>
+                  </a:ext>
+                </a:extLst>
               </a:tr>
               <a:tr h="301625">
                 <a:tc>
@@ -15599,6 +15875,11 @@
                     </a:solidFill>
                   </a:tcPr>
                 </a:tc>
+                <a:extLst>
+                  <a:ext uri="{0D108BD9-81ED-4DB2-BD59-A6C34878D82A}">
+                    <a16:rowId xmlns:a16="http://schemas.microsoft.com/office/drawing/2014/main" val="10001"/>
+                  </a:ext>
+                </a:extLst>
               </a:tr>
               <a:tr h="301625">
                 <a:tc>
@@ -15769,6 +16050,11 @@
                     </a:solidFill>
                   </a:tcPr>
                 </a:tc>
+                <a:extLst>
+                  <a:ext uri="{0D108BD9-81ED-4DB2-BD59-A6C34878D82A}">
+                    <a16:rowId xmlns:a16="http://schemas.microsoft.com/office/drawing/2014/main" val="10002"/>
+                  </a:ext>
+                </a:extLst>
               </a:tr>
               <a:tr h="301625">
                 <a:tc>
@@ -15939,6 +16225,11 @@
                     </a:solidFill>
                   </a:tcPr>
                 </a:tc>
+                <a:extLst>
+                  <a:ext uri="{0D108BD9-81ED-4DB2-BD59-A6C34878D82A}">
+                    <a16:rowId xmlns:a16="http://schemas.microsoft.com/office/drawing/2014/main" val="10003"/>
+                  </a:ext>
+                </a:extLst>
               </a:tr>
               <a:tr h="301625">
                 <a:tc>
@@ -16109,6 +16400,11 @@
                     </a:solidFill>
                   </a:tcPr>
                 </a:tc>
+                <a:extLst>
+                  <a:ext uri="{0D108BD9-81ED-4DB2-BD59-A6C34878D82A}">
+                    <a16:rowId xmlns:a16="http://schemas.microsoft.com/office/drawing/2014/main" val="10004"/>
+                  </a:ext>
+                </a:extLst>
               </a:tr>
               <a:tr h="301625">
                 <a:tc>
@@ -16279,6 +16575,11 @@
                     </a:solidFill>
                   </a:tcPr>
                 </a:tc>
+                <a:extLst>
+                  <a:ext uri="{0D108BD9-81ED-4DB2-BD59-A6C34878D82A}">
+                    <a16:rowId xmlns:a16="http://schemas.microsoft.com/office/drawing/2014/main" val="10005"/>
+                  </a:ext>
+                </a:extLst>
               </a:tr>
             </a:tbl>
           </a:graphicData>
@@ -16301,7 +16602,7 @@
           <a:noFill/>
         </p:spPr>
         <p:txBody>
-          <a:bodyPr wrap="square" lIns="0" rIns="0" tIns="0" bIns="0" anchor="t">
+          <a:bodyPr wrap="square" lIns="0" tIns="0" rIns="0" bIns="0" anchor="t">
             <a:spAutoFit/>
           </a:bodyPr>
           <a:lstStyle/>
@@ -16349,7 +16650,7 @@
           <a:noFill/>
         </p:spPr>
         <p:txBody>
-          <a:bodyPr wrap="square" lIns="0" rIns="0" tIns="0" bIns="0" anchor="t">
+          <a:bodyPr wrap="square" lIns="0" tIns="0" rIns="0" bIns="0" anchor="t">
             <a:spAutoFit/>
           </a:bodyPr>
           <a:lstStyle/>
@@ -16376,7 +16677,7 @@
 </file>
 
 <file path=ppt/slides/slide7.xml><?xml version="1.0" encoding="utf-8"?>
-<p:sld xmlns:a="http://schemas.openxmlformats.org/drawingml/2006/main" xmlns:p="http://schemas.openxmlformats.org/presentationml/2006/main" xmlns:r="http://schemas.openxmlformats.org/officeDocument/2006/relationships">
+<p:sld xmlns:a="http://schemas.openxmlformats.org/drawingml/2006/main" xmlns:r="http://schemas.openxmlformats.org/officeDocument/2006/relationships" xmlns:p="http://schemas.openxmlformats.org/presentationml/2006/main">
   <p:cSld>
     <p:bg>
       <p:bgPr>
@@ -16392,7 +16693,14 @@
         <p:cNvGrpSpPr/>
         <p:nvPr/>
       </p:nvGrpSpPr>
-      <p:grpSpPr/>
+      <p:grpSpPr>
+        <a:xfrm>
+          <a:off x="0" y="0"/>
+          <a:ext cx="0" cy="0"/>
+          <a:chOff x="0" y="0"/>
+          <a:chExt cx="0" cy="0"/>
+        </a:xfrm>
+      </p:grpSpPr>
       <p:sp>
         <p:nvSpPr>
           <p:cNvPr id="2" name="TextBox 1"/>
@@ -16410,7 +16718,7 @@
           <a:noFill/>
         </p:spPr>
         <p:txBody>
-          <a:bodyPr wrap="square" lIns="0" rIns="0" tIns="0" bIns="0" anchor="t">
+          <a:bodyPr wrap="square" lIns="0" tIns="0" rIns="0" bIns="0" anchor="t">
             <a:spAutoFit/>
           </a:bodyPr>
           <a:lstStyle/>
@@ -16445,7 +16753,7 @@
           <a:noFill/>
         </p:spPr>
         <p:txBody>
-          <a:bodyPr wrap="square" lIns="0" rIns="0" tIns="0" bIns="0" anchor="t">
+          <a:bodyPr wrap="square" lIns="0" tIns="0" rIns="0" bIns="0" anchor="t">
             <a:spAutoFit/>
           </a:bodyPr>
           <a:lstStyle/>
@@ -16512,6 +16820,7 @@
           <a:lstStyle/>
           <a:p>
             <a:pPr algn="ctr"/>
+            <a:endParaRPr/>
           </a:p>
         </p:txBody>
       </p:sp>
@@ -16524,7 +16833,7 @@
           <p:nvPr/>
         </p:nvPicPr>
         <p:blipFill>
-          <a:blip r:embed="rId2"/>
+          <a:blip r:embed="rId3"/>
           <a:stretch>
             <a:fillRect/>
           </a:stretch>
@@ -16584,6 +16893,7 @@
           <a:lstStyle/>
           <a:p>
             <a:pPr algn="ctr"/>
+            <a:endParaRPr/>
           </a:p>
         </p:txBody>
       </p:sp>
@@ -16604,7 +16914,7 @@
           <a:noFill/>
         </p:spPr>
         <p:txBody>
-          <a:bodyPr wrap="square" lIns="0" rIns="0" tIns="0" bIns="0" anchor="t">
+          <a:bodyPr wrap="square" lIns="0" tIns="0" rIns="0" bIns="0" anchor="t">
             <a:spAutoFit/>
           </a:bodyPr>
           <a:lstStyle/>
@@ -16639,7 +16949,7 @@
           <a:noFill/>
         </p:spPr>
         <p:txBody>
-          <a:bodyPr wrap="square" lIns="0" rIns="0" tIns="0" bIns="0" anchor="t">
+          <a:bodyPr wrap="square" lIns="0" tIns="0" rIns="0" bIns="0" anchor="t">
             <a:spAutoFit/>
           </a:bodyPr>
           <a:lstStyle/>
@@ -16702,6 +17012,7 @@
           <a:lstStyle/>
           <a:p>
             <a:pPr algn="ctr"/>
+            <a:endParaRPr/>
           </a:p>
         </p:txBody>
       </p:sp>
@@ -16722,7 +17033,7 @@
           <a:noFill/>
         </p:spPr>
         <p:txBody>
-          <a:bodyPr wrap="square" lIns="0" rIns="0" tIns="0" bIns="0" anchor="t">
+          <a:bodyPr wrap="square" lIns="0" tIns="0" rIns="0" bIns="0" anchor="t">
             <a:spAutoFit/>
           </a:bodyPr>
           <a:lstStyle/>
@@ -16757,7 +17068,7 @@
           <a:noFill/>
         </p:spPr>
         <p:txBody>
-          <a:bodyPr wrap="square" lIns="0" rIns="0" tIns="0" bIns="0" anchor="t">
+          <a:bodyPr wrap="square" lIns="0" tIns="0" rIns="0" bIns="0" anchor="t">
             <a:spAutoFit/>
           </a:bodyPr>
           <a:lstStyle/>
@@ -16824,6 +17135,7 @@
           <a:lstStyle/>
           <a:p>
             <a:pPr algn="ctr"/>
+            <a:endParaRPr/>
           </a:p>
         </p:txBody>
       </p:sp>
@@ -16844,7 +17156,7 @@
           <a:noFill/>
         </p:spPr>
         <p:txBody>
-          <a:bodyPr wrap="square" lIns="0" rIns="0" tIns="0" bIns="0" anchor="t">
+          <a:bodyPr wrap="square" lIns="0" tIns="0" rIns="0" bIns="0" anchor="t">
             <a:spAutoFit/>
           </a:bodyPr>
           <a:lstStyle/>
@@ -16879,7 +17191,7 @@
           <a:noFill/>
         </p:spPr>
         <p:txBody>
-          <a:bodyPr wrap="square" lIns="0" rIns="0" tIns="0" bIns="0" anchor="t">
+          <a:bodyPr wrap="square" lIns="0" tIns="0" rIns="0" bIns="0" anchor="t">
             <a:spAutoFit/>
           </a:bodyPr>
           <a:lstStyle/>
@@ -16918,7 +17230,7 @@
           <a:noFill/>
         </p:spPr>
         <p:txBody>
-          <a:bodyPr wrap="square" lIns="0" rIns="0" tIns="0" bIns="0" anchor="t">
+          <a:bodyPr wrap="square" lIns="0" tIns="0" rIns="0" bIns="0" anchor="t">
             <a:spAutoFit/>
           </a:bodyPr>
           <a:lstStyle/>
@@ -16945,7 +17257,7 @@
 </file>
 
 <file path=ppt/slides/slide8.xml><?xml version="1.0" encoding="utf-8"?>
-<p:sld xmlns:a="http://schemas.openxmlformats.org/drawingml/2006/main" xmlns:p="http://schemas.openxmlformats.org/presentationml/2006/main" xmlns:r="http://schemas.openxmlformats.org/officeDocument/2006/relationships">
+<p:sld xmlns:a="http://schemas.openxmlformats.org/drawingml/2006/main" xmlns:r="http://schemas.openxmlformats.org/officeDocument/2006/relationships" xmlns:p="http://schemas.openxmlformats.org/presentationml/2006/main">
   <p:cSld>
     <p:bg>
       <p:bgPr>
@@ -16961,7 +17273,14 @@
         <p:cNvGrpSpPr/>
         <p:nvPr/>
       </p:nvGrpSpPr>
-      <p:grpSpPr/>
+      <p:grpSpPr>
+        <a:xfrm>
+          <a:off x="0" y="0"/>
+          <a:ext cx="0" cy="0"/>
+          <a:chOff x="0" y="0"/>
+          <a:chExt cx="0" cy="0"/>
+        </a:xfrm>
+      </p:grpSpPr>
       <p:sp>
         <p:nvSpPr>
           <p:cNvPr id="2" name="TextBox 1"/>
@@ -16979,7 +17298,7 @@
           <a:noFill/>
         </p:spPr>
         <p:txBody>
-          <a:bodyPr wrap="square" lIns="0" rIns="0" tIns="0" bIns="0" anchor="t">
+          <a:bodyPr wrap="square" lIns="0" tIns="0" rIns="0" bIns="0" anchor="t">
             <a:spAutoFit/>
           </a:bodyPr>
           <a:lstStyle/>
@@ -17014,7 +17333,7 @@
           <a:noFill/>
         </p:spPr>
         <p:txBody>
-          <a:bodyPr wrap="square" lIns="0" rIns="0" tIns="0" bIns="0" anchor="t">
+          <a:bodyPr wrap="square" lIns="0" tIns="0" rIns="0" bIns="0" anchor="t">
             <a:spAutoFit/>
           </a:bodyPr>
           <a:lstStyle/>
@@ -17081,6 +17400,7 @@
           <a:lstStyle/>
           <a:p>
             <a:pPr algn="ctr"/>
+            <a:endParaRPr/>
           </a:p>
         </p:txBody>
       </p:sp>
@@ -17093,7 +17413,7 @@
           <p:nvPr/>
         </p:nvPicPr>
         <p:blipFill>
-          <a:blip r:embed="rId2"/>
+          <a:blip r:embed="rId3"/>
           <a:stretch>
             <a:fillRect/>
           </a:stretch>
@@ -17123,10 +17443,22 @@
         <a:graphic>
           <a:graphicData uri="http://schemas.openxmlformats.org/drawingml/2006/table">
             <a:tbl>
-              <a:tblPr firstRow="0" bandRow="0"/>
+              <a:tblPr/>
               <a:tblGrid>
-                <a:gridCol w="4324846"/>
-                <a:gridCol w="2650827"/>
+                <a:gridCol w="4324846">
+                  <a:extLst>
+                    <a:ext uri="{9D8B030D-6E8A-4147-A177-3AD203B41FA5}">
+                      <a16:colId xmlns:a16="http://schemas.microsoft.com/office/drawing/2014/main" val="20000"/>
+                    </a:ext>
+                  </a:extLst>
+                </a:gridCol>
+                <a:gridCol w="2650827">
+                  <a:extLst>
+                    <a:ext uri="{9D8B030D-6E8A-4147-A177-3AD203B41FA5}">
+                      <a16:colId xmlns:a16="http://schemas.microsoft.com/office/drawing/2014/main" val="20001"/>
+                    </a:ext>
+                  </a:extLst>
+                </a:gridCol>
               </a:tblGrid>
               <a:tr h="538162">
                 <a:tc>
@@ -17213,6 +17545,11 @@
                     </a:solidFill>
                   </a:tcPr>
                 </a:tc>
+                <a:extLst>
+                  <a:ext uri="{0D108BD9-81ED-4DB2-BD59-A6C34878D82A}">
+                    <a16:rowId xmlns:a16="http://schemas.microsoft.com/office/drawing/2014/main" val="10000"/>
+                  </a:ext>
+                </a:extLst>
               </a:tr>
               <a:tr h="538162">
                 <a:tc>
@@ -17299,6 +17636,11 @@
                     </a:solidFill>
                   </a:tcPr>
                 </a:tc>
+                <a:extLst>
+                  <a:ext uri="{0D108BD9-81ED-4DB2-BD59-A6C34878D82A}">
+                    <a16:rowId xmlns:a16="http://schemas.microsoft.com/office/drawing/2014/main" val="10001"/>
+                  </a:ext>
+                </a:extLst>
               </a:tr>
               <a:tr h="538162">
                 <a:tc>
@@ -17385,6 +17727,11 @@
                     </a:solidFill>
                   </a:tcPr>
                 </a:tc>
+                <a:extLst>
+                  <a:ext uri="{0D108BD9-81ED-4DB2-BD59-A6C34878D82A}">
+                    <a16:rowId xmlns:a16="http://schemas.microsoft.com/office/drawing/2014/main" val="10002"/>
+                  </a:ext>
+                </a:extLst>
               </a:tr>
               <a:tr h="538162">
                 <a:tc>
@@ -17471,6 +17818,11 @@
                     </a:solidFill>
                   </a:tcPr>
                 </a:tc>
+                <a:extLst>
+                  <a:ext uri="{0D108BD9-81ED-4DB2-BD59-A6C34878D82A}">
+                    <a16:rowId xmlns:a16="http://schemas.microsoft.com/office/drawing/2014/main" val="10003"/>
+                  </a:ext>
+                </a:extLst>
               </a:tr>
               <a:tr h="538162">
                 <a:tc>
@@ -17557,6 +17909,11 @@
                     </a:solidFill>
                   </a:tcPr>
                 </a:tc>
+                <a:extLst>
+                  <a:ext uri="{0D108BD9-81ED-4DB2-BD59-A6C34878D82A}">
+                    <a16:rowId xmlns:a16="http://schemas.microsoft.com/office/drawing/2014/main" val="10004"/>
+                  </a:ext>
+                </a:extLst>
               </a:tr>
               <a:tr h="538162">
                 <a:tc>
@@ -17643,6 +18000,11 @@
                     </a:solidFill>
                   </a:tcPr>
                 </a:tc>
+                <a:extLst>
+                  <a:ext uri="{0D108BD9-81ED-4DB2-BD59-A6C34878D82A}">
+                    <a16:rowId xmlns:a16="http://schemas.microsoft.com/office/drawing/2014/main" val="10005"/>
+                  </a:ext>
+                </a:extLst>
               </a:tr>
               <a:tr h="538162">
                 <a:tc>
@@ -17729,6 +18091,11 @@
                     </a:solidFill>
                   </a:tcPr>
                 </a:tc>
+                <a:extLst>
+                  <a:ext uri="{0D108BD9-81ED-4DB2-BD59-A6C34878D82A}">
+                    <a16:rowId xmlns:a16="http://schemas.microsoft.com/office/drawing/2014/main" val="10006"/>
+                  </a:ext>
+                </a:extLst>
               </a:tr>
               <a:tr h="538162">
                 <a:tc>
@@ -17815,6 +18182,11 @@
                     </a:solidFill>
                   </a:tcPr>
                 </a:tc>
+                <a:extLst>
+                  <a:ext uri="{0D108BD9-81ED-4DB2-BD59-A6C34878D82A}">
+                    <a16:rowId xmlns:a16="http://schemas.microsoft.com/office/drawing/2014/main" val="10007"/>
+                  </a:ext>
+                </a:extLst>
               </a:tr>
             </a:tbl>
           </a:graphicData>
@@ -17837,7 +18209,7 @@
           <a:noFill/>
         </p:spPr>
         <p:txBody>
-          <a:bodyPr wrap="square" lIns="0" rIns="0" tIns="0" bIns="0" anchor="t">
+          <a:bodyPr wrap="square" lIns="0" tIns="0" rIns="0" bIns="0" anchor="t">
             <a:spAutoFit/>
           </a:bodyPr>
           <a:lstStyle/>
@@ -17864,7 +18236,7 @@
 </file>
 
 <file path=ppt/slides/slide9.xml><?xml version="1.0" encoding="utf-8"?>
-<p:sld xmlns:a="http://schemas.openxmlformats.org/drawingml/2006/main" xmlns:p="http://schemas.openxmlformats.org/presentationml/2006/main" xmlns:r="http://schemas.openxmlformats.org/officeDocument/2006/relationships">
+<p:sld xmlns:a="http://schemas.openxmlformats.org/drawingml/2006/main" xmlns:r="http://schemas.openxmlformats.org/officeDocument/2006/relationships" xmlns:p="http://schemas.openxmlformats.org/presentationml/2006/main">
   <p:cSld>
     <p:bg>
       <p:bgPr>
@@ -17880,7 +18252,14 @@
         <p:cNvGrpSpPr/>
         <p:nvPr/>
       </p:nvGrpSpPr>
-      <p:grpSpPr/>
+      <p:grpSpPr>
+        <a:xfrm>
+          <a:off x="0" y="0"/>
+          <a:ext cx="0" cy="0"/>
+          <a:chOff x="0" y="0"/>
+          <a:chExt cx="0" cy="0"/>
+        </a:xfrm>
+      </p:grpSpPr>
       <p:sp>
         <p:nvSpPr>
           <p:cNvPr id="2" name="TextBox 1"/>
@@ -17898,7 +18277,7 @@
           <a:noFill/>
         </p:spPr>
         <p:txBody>
-          <a:bodyPr wrap="square" lIns="0" rIns="0" tIns="0" bIns="0" anchor="t">
+          <a:bodyPr wrap="square" lIns="0" tIns="0" rIns="0" bIns="0" anchor="t">
             <a:spAutoFit/>
           </a:bodyPr>
           <a:lstStyle/>
@@ -17933,7 +18312,7 @@
           <a:noFill/>
         </p:spPr>
         <p:txBody>
-          <a:bodyPr wrap="square" lIns="0" rIns="0" tIns="0" bIns="0" anchor="t">
+          <a:bodyPr wrap="square" lIns="0" tIns="0" rIns="0" bIns="0" anchor="t">
             <a:spAutoFit/>
           </a:bodyPr>
           <a:lstStyle/>
@@ -18001,6 +18380,7 @@
           <a:lstStyle/>
           <a:p>
             <a:pPr algn="ctr"/>
+            <a:endParaRPr/>
           </a:p>
         </p:txBody>
       </p:sp>
@@ -18021,7 +18401,7 @@
           <a:noFill/>
         </p:spPr>
         <p:txBody>
-          <a:bodyPr wrap="square" lIns="0" rIns="0" tIns="0" bIns="0" anchor="t">
+          <a:bodyPr wrap="square" lIns="0" tIns="0" rIns="0" bIns="0" anchor="t">
             <a:spAutoFit/>
           </a:bodyPr>
           <a:lstStyle/>
@@ -18085,6 +18465,7 @@
           <a:lstStyle/>
           <a:p>
             <a:pPr algn="ctr"/>
+            <a:endParaRPr/>
           </a:p>
         </p:txBody>
       </p:sp>
@@ -18105,7 +18486,7 @@
           <a:noFill/>
         </p:spPr>
         <p:txBody>
-          <a:bodyPr wrap="square" lIns="0" rIns="0" tIns="0" bIns="0" anchor="t">
+          <a:bodyPr wrap="square" lIns="0" tIns="0" rIns="0" bIns="0" anchor="t">
             <a:spAutoFit/>
           </a:bodyPr>
           <a:lstStyle/>
@@ -18169,6 +18550,7 @@
           <a:lstStyle/>
           <a:p>
             <a:pPr algn="ctr"/>
+            <a:endParaRPr/>
           </a:p>
         </p:txBody>
       </p:sp>
@@ -18189,7 +18571,7 @@
           <a:noFill/>
         </p:spPr>
         <p:txBody>
-          <a:bodyPr wrap="square" lIns="0" rIns="0" tIns="0" bIns="0" anchor="t">
+          <a:bodyPr wrap="square" lIns="0" tIns="0" rIns="0" bIns="0" anchor="t">
             <a:spAutoFit/>
           </a:bodyPr>
           <a:lstStyle/>
@@ -18224,7 +18606,7 @@
           <a:noFill/>
         </p:spPr>
         <p:txBody>
-          <a:bodyPr wrap="square" lIns="0" rIns="0" tIns="0" bIns="0" anchor="t">
+          <a:bodyPr wrap="square" lIns="0" tIns="0" rIns="0" bIns="0" anchor="t">
             <a:spAutoFit/>
           </a:bodyPr>
           <a:lstStyle/>
@@ -18571,7 +18953,7 @@
 </file>
 
 <file path=ppt/theme/theme2.xml><?xml version="1.0" encoding="utf-8"?>
-<a:theme xmlns:a="http://schemas.openxmlformats.org/drawingml/2006/main" name="Office Theme">
+<a:theme xmlns:a="http://schemas.openxmlformats.org/drawingml/2006/main" name="Office 佈景主題">
   <a:themeElements>
     <a:clrScheme name="Office">
       <a:dk1>
@@ -18581,44 +18963,44 @@
         <a:sysClr val="window" lastClr="FFFFFF"/>
       </a:lt1>
       <a:dk2>
-        <a:srgbClr val="1F497D"/>
+        <a:srgbClr val="0E2841"/>
       </a:dk2>
       <a:lt2>
-        <a:srgbClr val="EEECE1"/>
+        <a:srgbClr val="E8E8E8"/>
       </a:lt2>
       <a:accent1>
-        <a:srgbClr val="4F81BD"/>
+        <a:srgbClr val="156082"/>
       </a:accent1>
       <a:accent2>
-        <a:srgbClr val="C0504D"/>
+        <a:srgbClr val="E97132"/>
       </a:accent2>
       <a:accent3>
-        <a:srgbClr val="9BBB59"/>
+        <a:srgbClr val="196B24"/>
       </a:accent3>
       <a:accent4>
-        <a:srgbClr val="8064A2"/>
+        <a:srgbClr val="0F9ED5"/>
       </a:accent4>
       <a:accent5>
-        <a:srgbClr val="4BACC6"/>
+        <a:srgbClr val="A02B93"/>
       </a:accent5>
       <a:accent6>
-        <a:srgbClr val="F79646"/>
+        <a:srgbClr val="4EA72E"/>
       </a:accent6>
       <a:hlink>
-        <a:srgbClr val="0000FF"/>
+        <a:srgbClr val="467886"/>
       </a:hlink>
       <a:folHlink>
-        <a:srgbClr val="800080"/>
+        <a:srgbClr val="96607D"/>
       </a:folHlink>
     </a:clrScheme>
     <a:fontScheme name="Office">
       <a:majorFont>
-        <a:latin typeface="Calibri"/>
+        <a:latin typeface="Aptos Display" panose="02110004020202020204"/>
         <a:ea typeface=""/>
         <a:cs typeface=""/>
-        <a:font script="Jpan" typeface="ＭＳ Ｐゴシック"/>
+        <a:font script="Jpan" typeface="游ゴシック Light"/>
         <a:font script="Hang" typeface="맑은 고딕"/>
-        <a:font script="Hans" typeface="宋体"/>
+        <a:font script="Hans" typeface="等线 Light"/>
         <a:font script="Hant" typeface="新細明體"/>
         <a:font script="Arab" typeface="Times New Roman"/>
         <a:font script="Hebr" typeface="Times New Roman"/>
@@ -18646,14 +19028,31 @@
         <a:font script="Viet" typeface="Times New Roman"/>
         <a:font script="Uigh" typeface="Microsoft Uighur"/>
         <a:font script="Geor" typeface="Sylfaen"/>
+        <a:font script="Armn" typeface="Arial"/>
+        <a:font script="Bugi" typeface="Leelawadee UI"/>
+        <a:font script="Bopo" typeface="Microsoft JhengHei"/>
+        <a:font script="Java" typeface="Javanese Text"/>
+        <a:font script="Lisu" typeface="Segoe UI"/>
+        <a:font script="Mymr" typeface="Myanmar Text"/>
+        <a:font script="Nkoo" typeface="Ebrima"/>
+        <a:font script="Olck" typeface="Nirmala UI"/>
+        <a:font script="Osma" typeface="Ebrima"/>
+        <a:font script="Phag" typeface="Phagspa"/>
+        <a:font script="Syrn" typeface="Estrangelo Edessa"/>
+        <a:font script="Syrj" typeface="Estrangelo Edessa"/>
+        <a:font script="Syre" typeface="Estrangelo Edessa"/>
+        <a:font script="Sora" typeface="Nirmala UI"/>
+        <a:font script="Tale" typeface="Microsoft Tai Le"/>
+        <a:font script="Talu" typeface="Microsoft New Tai Lue"/>
+        <a:font script="Tfng" typeface="Ebrima"/>
       </a:majorFont>
       <a:minorFont>
-        <a:latin typeface="Calibri"/>
+        <a:latin typeface="Aptos" panose="02110004020202020204"/>
         <a:ea typeface=""/>
         <a:cs typeface=""/>
-        <a:font script="Jpan" typeface="ＭＳ Ｐゴシック"/>
+        <a:font script="Jpan" typeface="游ゴシック"/>
         <a:font script="Hang" typeface="맑은 고딕"/>
-        <a:font script="Hans" typeface="宋体"/>
+        <a:font script="Hans" typeface="等线"/>
         <a:font script="Hant" typeface="新細明體"/>
         <a:font script="Arab" typeface="Arial"/>
         <a:font script="Hebr" typeface="Arial"/>
@@ -18681,6 +19080,23 @@
         <a:font script="Viet" typeface="Arial"/>
         <a:font script="Uigh" typeface="Microsoft Uighur"/>
         <a:font script="Geor" typeface="Sylfaen"/>
+        <a:font script="Armn" typeface="Arial"/>
+        <a:font script="Bugi" typeface="Leelawadee UI"/>
+        <a:font script="Bopo" typeface="Microsoft JhengHei"/>
+        <a:font script="Java" typeface="Javanese Text"/>
+        <a:font script="Lisu" typeface="Segoe UI"/>
+        <a:font script="Mymr" typeface="Myanmar Text"/>
+        <a:font script="Nkoo" typeface="Ebrima"/>
+        <a:font script="Olck" typeface="Nirmala UI"/>
+        <a:font script="Osma" typeface="Ebrima"/>
+        <a:font script="Phag" typeface="Phagspa"/>
+        <a:font script="Syrn" typeface="Estrangelo Edessa"/>
+        <a:font script="Syrj" typeface="Estrangelo Edessa"/>
+        <a:font script="Syre" typeface="Estrangelo Edessa"/>
+        <a:font script="Sora" typeface="Nirmala UI"/>
+        <a:font script="Tale" typeface="Microsoft Tai Le"/>
+        <a:font script="Talu" typeface="Microsoft New Tai Lue"/>
+        <a:font script="Tfng" typeface="Ebrima"/>
       </a:minorFont>
     </a:fontScheme>
     <a:fmtScheme name="Office">
@@ -18692,180 +19108,136 @@
           <a:gsLst>
             <a:gs pos="0">
               <a:schemeClr val="phClr">
-                <a:tint val="50000"/>
-                <a:satMod val="300000"/>
+                <a:lumMod val="110000"/>
+                <a:satMod val="105000"/>
+                <a:tint val="67000"/>
               </a:schemeClr>
             </a:gs>
-            <a:gs pos="35000">
+            <a:gs pos="50000">
               <a:schemeClr val="phClr">
-                <a:tint val="37000"/>
-                <a:satMod val="300000"/>
+                <a:lumMod val="105000"/>
+                <a:satMod val="103000"/>
+                <a:tint val="73000"/>
               </a:schemeClr>
             </a:gs>
             <a:gs pos="100000">
               <a:schemeClr val="phClr">
-                <a:tint val="15000"/>
-                <a:satMod val="350000"/>
+                <a:lumMod val="105000"/>
+                <a:satMod val="109000"/>
+                <a:tint val="81000"/>
               </a:schemeClr>
             </a:gs>
           </a:gsLst>
-          <a:lin ang="16200000" scaled="1"/>
+          <a:lin ang="5400000" scaled="0"/>
         </a:gradFill>
         <a:gradFill rotWithShape="1">
           <a:gsLst>
             <a:gs pos="0">
               <a:schemeClr val="phClr">
-                <a:tint val="100000"/>
+                <a:satMod val="103000"/>
+                <a:lumMod val="102000"/>
+                <a:tint val="94000"/>
+              </a:schemeClr>
+            </a:gs>
+            <a:gs pos="50000">
+              <a:schemeClr val="phClr">
+                <a:satMod val="110000"/>
+                <a:lumMod val="100000"/>
                 <a:shade val="100000"/>
-                <a:satMod val="130000"/>
               </a:schemeClr>
             </a:gs>
             <a:gs pos="100000">
               <a:schemeClr val="phClr">
-                <a:tint val="50000"/>
-                <a:shade val="100000"/>
-                <a:satMod val="350000"/>
+                <a:lumMod val="99000"/>
+                <a:satMod val="120000"/>
+                <a:shade val="78000"/>
               </a:schemeClr>
             </a:gs>
           </a:gsLst>
-          <a:lin ang="16200000" scaled="0"/>
+          <a:lin ang="5400000" scaled="0"/>
         </a:gradFill>
       </a:fillStyleLst>
       <a:lnStyleLst>
-        <a:ln w="9525" cap="flat" cmpd="sng" algn="ctr">
+        <a:ln w="12700" cap="flat" cmpd="sng" algn="ctr">
           <a:solidFill>
-            <a:schemeClr val="phClr">
-              <a:shade val="95000"/>
-              <a:satMod val="105000"/>
-            </a:schemeClr>
+            <a:schemeClr val="phClr"/>
           </a:solidFill>
           <a:prstDash val="solid"/>
+          <a:miter lim="800000"/>
+        </a:ln>
+        <a:ln w="19050" cap="flat" cmpd="sng" algn="ctr">
+          <a:solidFill>
+            <a:schemeClr val="phClr"/>
+          </a:solidFill>
+          <a:prstDash val="solid"/>
+          <a:miter lim="800000"/>
         </a:ln>
         <a:ln w="25400" cap="flat" cmpd="sng" algn="ctr">
           <a:solidFill>
             <a:schemeClr val="phClr"/>
           </a:solidFill>
           <a:prstDash val="solid"/>
-        </a:ln>
-        <a:ln w="38100" cap="flat" cmpd="sng" algn="ctr">
-          <a:solidFill>
-            <a:schemeClr val="phClr"/>
-          </a:solidFill>
-          <a:prstDash val="solid"/>
+          <a:miter lim="800000"/>
         </a:ln>
       </a:lnStyleLst>
       <a:effectStyleLst>
         <a:effectStyle>
+          <a:effectLst/>
+        </a:effectStyle>
+        <a:effectStyle>
+          <a:effectLst/>
+        </a:effectStyle>
+        <a:effectStyle>
           <a:effectLst>
-            <a:outerShdw blurRad="40000" dist="20000" dir="5400000" rotWithShape="0">
+            <a:outerShdw blurRad="57150" dist="19050" dir="5400000" algn="ctr" rotWithShape="0">
               <a:srgbClr val="000000">
-                <a:alpha val="38000"/>
+                <a:alpha val="63000"/>
               </a:srgbClr>
             </a:outerShdw>
           </a:effectLst>
-        </a:effectStyle>
-        <a:effectStyle>
-          <a:effectLst>
-            <a:outerShdw blurRad="40000" dist="23000" dir="5400000" rotWithShape="0">
-              <a:srgbClr val="000000">
-                <a:alpha val="35000"/>
-              </a:srgbClr>
-            </a:outerShdw>
-          </a:effectLst>
-        </a:effectStyle>
-        <a:effectStyle>
-          <a:effectLst>
-            <a:outerShdw blurRad="40000" dist="23000" dir="5400000" rotWithShape="0">
-              <a:srgbClr val="000000">
-                <a:alpha val="35000"/>
-              </a:srgbClr>
-            </a:outerShdw>
-          </a:effectLst>
-          <a:scene3d>
-            <a:camera prst="orthographicFront">
-              <a:rot lat="0" lon="0" rev="0"/>
-            </a:camera>
-            <a:lightRig rig="threePt" dir="t">
-              <a:rot lat="0" lon="0" rev="1200000"/>
-            </a:lightRig>
-          </a:scene3d>
-          <a:sp3d>
-            <a:bevelT w="63500" h="25400"/>
-          </a:sp3d>
         </a:effectStyle>
       </a:effectStyleLst>
       <a:bgFillStyleLst>
         <a:solidFill>
           <a:schemeClr val="phClr"/>
         </a:solidFill>
+        <a:solidFill>
+          <a:schemeClr val="phClr">
+            <a:tint val="95000"/>
+            <a:satMod val="170000"/>
+          </a:schemeClr>
+        </a:solidFill>
         <a:gradFill rotWithShape="1">
           <a:gsLst>
             <a:gs pos="0">
               <a:schemeClr val="phClr">
-                <a:tint val="40000"/>
-                <a:satMod val="350000"/>
+                <a:tint val="93000"/>
+                <a:satMod val="150000"/>
+                <a:shade val="98000"/>
+                <a:lumMod val="102000"/>
               </a:schemeClr>
             </a:gs>
-            <a:gs pos="40000">
+            <a:gs pos="50000">
               <a:schemeClr val="phClr">
-                <a:tint val="45000"/>
-                <a:shade val="99000"/>
-                <a:satMod val="350000"/>
+                <a:tint val="98000"/>
+                <a:satMod val="130000"/>
+                <a:shade val="90000"/>
+                <a:lumMod val="103000"/>
               </a:schemeClr>
             </a:gs>
             <a:gs pos="100000">
               <a:schemeClr val="phClr">
-                <a:shade val="20000"/>
-                <a:satMod val="255000"/>
+                <a:shade val="63000"/>
+                <a:satMod val="120000"/>
               </a:schemeClr>
             </a:gs>
           </a:gsLst>
-          <a:path path="circle">
-            <a:fillToRect l="50000" t="-80000" r="50000" b="180000"/>
-          </a:path>
-        </a:gradFill>
-        <a:gradFill rotWithShape="1">
-          <a:gsLst>
-            <a:gs pos="0">
-              <a:schemeClr val="phClr">
-                <a:tint val="80000"/>
-                <a:satMod val="300000"/>
-              </a:schemeClr>
-            </a:gs>
-            <a:gs pos="100000">
-              <a:schemeClr val="phClr">
-                <a:shade val="30000"/>
-                <a:satMod val="200000"/>
-              </a:schemeClr>
-            </a:gs>
-          </a:gsLst>
-          <a:path path="circle">
-            <a:fillToRect l="50000" t="50000" r="50000" b="50000"/>
-          </a:path>
+          <a:lin ang="5400000" scaled="0"/>
         </a:gradFill>
       </a:bgFillStyleLst>
     </a:fmtScheme>
   </a:themeElements>
   <a:objectDefaults>
-    <a:spDef>
-      <a:spPr/>
-      <a:bodyPr/>
-      <a:lstStyle/>
-      <a:style>
-        <a:lnRef idx="1">
-          <a:schemeClr val="accent1"/>
-        </a:lnRef>
-        <a:fillRef idx="3">
-          <a:schemeClr val="accent1"/>
-        </a:fillRef>
-        <a:effectRef idx="2">
-          <a:schemeClr val="accent1"/>
-        </a:effectRef>
-        <a:fontRef idx="minor">
-          <a:schemeClr val="lt1"/>
-        </a:fontRef>
-      </a:style>
-    </a:spDef>
     <a:lnDef>
       <a:spPr/>
       <a:bodyPr/>
@@ -18887,5 +19259,10 @@
     </a:lnDef>
   </a:objectDefaults>
   <a:extraClrSchemeLst/>
+  <a:extLst>
+    <a:ext uri="{05A4C25C-085E-4340-85A3-A5531E510DB2}">
+      <thm15:themeFamily xmlns:thm15="http://schemas.microsoft.com/office/thememl/2012/main" name="Office Theme" id="{2E142A2C-CD16-42D6-873A-C26D2A0506FA}" vid="{1BDDFF52-6CD6-40A5-AB3C-68EB2F1E4D0A}"/>
+    </a:ext>
+  </a:extLst>
 </a:theme>
 </file>
--- a/submission/stage1/ELEC5620_Stage1_Slides.pptx
+++ b/submission/stage1/ELEC5620_Stage1_Slides.pptx
@@ -525,7 +525,7 @@
           <a:lstStyle/>
           <a:p>
             <a:r>
-              <a:t>Speaker A. Hi, I'm Ziqi He, member A. We are Group 14 from the Monday 10 to 12 class, and this is AI Trip Planner, a one-person AI travel agency. Each of us will present our own part.</a:t>
+              <a:t>Hi, we are Group 14 from the Monday 10 to 12 class, and this is AI Trip Planner, a one-person AI travel agency.</a:t>
             </a:r>
           </a:p>
         </p:txBody>
@@ -595,7 +595,7 @@
           <a:lstStyle/>
           <a:p>
             <a:r>
-              <a:t>Speaker C. I'm Yi Qiao, member C. I own accommodation and budget. My ad hoc requirement: the hotel must fit the money left after flights, a budget overrun should swap to a cheaper hotel that still meets my rules, and an impossible budget should name the minimum. That gave my two use cases.</a:t>
+              <a:t>Member C owns accommodation and budget. The ad hoc requirement: the hotel must fit the money left after flights, a budget overrun should swap to a cheaper hotel that still meets the traveller's rules, and an impossible budget should name the minimum. That gave two use cases.</a:t>
             </a:r>
           </a:p>
         </p:txBody>
@@ -665,7 +665,7 @@
           <a:lstStyle/>
           <a:p>
             <a:r>
-              <a:t>Speaker C. The object diagram snapshots the planning board for a Tokyo trip that is 640 dollars over budget. The hotel prices are real fixture values; transport and dining are illustrative. Accommodation is asked to save 379 dollars, so it moves to the saver hotel.</a:t>
+              <a:t>The object diagram snapshots the planning board for a Tokyo trip that is 640 dollars over budget. The hotel prices are real fixture values; transport and dining are illustrative. Accommodation is asked to save 379 dollars, so it moves to the saver hotel.</a:t>
             </a:r>
           </a:p>
         </p:txBody>
@@ -735,7 +735,7 @@
           <a:lstStyle/>
           <a:p>
             <a:r>
-              <a:t>Speaker C. The collaboration shows roles, not classes: my budget code plays the judge that turns proposals into targeted revisions. The structured class shows the workflow's parts and its injected ports.</a:t>
+              <a:t>The collaboration shows roles, not classes: the budget code plays the judge that turns proposals into targeted revisions. The structured class shows the workflow's parts and its injected ports.</a:t>
             </a:r>
           </a:p>
         </p:txBody>
@@ -805,7 +805,7 @@
           <a:lstStyle/>
           <a:p>
             <a:r>
-              <a:t>Speaker C. In my activity diagram the LLM appears once, choosing one candidate id. Around it everything is deterministic: invalid output falls back to a rule, a booked stay skips the search, and prices are in cents.</a:t>
+              <a:t>In this activity diagram the LLM appears once, choosing one candidate id. Around it everything is deterministic: invalid output falls back to a rule, a booked stay skips the search, and prices are in cents.</a:t>
             </a:r>
           </a:p>
         </p:txBody>
@@ -875,7 +875,7 @@
           <a:lstStyle/>
           <a:p>
             <a:r>
-              <a:t>Speaker C. The sequence diagram shows an overrun: my detectConflicts sends a revision only to the agents that can cut, and round two is kept only because the plan score improved.</a:t>
+              <a:t>The sequence diagram shows an overrun: detectConflicts sends a revision only to the agents that can cut, and round two is kept only because the plan score improved.</a:t>
             </a:r>
           </a:p>
         </p:txBody>
@@ -945,7 +945,7 @@
           <a:lstStyle/>
           <a:p>
             <a:r>
-              <a:t>Speaker C. The state machine follows the accommodation section through one turn, and maps its internal states onto the three statuses the traveller sees. Over to D.</a:t>
+              <a:t>The state machine follows the accommodation section through one turn, and maps its internal states onto the three statuses the traveller sees.</a:t>
             </a:r>
           </a:p>
         </p:txBody>
@@ -1015,7 +1015,7 @@
           <a:lstStyle/>
           <a:p>
             <a:r>
-              <a:t>Speaker D. I'm Jiahang Bian, member D. Our class model has six diagrams drawn from the code. The spine runs from the workspace, through the coordinator and workflow, to specialists that reach tools and memory only through injected interfaces.</a:t>
+              <a:t>Our class model has six diagrams drawn from the code. The spine runs from the workspace, through the coordinator and workflow, to specialists that reach tools and memory only through injected interfaces.</a:t>
             </a:r>
           </a:p>
         </p:txBody>
@@ -1085,7 +1085,7 @@
           <a:lstStyle/>
           <a:p>
             <a:r>
-              <a:t>Speaker D. Every agent realises one Specialist interface, so the graph loops over them without knowing their models. The registry aggregates agents, while a plan is composed of its sections.</a:t>
+              <a:t>Every agent realises one Specialist interface, so the graph loops over them without knowing their models. The registry aggregates agents, while a plan is composed of its sections.</a:t>
             </a:r>
           </a:p>
         </p:txBody>
@@ -1155,7 +1155,7 @@
           <a:lstStyle/>
           <a:p>
             <a:r>
-              <a:t>Speaker D. We discarded a model-driven loop and free agent-to-agent chat, because limits and costs must be testable. We dropped approval checkpoints, since confirming applied nothing, and chose DeepSeek because it was about three times faster.</a:t>
+              <a:t>We discarded a model-driven loop and free agent-to-agent chat, because limits and costs must be testable. We dropped approval checkpoints, since confirming applied nothing, and chose DeepSeek because it was about three times faster.</a:t>
             </a:r>
           </a:p>
         </p:txBody>
@@ -1225,7 +1225,7 @@
           <a:lstStyle/>
           <a:p>
             <a:r>
-              <a:t>Speaker D. [About 25 seconds. Name your ad hoc requirement and use case, then point to where the LLM sits in each diagram and which code checks it. Replace the three placeholders with your diagrams.]</a:t>
+              <a:t>[About 25 seconds. Name member D's ad hoc requirement and use case, then point to where the LLM sits in each diagram and which code checks it. Replace the three placeholders with the diagrams.]</a:t>
             </a:r>
           </a:p>
         </p:txBody>
@@ -1295,7 +1295,7 @@
           <a:lstStyle/>
           <a:p>
             <a:r>
-              <a:t>Speaker A. Planning a trip means juggling many sites, and every choice constrains the others. A chatbot can write an itinerary, but it invents prices and never checks that the parts fit. So we built an agency where specialist agents plan together on real data, and code checks their work.</a:t>
+              <a:t>Planning a trip means juggling many sites, and every choice constrains the others. A chatbot can write an itinerary, but it invents prices and never checks that the parts fit. So we built an agency where specialist agents plan together on real data, and code checks their work.</a:t>
             </a:r>
           </a:p>
         </p:txBody>
@@ -1365,7 +1365,7 @@
           <a:lstStyle/>
           <a:p>
             <a:r>
-              <a:t>Speaker E. I'm Weihao Wang, member E. Six packages, each with an owner, all depend inward on the shared contracts, which depend on nothing. New specialists, providers or stores plug in behind existing interfaces.</a:t>
+              <a:t>Six packages, each with an owner, all depend inward on the shared contracts, which depend on nothing. New specialists, providers or stores plug in behind existing interfaces.</a:t>
             </a:r>
           </a:p>
         </p:txBody>
@@ -1435,7 +1435,7 @@
           <a:lstStyle/>
           <a:p>
             <a:r>
-              <a:t>Speaker E. It deploys as one serverless Next.js app. Memory, account sync and sign-in are optional, and without keys the same build runs fully on mock data.</a:t>
+              <a:t>It deploys as one serverless Next.js app. Memory, account sync and sign-in are optional, and without keys the same build runs fully on mock data.</a:t>
             </a:r>
           </a:p>
         </p:txBody>
@@ -1505,7 +1505,7 @@
           <a:lstStyle/>
           <a:p>
             <a:r>
-              <a:t>Speaker E. A change must trace to a requirement; a change to shared contracts needs a written decision. A pull request is accepted when CI passes, an end-to-end artifact exists, use case postconditions hold and the models are updated.</a:t>
+              <a:t>A change must trace to a requirement; a change to shared contracts needs a written decision. A pull request is accepted when CI passes, an end-to-end artifact exists, use case postconditions hold and the models are updated.</a:t>
             </a:r>
           </a:p>
         </p:txBody>
@@ -1575,7 +1575,7 @@
           <a:lstStyle/>
           <a:p>
             <a:r>
-              <a:t>Speaker E. [About 25 seconds. Name your ad hoc requirement and use case, then point to where the LLM sits in each diagram and which code checks it. Replace the three placeholders with your diagrams.]</a:t>
+              <a:t>[About 25 seconds. Name member E's ad hoc requirement and use case, then point to where the LLM sits in each diagram and which code checks it. Replace the three placeholders with the diagrams.]</a:t>
             </a:r>
           </a:p>
         </p:txBody>
@@ -1645,7 +1645,7 @@
           <a:lstStyle/>
           <a:p>
             <a:r>
-              <a:t>Speaker E. In short: models choose, code decides, and the traveller stays in control. Thank you for watching.</a:t>
+              <a:t>In short: models choose, code decides, and the traveller stays in control. Thank you for watching.</a:t>
             </a:r>
           </a:p>
         </p:txBody>
@@ -1715,7 +1715,7 @@
           <a:lstStyle/>
           <a:p>
             <a:r>
-              <a:t>Speaker A. There are two humans: the traveller, our customer, and the founder who runs the agency and tests the agents in our Agent Lab. Then seven AI roles: a coordinator that talks to the traveller, a supervisor that assigns work, and five specialists, each with its own prompt and tools.</a:t>
+              <a:t>There are two humans: the traveller, our customer, and the founder who runs the agency and tests the agents in our Agent Lab. Then seven AI roles: a coordinator that talks to the traveller, a supervisor that assigns work, and five specialists, each with its own prompt and tools.</a:t>
             </a:r>
           </a:p>
         </p:txBody>
@@ -1785,7 +1785,7 @@
           <a:lstStyle/>
           <a:p>
             <a:r>
-              <a:t>Speaker A. Our key design choice: the LangGraph workflow drives the agents, not the other way round. Specialists plan in stages on a shared board, code detects budget, time and route conflicts, and only the agents involved revise, for at most three rounds. If a model fails, a validated fallback keeps planning working.</a:t>
+              <a:t>Our key design choice: the LangGraph workflow drives the agents, not the other way round. Specialists plan in stages on a shared board, code detects budget, time and route conflicts, and only the agents involved revise, for at most three rounds. If a model fails, a validated fallback keeps planning working.</a:t>
             </a:r>
           </a:p>
         </p:txBody>
@@ -1855,7 +1855,7 @@
           <a:lstStyle/>
           <a:p>
             <a:r>
-              <a:t>Speaker A. [About 25 seconds. Name your ad hoc requirement and use case, then point to where the LLM sits in each diagram and which code checks it. Replace the three placeholders with your diagrams.]</a:t>
+              <a:t>[About 25 seconds. Name member A's ad hoc requirement and use case, then point to where the LLM sits in each diagram and which code checks it. Replace the three placeholders with the diagrams.]</a:t>
             </a:r>
           </a:p>
         </p:txBody>
@@ -1925,7 +1925,7 @@
           <a:lstStyle/>
           <a:p>
             <a:r>
-              <a:t>Speaker B. I'm Tingsong Jin, member B. We classified requirements into the agreed scope, mandatory capabilities and optional features. Each member owns two core features and one optional one, shown here. Every member also wrote an ad hoc requirement and broke it into functional, non-functional and constraint requirements.</a:t>
+              <a:t>We classified requirements into the agreed scope, mandatory capabilities and optional features. Each member owns two core features and one optional one, shown here. Every member also wrote an ad hoc requirement and broke it into functional, non-functional and constraint requirements.</a:t>
             </a:r>
           </a:p>
         </p:txBody>
@@ -1995,7 +1995,7 @@
           <a:lstStyle/>
           <a:p>
             <a:r>
-              <a:t>Speaker B. The feature diagram groups the system into seven areas, with mandatory, optional and alternative features, such as shared or individual rooms. We added cross-tree constraints and attached non-functional requirements, like money in integer cents.</a:t>
+              <a:t>The feature diagram groups the system into seven areas, with mandatory, optional and alternative features, such as shared or individual rooms. We added cross-tree constraints and attached non-functional requirements, like money in integer cents.</a:t>
             </a:r>
           </a:p>
         </p:txBody>
@@ -2065,7 +2065,7 @@
           <a:lstStyle/>
           <a:p>
             <a:r>
-              <a:t>Speaker B. The use case diagram has one traveller and three external systems. Each member wrote at least one full specification, and our behaviour diagrams come from those.</a:t>
+              <a:t>The use case diagram has one traveller and three external systems. Each member wrote at least one full specification, and our behaviour diagrams come from those.</a:t>
             </a:r>
           </a:p>
         </p:txBody>
@@ -2135,7 +2135,7 @@
           <a:lstStyle/>
           <a:p>
             <a:r>
-              <a:t>Speaker B. [About 25 seconds. Name your ad hoc requirement and use case, then point to where the LLM sits in each diagram and which code checks it. Replace the three placeholders with your diagrams.]</a:t>
+              <a:t>[About 25 seconds. Name member B's ad hoc requirement and use case, then point to where the LLM sits in each diagram and which code checks it. Replace the three placeholders with the diagrams.]</a:t>
             </a:r>
           </a:p>
         </p:txBody>
